--- a/source/Instructor Progress Test 3 Grams No FR/Instructor Progress Test 3 Grams No FR.pptx
+++ b/source/Instructor Progress Test 3 Grams No FR/Instructor Progress Test 3 Grams No FR.pptx
@@ -3142,11 +3142,11 @@
       </p:sp>
       <p:sp>
         <p:nvSpPr>
-          <p:cNvPr id="3" name="Rounded Rectangle 2"/>
+          <p:cNvPr id="3" name="Rounded Rectangle 2">
+            <a:hlinkClick r:id="rId2"/>
+          </p:cNvPr>
           <p:cNvSpPr/>
-          <p:nvPr>
-            <a:hlinkClick r:id="rId2"/>
-          </p:nvPr>
+          <p:nvPr/>
         </p:nvSpPr>
         <p:spPr>
           <a:xfrm>
@@ -3236,11 +3236,11 @@
       </p:sp>
       <p:sp>
         <p:nvSpPr>
-          <p:cNvPr id="5" name="Rounded Rectangle 4"/>
+          <p:cNvPr id="5" name="Rounded Rectangle 4">
+            <a:hlinkClick r:id="rId5"/>
+          </p:cNvPr>
           <p:cNvSpPr/>
-          <p:nvPr>
-            <a:hlinkClick r:id="rId5"/>
-          </p:nvPr>
+          <p:nvPr/>
         </p:nvSpPr>
         <p:spPr>
           <a:xfrm>
@@ -3346,11 +3346,11 @@
       </p:sp>
       <p:sp>
         <p:nvSpPr>
-          <p:cNvPr id="7" name="Rounded Rectangle 6"/>
+          <p:cNvPr id="7" name="Rounded Rectangle 6">
+            <a:hlinkClick r:id="rId10"/>
+          </p:cNvPr>
           <p:cNvSpPr/>
-          <p:nvPr>
-            <a:hlinkClick r:id="rId10"/>
-          </p:nvPr>
+          <p:nvPr/>
         </p:nvSpPr>
         <p:spPr>
           <a:xfrm>
@@ -3456,11 +3456,11 @@
       </p:sp>
       <p:sp>
         <p:nvSpPr>
-          <p:cNvPr id="9" name="Rounded Rectangle 8"/>
+          <p:cNvPr id="9" name="Rounded Rectangle 8">
+            <a:hlinkClick r:id="rId15"/>
+          </p:cNvPr>
           <p:cNvSpPr/>
-          <p:nvPr>
-            <a:hlinkClick r:id="rId15"/>
-          </p:nvPr>
+          <p:nvPr/>
         </p:nvSpPr>
         <p:spPr>
           <a:xfrm>
@@ -3566,11 +3566,11 @@
       </p:sp>
       <p:sp>
         <p:nvSpPr>
-          <p:cNvPr id="11" name="Rounded Rectangle 10"/>
+          <p:cNvPr id="11" name="Rounded Rectangle 10">
+            <a:hlinkClick r:id="rId20"/>
+          </p:cNvPr>
           <p:cNvSpPr/>
-          <p:nvPr>
-            <a:hlinkClick r:id="rId20"/>
-          </p:nvPr>
+          <p:nvPr/>
         </p:nvSpPr>
         <p:spPr>
           <a:xfrm>
@@ -3652,11 +3652,11 @@
       </p:sp>
       <p:sp>
         <p:nvSpPr>
-          <p:cNvPr id="13" name="Rounded Rectangle 12"/>
+          <p:cNvPr id="13" name="Rounded Rectangle 12">
+            <a:hlinkClick r:id="rId22"/>
+          </p:cNvPr>
           <p:cNvSpPr/>
-          <p:nvPr>
-            <a:hlinkClick r:id="rId22"/>
-          </p:nvPr>
+          <p:nvPr/>
         </p:nvSpPr>
         <p:spPr>
           <a:xfrm>
@@ -3738,11 +3738,11 @@
       </p:sp>
       <p:sp>
         <p:nvSpPr>
-          <p:cNvPr id="15" name="Rounded Rectangle 14"/>
+          <p:cNvPr id="15" name="Rounded Rectangle 14">
+            <a:hlinkClick r:id="rId24"/>
+          </p:cNvPr>
           <p:cNvSpPr/>
-          <p:nvPr>
-            <a:hlinkClick r:id="rId24"/>
-          </p:nvPr>
+          <p:nvPr/>
         </p:nvSpPr>
         <p:spPr>
           <a:xfrm>
@@ -3848,11 +3848,11 @@
       </p:sp>
       <p:sp>
         <p:nvSpPr>
-          <p:cNvPr id="17" name="Rounded Rectangle 16"/>
+          <p:cNvPr id="17" name="Rounded Rectangle 16">
+            <a:hlinkClick r:id="rId29"/>
+          </p:cNvPr>
           <p:cNvSpPr/>
-          <p:nvPr>
-            <a:hlinkClick r:id="rId29"/>
-          </p:nvPr>
+          <p:nvPr/>
         </p:nvSpPr>
         <p:spPr>
           <a:xfrm>
@@ -3950,11 +3950,11 @@
       </p:sp>
       <p:sp>
         <p:nvSpPr>
-          <p:cNvPr id="19" name="Rounded Rectangle 18"/>
+          <p:cNvPr id="19" name="Rounded Rectangle 18">
+            <a:hlinkClick r:id="rId33"/>
+          </p:cNvPr>
           <p:cNvSpPr/>
-          <p:nvPr>
-            <a:hlinkClick r:id="rId33"/>
-          </p:nvPr>
+          <p:nvPr/>
         </p:nvSpPr>
         <p:spPr>
           <a:xfrm>
@@ -4052,11 +4052,11 @@
       </p:sp>
       <p:sp>
         <p:nvSpPr>
-          <p:cNvPr id="21" name="Rounded Rectangle 20"/>
+          <p:cNvPr id="21" name="Rounded Rectangle 20">
+            <a:hlinkClick r:id="rId37"/>
+          </p:cNvPr>
           <p:cNvSpPr/>
-          <p:nvPr>
-            <a:hlinkClick r:id="rId37"/>
-          </p:nvPr>
+          <p:nvPr/>
         </p:nvSpPr>
         <p:spPr>
           <a:xfrm>
@@ -4146,11 +4146,11 @@
       </p:sp>
       <p:sp>
         <p:nvSpPr>
-          <p:cNvPr id="23" name="Rounded Rectangle 22"/>
+          <p:cNvPr id="23" name="Rounded Rectangle 22">
+            <a:hlinkClick r:id="rId40"/>
+          </p:cNvPr>
           <p:cNvSpPr/>
-          <p:nvPr>
-            <a:hlinkClick r:id="rId40"/>
-          </p:nvPr>
+          <p:nvPr/>
         </p:nvSpPr>
         <p:spPr>
           <a:xfrm>
@@ -4248,11 +4248,11 @@
       </p:sp>
       <p:sp>
         <p:nvSpPr>
-          <p:cNvPr id="25" name="Rounded Rectangle 24"/>
+          <p:cNvPr id="25" name="Rounded Rectangle 24">
+            <a:hlinkClick r:id="rId44"/>
+          </p:cNvPr>
           <p:cNvSpPr/>
-          <p:nvPr>
-            <a:hlinkClick r:id="rId44"/>
-          </p:nvPr>
+          <p:nvPr/>
         </p:nvSpPr>
         <p:spPr>
           <a:xfrm>
@@ -4334,11 +4334,11 @@
       </p:sp>
       <p:sp>
         <p:nvSpPr>
-          <p:cNvPr id="27" name="Rounded Rectangle 26"/>
+          <p:cNvPr id="27" name="Rounded Rectangle 26">
+            <a:hlinkClick r:id="rId46"/>
+          </p:cNvPr>
           <p:cNvSpPr/>
-          <p:nvPr>
-            <a:hlinkClick r:id="rId46"/>
-          </p:nvPr>
+          <p:nvPr/>
         </p:nvSpPr>
         <p:spPr>
           <a:xfrm>
@@ -4428,11 +4428,11 @@
       </p:sp>
       <p:sp>
         <p:nvSpPr>
-          <p:cNvPr id="29" name="Rounded Rectangle 28"/>
+          <p:cNvPr id="29" name="Rounded Rectangle 28">
+            <a:hlinkClick r:id="rId49"/>
+          </p:cNvPr>
           <p:cNvSpPr/>
-          <p:nvPr>
-            <a:hlinkClick r:id="rId49"/>
-          </p:nvPr>
+          <p:nvPr/>
         </p:nvSpPr>
         <p:spPr>
           <a:xfrm>
@@ -4530,11 +4530,11 @@
       </p:sp>
       <p:sp>
         <p:nvSpPr>
-          <p:cNvPr id="31" name="Rounded Rectangle 30"/>
+          <p:cNvPr id="31" name="Rounded Rectangle 30">
+            <a:hlinkClick r:id="rId53"/>
+          </p:cNvPr>
           <p:cNvSpPr/>
-          <p:nvPr>
-            <a:hlinkClick r:id="rId53"/>
-          </p:nvPr>
+          <p:nvPr/>
         </p:nvSpPr>
         <p:spPr>
           <a:xfrm>
@@ -4701,11 +4701,11 @@
       </p:sp>
       <p:sp>
         <p:nvSpPr>
-          <p:cNvPr id="3" name="Rounded Rectangle 2"/>
+          <p:cNvPr id="3" name="Rounded Rectangle 2">
+            <a:hlinkClick r:id="rId2"/>
+          </p:cNvPr>
           <p:cNvSpPr/>
-          <p:nvPr>
-            <a:hlinkClick r:id="rId2"/>
-          </p:nvPr>
+          <p:nvPr/>
         </p:nvSpPr>
         <p:spPr>
           <a:xfrm>
@@ -4811,11 +4811,11 @@
       </p:sp>
       <p:sp>
         <p:nvSpPr>
-          <p:cNvPr id="5" name="Rounded Rectangle 4"/>
+          <p:cNvPr id="5" name="Rounded Rectangle 4">
+            <a:hlinkClick r:id="rId7"/>
+          </p:cNvPr>
           <p:cNvSpPr/>
-          <p:nvPr>
-            <a:hlinkClick r:id="rId7"/>
-          </p:nvPr>
+          <p:nvPr/>
         </p:nvSpPr>
         <p:spPr>
           <a:xfrm>
@@ -4921,11 +4921,11 @@
       </p:sp>
       <p:sp>
         <p:nvSpPr>
-          <p:cNvPr id="7" name="Rounded Rectangle 6"/>
+          <p:cNvPr id="7" name="Rounded Rectangle 6">
+            <a:hlinkClick r:id="rId12"/>
+          </p:cNvPr>
           <p:cNvSpPr/>
-          <p:nvPr>
-            <a:hlinkClick r:id="rId12"/>
-          </p:nvPr>
+          <p:nvPr/>
         </p:nvSpPr>
         <p:spPr>
           <a:xfrm>
@@ -5007,11 +5007,11 @@
       </p:sp>
       <p:sp>
         <p:nvSpPr>
-          <p:cNvPr id="9" name="Rounded Rectangle 8"/>
+          <p:cNvPr id="9" name="Rounded Rectangle 8">
+            <a:hlinkClick r:id="rId14"/>
+          </p:cNvPr>
           <p:cNvSpPr/>
-          <p:nvPr>
-            <a:hlinkClick r:id="rId14"/>
-          </p:nvPr>
+          <p:nvPr/>
         </p:nvSpPr>
         <p:spPr>
           <a:xfrm>
@@ -5117,11 +5117,11 @@
       </p:sp>
       <p:sp>
         <p:nvSpPr>
-          <p:cNvPr id="11" name="Rounded Rectangle 10"/>
+          <p:cNvPr id="11" name="Rounded Rectangle 10">
+            <a:hlinkClick r:id="rId19"/>
+          </p:cNvPr>
           <p:cNvSpPr/>
-          <p:nvPr>
-            <a:hlinkClick r:id="rId19"/>
-          </p:nvPr>
+          <p:nvPr/>
         </p:nvSpPr>
         <p:spPr>
           <a:xfrm>
@@ -5211,11 +5211,11 @@
       </p:sp>
       <p:sp>
         <p:nvSpPr>
-          <p:cNvPr id="13" name="Rounded Rectangle 12"/>
+          <p:cNvPr id="13" name="Rounded Rectangle 12">
+            <a:hlinkClick r:id="rId22"/>
+          </p:cNvPr>
           <p:cNvSpPr/>
-          <p:nvPr>
-            <a:hlinkClick r:id="rId22"/>
-          </p:nvPr>
+          <p:nvPr/>
         </p:nvSpPr>
         <p:spPr>
           <a:xfrm>
@@ -5297,11 +5297,11 @@
       </p:sp>
       <p:sp>
         <p:nvSpPr>
-          <p:cNvPr id="15" name="Rounded Rectangle 14"/>
+          <p:cNvPr id="15" name="Rounded Rectangle 14">
+            <a:hlinkClick r:id="rId24"/>
+          </p:cNvPr>
           <p:cNvSpPr/>
-          <p:nvPr>
-            <a:hlinkClick r:id="rId24"/>
-          </p:nvPr>
+          <p:nvPr/>
         </p:nvSpPr>
         <p:spPr>
           <a:xfrm>
@@ -5407,11 +5407,11 @@
       </p:sp>
       <p:sp>
         <p:nvSpPr>
-          <p:cNvPr id="17" name="Rounded Rectangle 16"/>
+          <p:cNvPr id="17" name="Rounded Rectangle 16">
+            <a:hlinkClick r:id="rId29"/>
+          </p:cNvPr>
           <p:cNvSpPr/>
-          <p:nvPr>
-            <a:hlinkClick r:id="rId29"/>
-          </p:nvPr>
+          <p:nvPr/>
         </p:nvSpPr>
         <p:spPr>
           <a:xfrm>
@@ -5501,11 +5501,11 @@
       </p:sp>
       <p:sp>
         <p:nvSpPr>
-          <p:cNvPr id="19" name="Rounded Rectangle 18"/>
+          <p:cNvPr id="19" name="Rounded Rectangle 18">
+            <a:hlinkClick r:id="rId32"/>
+          </p:cNvPr>
           <p:cNvSpPr/>
-          <p:nvPr>
-            <a:hlinkClick r:id="rId32"/>
-          </p:nvPr>
+          <p:nvPr/>
         </p:nvSpPr>
         <p:spPr>
           <a:xfrm>
@@ -5603,11 +5603,11 @@
       </p:sp>
       <p:sp>
         <p:nvSpPr>
-          <p:cNvPr id="21" name="Rounded Rectangle 20"/>
+          <p:cNvPr id="21" name="Rounded Rectangle 20">
+            <a:hlinkClick r:id="rId36"/>
+          </p:cNvPr>
           <p:cNvSpPr/>
-          <p:nvPr>
-            <a:hlinkClick r:id="rId36"/>
-          </p:nvPr>
+          <p:nvPr/>
         </p:nvSpPr>
         <p:spPr>
           <a:xfrm>
@@ -5689,11 +5689,11 @@
       </p:sp>
       <p:sp>
         <p:nvSpPr>
-          <p:cNvPr id="23" name="Rounded Rectangle 22"/>
+          <p:cNvPr id="23" name="Rounded Rectangle 22">
+            <a:hlinkClick r:id="rId38"/>
+          </p:cNvPr>
           <p:cNvSpPr/>
-          <p:nvPr>
-            <a:hlinkClick r:id="rId38"/>
-          </p:nvPr>
+          <p:nvPr/>
         </p:nvSpPr>
         <p:spPr>
           <a:xfrm>
@@ -5799,11 +5799,11 @@
       </p:sp>
       <p:sp>
         <p:nvSpPr>
-          <p:cNvPr id="25" name="Rounded Rectangle 24"/>
+          <p:cNvPr id="25" name="Rounded Rectangle 24">
+            <a:hlinkClick r:id="rId43"/>
+          </p:cNvPr>
           <p:cNvSpPr/>
-          <p:nvPr>
-            <a:hlinkClick r:id="rId43"/>
-          </p:nvPr>
+          <p:nvPr/>
         </p:nvSpPr>
         <p:spPr>
           <a:xfrm>
@@ -5885,11 +5885,11 @@
       </p:sp>
       <p:sp>
         <p:nvSpPr>
-          <p:cNvPr id="27" name="Rounded Rectangle 26"/>
+          <p:cNvPr id="27" name="Rounded Rectangle 26">
+            <a:hlinkClick r:id="rId45"/>
+          </p:cNvPr>
           <p:cNvSpPr/>
-          <p:nvPr>
-            <a:hlinkClick r:id="rId45"/>
-          </p:nvPr>
+          <p:nvPr/>
         </p:nvSpPr>
         <p:spPr>
           <a:xfrm>
@@ -5987,11 +5987,11 @@
       </p:sp>
       <p:sp>
         <p:nvSpPr>
-          <p:cNvPr id="29" name="Rounded Rectangle 28"/>
+          <p:cNvPr id="29" name="Rounded Rectangle 28">
+            <a:hlinkClick r:id="rId49"/>
+          </p:cNvPr>
           <p:cNvSpPr/>
-          <p:nvPr>
-            <a:hlinkClick r:id="rId49"/>
-          </p:nvPr>
+          <p:nvPr/>
         </p:nvSpPr>
         <p:spPr>
           <a:xfrm>
@@ -6073,11 +6073,11 @@
       </p:sp>
       <p:sp>
         <p:nvSpPr>
-          <p:cNvPr id="31" name="Rounded Rectangle 30"/>
+          <p:cNvPr id="31" name="Rounded Rectangle 30">
+            <a:hlinkClick r:id="rId51"/>
+          </p:cNvPr>
           <p:cNvSpPr/>
-          <p:nvPr>
-            <a:hlinkClick r:id="rId51"/>
-          </p:nvPr>
+          <p:nvPr/>
         </p:nvSpPr>
         <p:spPr>
           <a:xfrm>

--- a/source/Instructor Progress Test 3 Grams No FR/Instructor Progress Test 3 Grams No FR.pptx
+++ b/source/Instructor Progress Test 3 Grams No FR/Instructor Progress Test 3 Grams No FR.pptx
@@ -7,6 +7,8 @@
   <p:sldIdLst>
     <p:sldId id="256" r:id="rId7"/>
     <p:sldId id="257" r:id="rId8"/>
+    <p:sldId id="258" r:id="rId9"/>
+    <p:sldId id="259" r:id="rId10"/>
   </p:sldIdLst>
   <p:sldSz cx="12188952" cy="6858000" type="screen4x3"/>
   <p:notesSz cx="6858000" cy="9144000"/>
@@ -3091,120 +3093,48 @@
       <p:grpSpPr/>
       <p:sp>
         <p:nvSpPr>
-          <p:cNvPr id="2" name="Rectangle 1"/>
-          <p:cNvSpPr/>
+          <p:cNvPr id="2" name="TextBox 1"/>
+          <p:cNvSpPr txBox="1"/>
           <p:nvPr/>
         </p:nvSpPr>
         <p:spPr>
           <a:xfrm>
-            <a:off x="0" y="0"/>
-            <a:ext cx="12188952" cy="548640"/>
+            <a:off x="914400" y="2377440"/>
+            <a:ext cx="10360152" cy="1280160"/>
           </a:xfrm>
           <a:prstGeom prst="rect">
             <a:avLst/>
           </a:prstGeom>
-          <a:solidFill>
-            <a:srgbClr val="1F3A5F"/>
-          </a:solidFill>
-          <a:ln>
-            <a:noFill/>
-          </a:ln>
-        </p:spPr>
-        <p:style>
-          <a:lnRef idx="1">
-            <a:schemeClr val="accent1"/>
-          </a:lnRef>
-          <a:fillRef idx="3">
-            <a:schemeClr val="accent1"/>
-          </a:fillRef>
-          <a:effectRef idx="2">
-            <a:schemeClr val="accent1"/>
-          </a:effectRef>
-          <a:fontRef idx="minor">
-            <a:schemeClr val="lt1"/>
-          </a:fontRef>
-        </p:style>
-        <p:txBody>
-          <a:bodyPr rtlCol="0" anchor="ctr" lIns="182880" rIns="182880"/>
+          <a:noFill/>
+        </p:spPr>
+        <p:txBody>
+          <a:bodyPr wrap="square">
+            <a:spAutoFit/>
+          </a:bodyPr>
           <a:lstStyle/>
           <a:p>
             <a:pPr algn="ctr"/>
             <a:r>
-              <a:rPr sz="2000" b="1">
-                <a:solidFill>
-                  <a:srgbClr val="FFFFFF"/>
-                </a:solidFill>
-              </a:rPr>
-              <a:t>Instructor Progress Test 3 Grams No FR — Page 1 of 2</a:t>
-            </a:r>
-          </a:p>
-        </p:txBody>
-      </p:sp>
-      <p:sp>
-        <p:nvSpPr>
-          <p:cNvPr id="3" name="Rounded Rectangle 2"/>
-          <p:cNvSpPr/>
-          <p:nvPr>
-            <a:hlinkClick r:id="rId2"/>
-          </p:nvPr>
-        </p:nvSpPr>
-        <p:spPr>
-          <a:xfrm>
-            <a:off x="365760" y="731520"/>
-            <a:ext cx="2200046" cy="365760"/>
-          </a:xfrm>
-          <a:prstGeom prst="roundRect">
-            <a:avLst/>
-          </a:prstGeom>
-          <a:solidFill>
-            <a:srgbClr val="E8EEF7"/>
-          </a:solidFill>
-          <a:ln>
-            <a:solidFill>
-              <a:srgbClr val="1F3A5F"/>
-            </a:solidFill>
-          </a:ln>
-        </p:spPr>
-        <p:style>
-          <a:lnRef idx="1">
-            <a:schemeClr val="accent1"/>
-          </a:lnRef>
-          <a:fillRef idx="3">
-            <a:schemeClr val="accent1"/>
-          </a:fillRef>
-          <a:effectRef idx="2">
-            <a:schemeClr val="accent1"/>
-          </a:effectRef>
-          <a:fontRef idx="minor">
-            <a:schemeClr val="lt1"/>
-          </a:fontRef>
-        </p:style>
-        <p:txBody>
-          <a:bodyPr rtlCol="0" anchor="ctr" lIns="45720" rIns="45720"/>
-          <a:lstStyle/>
-          <a:p>
-            <a:pPr algn="ctr"/>
-            <a:r>
-              <a:rPr sz="900">
+              <a:rPr sz="4000" b="1">
                 <a:solidFill>
                   <a:srgbClr val="1F3A5F"/>
                 </a:solidFill>
               </a:rPr>
-              <a:t>Gram 1: Imperial-class, Category 1, Coruscant</a:t>
-            </a:r>
-          </a:p>
-        </p:txBody>
-      </p:sp>
-      <p:sp>
-        <p:nvSpPr>
-          <p:cNvPr id="4" name="TextBox 3"/>
+              <a:t>Welcome to Instructor Progress Test 3 Grams No FR</a:t>
+            </a:r>
+          </a:p>
+        </p:txBody>
+      </p:sp>
+      <p:sp>
+        <p:nvSpPr>
+          <p:cNvPr id="3" name="TextBox 2"/>
           <p:cNvSpPr txBox="1"/>
           <p:nvPr/>
         </p:nvSpPr>
         <p:spPr>
           <a:xfrm>
-            <a:off x="365760" y="1115568"/>
-            <a:ext cx="2200046" cy="1447800"/>
+            <a:off x="914400" y="3840480"/>
+            <a:ext cx="10360152" cy="731520"/>
           </a:xfrm>
           <a:prstGeom prst="rect">
             <a:avLst/>
@@ -3212,1420 +3142,19 @@
           <a:noFill/>
         </p:spPr>
         <p:txBody>
-          <a:bodyPr wrap="square">
+          <a:bodyPr wrap="none">
             <a:spAutoFit/>
           </a:bodyPr>
           <a:lstStyle/>
           <a:p>
-            <a:r>
-              <a:rPr sz="800">
-                <a:hlinkClick r:id="rId3"/>
-              </a:rPr>
-              <a:t>Lofar 1</a:t>
-            </a:r>
-          </a:p>
-          <a:p>
-            <a:r>
-              <a:rPr sz="800">
-                <a:hlinkClick r:id="rId4"/>
-              </a:rPr>
-              <a:t>Lofar 2</a:t>
-            </a:r>
-          </a:p>
-        </p:txBody>
-      </p:sp>
-      <p:sp>
-        <p:nvSpPr>
-          <p:cNvPr id="5" name="Rounded Rectangle 4"/>
-          <p:cNvSpPr/>
-          <p:nvPr>
-            <a:hlinkClick r:id="rId5"/>
-          </p:nvPr>
-        </p:nvSpPr>
-        <p:spPr>
-          <a:xfrm>
-            <a:off x="2657246" y="731520"/>
-            <a:ext cx="2200046" cy="365760"/>
-          </a:xfrm>
-          <a:prstGeom prst="roundRect">
-            <a:avLst/>
-          </a:prstGeom>
-          <a:solidFill>
-            <a:srgbClr val="E8EEF7"/>
-          </a:solidFill>
-          <a:ln>
-            <a:solidFill>
-              <a:srgbClr val="1F3A5F"/>
-            </a:solidFill>
-          </a:ln>
-        </p:spPr>
-        <p:style>
-          <a:lnRef idx="1">
-            <a:schemeClr val="accent1"/>
-          </a:lnRef>
-          <a:fillRef idx="3">
-            <a:schemeClr val="accent1"/>
-          </a:fillRef>
-          <a:effectRef idx="2">
-            <a:schemeClr val="accent1"/>
-          </a:effectRef>
-          <a:fontRef idx="minor">
-            <a:schemeClr val="lt1"/>
-          </a:fontRef>
-        </p:style>
-        <p:txBody>
-          <a:bodyPr rtlCol="0" anchor="ctr" lIns="45720" rIns="45720"/>
-          <a:lstStyle/>
-          <a:p>
             <a:pPr algn="ctr"/>
             <a:r>
-              <a:rPr sz="900">
+              <a:rPr sz="2400">
                 <a:solidFill>
                   <a:srgbClr val="1F3A5F"/>
                 </a:solidFill>
               </a:rPr>
-              <a:t>Gram 2: Acclamator-class, Category 3, Bespin</a:t>
-            </a:r>
-          </a:p>
-        </p:txBody>
-      </p:sp>
-      <p:sp>
-        <p:nvSpPr>
-          <p:cNvPr id="6" name="TextBox 5"/>
-          <p:cNvSpPr txBox="1"/>
-          <p:nvPr/>
-        </p:nvSpPr>
-        <p:spPr>
-          <a:xfrm>
-            <a:off x="2657246" y="1115568"/>
-            <a:ext cx="2200046" cy="1447800"/>
-          </a:xfrm>
-          <a:prstGeom prst="rect">
-            <a:avLst/>
-          </a:prstGeom>
-          <a:noFill/>
-        </p:spPr>
-        <p:txBody>
-          <a:bodyPr wrap="square">
-            <a:spAutoFit/>
-          </a:bodyPr>
-          <a:lstStyle/>
-          <a:p>
-            <a:r>
-              <a:rPr sz="800">
-                <a:hlinkClick r:id="rId6"/>
-              </a:rPr>
-              <a:t>Lofar 1</a:t>
-            </a:r>
-          </a:p>
-          <a:p>
-            <a:r>
-              <a:rPr sz="800">
-                <a:hlinkClick r:id="rId7"/>
-              </a:rPr>
-              <a:t>Lofar 2</a:t>
-            </a:r>
-          </a:p>
-          <a:p>
-            <a:r>
-              <a:rPr sz="800">
-                <a:hlinkClick r:id="rId8"/>
-              </a:rPr>
-              <a:t>Lofar 3</a:t>
-            </a:r>
-          </a:p>
-          <a:p>
-            <a:r>
-              <a:rPr sz="800">
-                <a:hlinkClick r:id="rId9"/>
-              </a:rPr>
-              <a:t>Lofar 4</a:t>
-            </a:r>
-          </a:p>
-        </p:txBody>
-      </p:sp>
-      <p:sp>
-        <p:nvSpPr>
-          <p:cNvPr id="7" name="Rounded Rectangle 6"/>
-          <p:cNvSpPr/>
-          <p:nvPr>
-            <a:hlinkClick r:id="rId10"/>
-          </p:nvPr>
-        </p:nvSpPr>
-        <p:spPr>
-          <a:xfrm>
-            <a:off x="4948732" y="731520"/>
-            <a:ext cx="2200046" cy="365760"/>
-          </a:xfrm>
-          <a:prstGeom prst="roundRect">
-            <a:avLst/>
-          </a:prstGeom>
-          <a:solidFill>
-            <a:srgbClr val="E8EEF7"/>
-          </a:solidFill>
-          <a:ln>
-            <a:solidFill>
-              <a:srgbClr val="1F3A5F"/>
-            </a:solidFill>
-          </a:ln>
-        </p:spPr>
-        <p:style>
-          <a:lnRef idx="1">
-            <a:schemeClr val="accent1"/>
-          </a:lnRef>
-          <a:fillRef idx="3">
-            <a:schemeClr val="accent1"/>
-          </a:fillRef>
-          <a:effectRef idx="2">
-            <a:schemeClr val="accent1"/>
-          </a:effectRef>
-          <a:fontRef idx="minor">
-            <a:schemeClr val="lt1"/>
-          </a:fontRef>
-        </p:style>
-        <p:txBody>
-          <a:bodyPr rtlCol="0" anchor="ctr" lIns="45720" rIns="45720"/>
-          <a:lstStyle/>
-          <a:p>
-            <a:pPr algn="ctr"/>
-            <a:r>
-              <a:rPr sz="900">
-                <a:solidFill>
-                  <a:srgbClr val="1F3A5F"/>
-                </a:solidFill>
-              </a:rPr>
-              <a:t>Gram 3: Voyager, Category 4, Hoth</a:t>
-            </a:r>
-          </a:p>
-        </p:txBody>
-      </p:sp>
-      <p:sp>
-        <p:nvSpPr>
-          <p:cNvPr id="8" name="TextBox 7"/>
-          <p:cNvSpPr txBox="1"/>
-          <p:nvPr/>
-        </p:nvSpPr>
-        <p:spPr>
-          <a:xfrm>
-            <a:off x="4948732" y="1115568"/>
-            <a:ext cx="2200046" cy="1447800"/>
-          </a:xfrm>
-          <a:prstGeom prst="rect">
-            <a:avLst/>
-          </a:prstGeom>
-          <a:noFill/>
-        </p:spPr>
-        <p:txBody>
-          <a:bodyPr wrap="square">
-            <a:spAutoFit/>
-          </a:bodyPr>
-          <a:lstStyle/>
-          <a:p>
-            <a:r>
-              <a:rPr sz="800">
-                <a:hlinkClick r:id="rId11"/>
-              </a:rPr>
-              <a:t>Lofar 1</a:t>
-            </a:r>
-          </a:p>
-          <a:p>
-            <a:r>
-              <a:rPr sz="800">
-                <a:hlinkClick r:id="rId12"/>
-              </a:rPr>
-              <a:t>Lofar 2</a:t>
-            </a:r>
-          </a:p>
-          <a:p>
-            <a:r>
-              <a:rPr sz="800">
-                <a:hlinkClick r:id="rId13"/>
-              </a:rPr>
-              <a:t>Lofar 3</a:t>
-            </a:r>
-          </a:p>
-          <a:p>
-            <a:r>
-              <a:rPr sz="800">
-                <a:hlinkClick r:id="rId14"/>
-              </a:rPr>
-              <a:t>Lofar 4</a:t>
-            </a:r>
-          </a:p>
-        </p:txBody>
-      </p:sp>
-      <p:sp>
-        <p:nvSpPr>
-          <p:cNvPr id="9" name="Rounded Rectangle 8"/>
-          <p:cNvSpPr/>
-          <p:nvPr>
-            <a:hlinkClick r:id="rId15"/>
-          </p:nvPr>
-        </p:nvSpPr>
-        <p:spPr>
-          <a:xfrm>
-            <a:off x="7240219" y="731520"/>
-            <a:ext cx="2200046" cy="365760"/>
-          </a:xfrm>
-          <a:prstGeom prst="roundRect">
-            <a:avLst/>
-          </a:prstGeom>
-          <a:solidFill>
-            <a:srgbClr val="E8EEF7"/>
-          </a:solidFill>
-          <a:ln>
-            <a:solidFill>
-              <a:srgbClr val="1F3A5F"/>
-            </a:solidFill>
-          </a:ln>
-        </p:spPr>
-        <p:style>
-          <a:lnRef idx="1">
-            <a:schemeClr val="accent1"/>
-          </a:lnRef>
-          <a:fillRef idx="3">
-            <a:schemeClr val="accent1"/>
-          </a:fillRef>
-          <a:effectRef idx="2">
-            <a:schemeClr val="accent1"/>
-          </a:effectRef>
-          <a:fontRef idx="minor">
-            <a:schemeClr val="lt1"/>
-          </a:fontRef>
-        </p:style>
-        <p:txBody>
-          <a:bodyPr rtlCol="0" anchor="ctr" lIns="45720" rIns="45720"/>
-          <a:lstStyle/>
-          <a:p>
-            <a:pPr algn="ctr"/>
-            <a:r>
-              <a:rPr sz="900">
-                <a:solidFill>
-                  <a:srgbClr val="1F3A5F"/>
-                </a:solidFill>
-              </a:rPr>
-              <a:t>Gram 4: Venator-class contact bearing 274, codename Betazed</a:t>
-            </a:r>
-          </a:p>
-        </p:txBody>
-      </p:sp>
-      <p:sp>
-        <p:nvSpPr>
-          <p:cNvPr id="10" name="TextBox 9"/>
-          <p:cNvSpPr txBox="1"/>
-          <p:nvPr/>
-        </p:nvSpPr>
-        <p:spPr>
-          <a:xfrm>
-            <a:off x="7240219" y="1115568"/>
-            <a:ext cx="2200046" cy="1447800"/>
-          </a:xfrm>
-          <a:prstGeom prst="rect">
-            <a:avLst/>
-          </a:prstGeom>
-          <a:noFill/>
-        </p:spPr>
-        <p:txBody>
-          <a:bodyPr wrap="square">
-            <a:spAutoFit/>
-          </a:bodyPr>
-          <a:lstStyle/>
-          <a:p>
-            <a:r>
-              <a:rPr sz="800">
-                <a:hlinkClick r:id="rId16"/>
-              </a:rPr>
-              <a:t>Lofar 1</a:t>
-            </a:r>
-          </a:p>
-          <a:p>
-            <a:r>
-              <a:rPr sz="800">
-                <a:hlinkClick r:id="rId17"/>
-              </a:rPr>
-              <a:t>Lofar 2</a:t>
-            </a:r>
-          </a:p>
-          <a:p>
-            <a:r>
-              <a:rPr sz="800">
-                <a:hlinkClick r:id="rId18"/>
-              </a:rPr>
-              <a:t>Lofar 3</a:t>
-            </a:r>
-          </a:p>
-          <a:p>
-            <a:r>
-              <a:rPr sz="800">
-                <a:hlinkClick r:id="rId19"/>
-              </a:rPr>
-              <a:t>Lofar 4</a:t>
-            </a:r>
-          </a:p>
-        </p:txBody>
-      </p:sp>
-      <p:sp>
-        <p:nvSpPr>
-          <p:cNvPr id="11" name="Rounded Rectangle 10"/>
-          <p:cNvSpPr/>
-          <p:nvPr>
-            <a:hlinkClick r:id="rId20"/>
-          </p:nvPr>
-        </p:nvSpPr>
-        <p:spPr>
-          <a:xfrm>
-            <a:off x="9531705" y="731520"/>
-            <a:ext cx="2200046" cy="365760"/>
-          </a:xfrm>
-          <a:prstGeom prst="roundRect">
-            <a:avLst/>
-          </a:prstGeom>
-          <a:solidFill>
-            <a:srgbClr val="E8EEF7"/>
-          </a:solidFill>
-          <a:ln>
-            <a:solidFill>
-              <a:srgbClr val="1F3A5F"/>
-            </a:solidFill>
-          </a:ln>
-        </p:spPr>
-        <p:style>
-          <a:lnRef idx="1">
-            <a:schemeClr val="accent1"/>
-          </a:lnRef>
-          <a:fillRef idx="3">
-            <a:schemeClr val="accent1"/>
-          </a:fillRef>
-          <a:effectRef idx="2">
-            <a:schemeClr val="accent1"/>
-          </a:effectRef>
-          <a:fontRef idx="minor">
-            <a:schemeClr val="lt1"/>
-          </a:fontRef>
-        </p:style>
-        <p:txBody>
-          <a:bodyPr rtlCol="0" anchor="ctr" lIns="45720" rIns="45720"/>
-          <a:lstStyle/>
-          <a:p>
-            <a:pPr algn="ctr"/>
-            <a:r>
-              <a:rPr sz="900">
-                <a:solidFill>
-                  <a:srgbClr val="1F3A5F"/>
-                </a:solidFill>
-              </a:rPr>
-              <a:t>Gram 5: Defiant contact bearing 256, codename Tatooine</a:t>
-            </a:r>
-          </a:p>
-        </p:txBody>
-      </p:sp>
-      <p:sp>
-        <p:nvSpPr>
-          <p:cNvPr id="12" name="TextBox 11"/>
-          <p:cNvSpPr txBox="1"/>
-          <p:nvPr/>
-        </p:nvSpPr>
-        <p:spPr>
-          <a:xfrm>
-            <a:off x="9531705" y="1115568"/>
-            <a:ext cx="2200046" cy="1447800"/>
-          </a:xfrm>
-          <a:prstGeom prst="rect">
-            <a:avLst/>
-          </a:prstGeom>
-          <a:noFill/>
-        </p:spPr>
-        <p:txBody>
-          <a:bodyPr wrap="square">
-            <a:spAutoFit/>
-          </a:bodyPr>
-          <a:lstStyle/>
-          <a:p>
-            <a:r>
-              <a:rPr sz="800">
-                <a:hlinkClick r:id="rId21"/>
-              </a:rPr>
-              <a:t>Lofar 1</a:t>
-            </a:r>
-          </a:p>
-        </p:txBody>
-      </p:sp>
-      <p:sp>
-        <p:nvSpPr>
-          <p:cNvPr id="13" name="Rounded Rectangle 12"/>
-          <p:cNvSpPr/>
-          <p:nvPr>
-            <a:hlinkClick r:id="rId22"/>
-          </p:nvPr>
-        </p:nvSpPr>
-        <p:spPr>
-          <a:xfrm>
-            <a:off x="365760" y="2682240"/>
-            <a:ext cx="2200046" cy="365760"/>
-          </a:xfrm>
-          <a:prstGeom prst="roundRect">
-            <a:avLst/>
-          </a:prstGeom>
-          <a:solidFill>
-            <a:srgbClr val="E8EEF7"/>
-          </a:solidFill>
-          <a:ln>
-            <a:solidFill>
-              <a:srgbClr val="1F3A5F"/>
-            </a:solidFill>
-          </a:ln>
-        </p:spPr>
-        <p:style>
-          <a:lnRef idx="1">
-            <a:schemeClr val="accent1"/>
-          </a:lnRef>
-          <a:fillRef idx="3">
-            <a:schemeClr val="accent1"/>
-          </a:fillRef>
-          <a:effectRef idx="2">
-            <a:schemeClr val="accent1"/>
-          </a:effectRef>
-          <a:fontRef idx="minor">
-            <a:schemeClr val="lt1"/>
-          </a:fontRef>
-        </p:style>
-        <p:txBody>
-          <a:bodyPr rtlCol="0" anchor="ctr" lIns="45720" rIns="45720"/>
-          <a:lstStyle/>
-          <a:p>
-            <a:pPr algn="ctr"/>
-            <a:r>
-              <a:rPr sz="900">
-                <a:solidFill>
-                  <a:srgbClr val="1F3A5F"/>
-                </a:solidFill>
-              </a:rPr>
-              <a:t>Gram 6: Slave I contact bearing 174, codename Cardassia</a:t>
-            </a:r>
-          </a:p>
-        </p:txBody>
-      </p:sp>
-      <p:sp>
-        <p:nvSpPr>
-          <p:cNvPr id="14" name="TextBox 13"/>
-          <p:cNvSpPr txBox="1"/>
-          <p:nvPr/>
-        </p:nvSpPr>
-        <p:spPr>
-          <a:xfrm>
-            <a:off x="365760" y="3066288"/>
-            <a:ext cx="2200046" cy="1447800"/>
-          </a:xfrm>
-          <a:prstGeom prst="rect">
-            <a:avLst/>
-          </a:prstGeom>
-          <a:noFill/>
-        </p:spPr>
-        <p:txBody>
-          <a:bodyPr wrap="square">
-            <a:spAutoFit/>
-          </a:bodyPr>
-          <a:lstStyle/>
-          <a:p>
-            <a:r>
-              <a:rPr sz="800">
-                <a:hlinkClick r:id="rId23"/>
-              </a:rPr>
-              <a:t>Lofar 1</a:t>
-            </a:r>
-          </a:p>
-        </p:txBody>
-      </p:sp>
-      <p:sp>
-        <p:nvSpPr>
-          <p:cNvPr id="15" name="Rounded Rectangle 14"/>
-          <p:cNvSpPr/>
-          <p:nvPr>
-            <a:hlinkClick r:id="rId24"/>
-          </p:nvPr>
-        </p:nvSpPr>
-        <p:spPr>
-          <a:xfrm>
-            <a:off x="2657246" y="2682240"/>
-            <a:ext cx="2200046" cy="365760"/>
-          </a:xfrm>
-          <a:prstGeom prst="roundRect">
-            <a:avLst/>
-          </a:prstGeom>
-          <a:solidFill>
-            <a:srgbClr val="E8EEF7"/>
-          </a:solidFill>
-          <a:ln>
-            <a:solidFill>
-              <a:srgbClr val="1F3A5F"/>
-            </a:solidFill>
-          </a:ln>
-        </p:spPr>
-        <p:style>
-          <a:lnRef idx="1">
-            <a:schemeClr val="accent1"/>
-          </a:lnRef>
-          <a:fillRef idx="3">
-            <a:schemeClr val="accent1"/>
-          </a:fillRef>
-          <a:effectRef idx="2">
-            <a:schemeClr val="accent1"/>
-          </a:effectRef>
-          <a:fontRef idx="minor">
-            <a:schemeClr val="lt1"/>
-          </a:fontRef>
-        </p:style>
-        <p:txBody>
-          <a:bodyPr rtlCol="0" anchor="ctr" lIns="45720" rIns="45720"/>
-          <a:lstStyle/>
-          <a:p>
-            <a:pPr algn="ctr"/>
-            <a:r>
-              <a:rPr sz="900">
-                <a:solidFill>
-                  <a:srgbClr val="1F3A5F"/>
-                </a:solidFill>
-              </a:rPr>
-              <a:t>Gram 7: Ghost, Category 1, Trill</a:t>
-            </a:r>
-          </a:p>
-        </p:txBody>
-      </p:sp>
-      <p:sp>
-        <p:nvSpPr>
-          <p:cNvPr id="16" name="TextBox 15"/>
-          <p:cNvSpPr txBox="1"/>
-          <p:nvPr/>
-        </p:nvSpPr>
-        <p:spPr>
-          <a:xfrm>
-            <a:off x="2657246" y="3066288"/>
-            <a:ext cx="2200046" cy="1447800"/>
-          </a:xfrm>
-          <a:prstGeom prst="rect">
-            <a:avLst/>
-          </a:prstGeom>
-          <a:noFill/>
-        </p:spPr>
-        <p:txBody>
-          <a:bodyPr wrap="square">
-            <a:spAutoFit/>
-          </a:bodyPr>
-          <a:lstStyle/>
-          <a:p>
-            <a:r>
-              <a:rPr sz="800">
-                <a:hlinkClick r:id="rId25"/>
-              </a:rPr>
-              <a:t>Lofar 1</a:t>
-            </a:r>
-          </a:p>
-          <a:p>
-            <a:r>
-              <a:rPr sz="800">
-                <a:hlinkClick r:id="rId26"/>
-              </a:rPr>
-              <a:t>Lofar 2</a:t>
-            </a:r>
-          </a:p>
-          <a:p>
-            <a:r>
-              <a:rPr sz="800">
-                <a:hlinkClick r:id="rId27"/>
-              </a:rPr>
-              <a:t>Lofar 3</a:t>
-            </a:r>
-          </a:p>
-          <a:p>
-            <a:r>
-              <a:rPr sz="800">
-                <a:hlinkClick r:id="rId28"/>
-              </a:rPr>
-              <a:t>Lofar 4</a:t>
-            </a:r>
-          </a:p>
-        </p:txBody>
-      </p:sp>
-      <p:sp>
-        <p:nvSpPr>
-          <p:cNvPr id="17" name="Rounded Rectangle 16"/>
-          <p:cNvSpPr/>
-          <p:nvPr>
-            <a:hlinkClick r:id="rId29"/>
-          </p:nvPr>
-        </p:nvSpPr>
-        <p:spPr>
-          <a:xfrm>
-            <a:off x="4948732" y="2682240"/>
-            <a:ext cx="2200046" cy="365760"/>
-          </a:xfrm>
-          <a:prstGeom prst="roundRect">
-            <a:avLst/>
-          </a:prstGeom>
-          <a:solidFill>
-            <a:srgbClr val="E8EEF7"/>
-          </a:solidFill>
-          <a:ln>
-            <a:solidFill>
-              <a:srgbClr val="1F3A5F"/>
-            </a:solidFill>
-          </a:ln>
-        </p:spPr>
-        <p:style>
-          <a:lnRef idx="1">
-            <a:schemeClr val="accent1"/>
-          </a:lnRef>
-          <a:fillRef idx="3">
-            <a:schemeClr val="accent1"/>
-          </a:fillRef>
-          <a:effectRef idx="2">
-            <a:schemeClr val="accent1"/>
-          </a:effectRef>
-          <a:fontRef idx="minor">
-            <a:schemeClr val="lt1"/>
-          </a:fontRef>
-        </p:style>
-        <p:txBody>
-          <a:bodyPr rtlCol="0" anchor="ctr" lIns="45720" rIns="45720"/>
-          <a:lstStyle/>
-          <a:p>
-            <a:pPr algn="ctr"/>
-            <a:r>
-              <a:rPr sz="900">
-                <a:solidFill>
-                  <a:srgbClr val="1F3A5F"/>
-                </a:solidFill>
-              </a:rPr>
-              <a:t>Gram 8: A-wing contact bearing 061, codename Romulus</a:t>
-            </a:r>
-          </a:p>
-        </p:txBody>
-      </p:sp>
-      <p:sp>
-        <p:nvSpPr>
-          <p:cNvPr id="18" name="TextBox 17"/>
-          <p:cNvSpPr txBox="1"/>
-          <p:nvPr/>
-        </p:nvSpPr>
-        <p:spPr>
-          <a:xfrm>
-            <a:off x="4948732" y="3066288"/>
-            <a:ext cx="2200046" cy="1447800"/>
-          </a:xfrm>
-          <a:prstGeom prst="rect">
-            <a:avLst/>
-          </a:prstGeom>
-          <a:noFill/>
-        </p:spPr>
-        <p:txBody>
-          <a:bodyPr wrap="square">
-            <a:spAutoFit/>
-          </a:bodyPr>
-          <a:lstStyle/>
-          <a:p>
-            <a:r>
-              <a:rPr sz="800">
-                <a:hlinkClick r:id="rId30"/>
-              </a:rPr>
-              <a:t>Lofar 1</a:t>
-            </a:r>
-          </a:p>
-          <a:p>
-            <a:r>
-              <a:rPr sz="800">
-                <a:hlinkClick r:id="rId31"/>
-              </a:rPr>
-              <a:t>Lofar 2</a:t>
-            </a:r>
-          </a:p>
-          <a:p>
-            <a:r>
-              <a:rPr sz="800">
-                <a:hlinkClick r:id="rId32"/>
-              </a:rPr>
-              <a:t>Lofar 3</a:t>
-            </a:r>
-          </a:p>
-        </p:txBody>
-      </p:sp>
-      <p:sp>
-        <p:nvSpPr>
-          <p:cNvPr id="19" name="Rounded Rectangle 18"/>
-          <p:cNvSpPr/>
-          <p:nvPr>
-            <a:hlinkClick r:id="rId33"/>
-          </p:nvPr>
-        </p:nvSpPr>
-        <p:spPr>
-          <a:xfrm>
-            <a:off x="7240219" y="2682240"/>
-            <a:ext cx="2200046" cy="365760"/>
-          </a:xfrm>
-          <a:prstGeom prst="roundRect">
-            <a:avLst/>
-          </a:prstGeom>
-          <a:solidFill>
-            <a:srgbClr val="E8EEF7"/>
-          </a:solidFill>
-          <a:ln>
-            <a:solidFill>
-              <a:srgbClr val="1F3A5F"/>
-            </a:solidFill>
-          </a:ln>
-        </p:spPr>
-        <p:style>
-          <a:lnRef idx="1">
-            <a:schemeClr val="accent1"/>
-          </a:lnRef>
-          <a:fillRef idx="3">
-            <a:schemeClr val="accent1"/>
-          </a:fillRef>
-          <a:effectRef idx="2">
-            <a:schemeClr val="accent1"/>
-          </a:effectRef>
-          <a:fontRef idx="minor">
-            <a:schemeClr val="lt1"/>
-          </a:fontRef>
-        </p:style>
-        <p:txBody>
-          <a:bodyPr rtlCol="0" anchor="ctr" lIns="45720" rIns="45720"/>
-          <a:lstStyle/>
-          <a:p>
-            <a:pPr algn="ctr"/>
-            <a:r>
-              <a:rPr sz="900">
-                <a:solidFill>
-                  <a:srgbClr val="1F3A5F"/>
-                </a:solidFill>
-              </a:rPr>
-              <a:t>Gram 10: Razor Crest, Category 4, Kobol</a:t>
-            </a:r>
-          </a:p>
-        </p:txBody>
-      </p:sp>
-      <p:sp>
-        <p:nvSpPr>
-          <p:cNvPr id="20" name="TextBox 19"/>
-          <p:cNvSpPr txBox="1"/>
-          <p:nvPr/>
-        </p:nvSpPr>
-        <p:spPr>
-          <a:xfrm>
-            <a:off x="7240219" y="3066288"/>
-            <a:ext cx="2200046" cy="1447800"/>
-          </a:xfrm>
-          <a:prstGeom prst="rect">
-            <a:avLst/>
-          </a:prstGeom>
-          <a:noFill/>
-        </p:spPr>
-        <p:txBody>
-          <a:bodyPr wrap="square">
-            <a:spAutoFit/>
-          </a:bodyPr>
-          <a:lstStyle/>
-          <a:p>
-            <a:r>
-              <a:rPr sz="800">
-                <a:hlinkClick r:id="rId34"/>
-              </a:rPr>
-              <a:t>Lofar 1</a:t>
-            </a:r>
-          </a:p>
-          <a:p>
-            <a:r>
-              <a:rPr sz="800">
-                <a:hlinkClick r:id="rId35"/>
-              </a:rPr>
-              <a:t>Lofar 2</a:t>
-            </a:r>
-          </a:p>
-          <a:p>
-            <a:r>
-              <a:rPr sz="800">
-                <a:hlinkClick r:id="rId36"/>
-              </a:rPr>
-              <a:t>Lofar 3</a:t>
-            </a:r>
-          </a:p>
-        </p:txBody>
-      </p:sp>
-      <p:sp>
-        <p:nvSpPr>
-          <p:cNvPr id="21" name="Rounded Rectangle 20"/>
-          <p:cNvSpPr/>
-          <p:nvPr>
-            <a:hlinkClick r:id="rId37"/>
-          </p:nvPr>
-        </p:nvSpPr>
-        <p:spPr>
-          <a:xfrm>
-            <a:off x="9531705" y="2682240"/>
-            <a:ext cx="2200046" cy="365760"/>
-          </a:xfrm>
-          <a:prstGeom prst="roundRect">
-            <a:avLst/>
-          </a:prstGeom>
-          <a:solidFill>
-            <a:srgbClr val="E8EEF7"/>
-          </a:solidFill>
-          <a:ln>
-            <a:solidFill>
-              <a:srgbClr val="1F3A5F"/>
-            </a:solidFill>
-          </a:ln>
-        </p:spPr>
-        <p:style>
-          <a:lnRef idx="1">
-            <a:schemeClr val="accent1"/>
-          </a:lnRef>
-          <a:fillRef idx="3">
-            <a:schemeClr val="accent1"/>
-          </a:fillRef>
-          <a:effectRef idx="2">
-            <a:schemeClr val="accent1"/>
-          </a:effectRef>
-          <a:fontRef idx="minor">
-            <a:schemeClr val="lt1"/>
-          </a:fontRef>
-        </p:style>
-        <p:txBody>
-          <a:bodyPr rtlCol="0" anchor="ctr" lIns="45720" rIns="45720"/>
-          <a:lstStyle/>
-          <a:p>
-            <a:pPr algn="ctr"/>
-            <a:r>
-              <a:rPr sz="900">
-                <a:solidFill>
-                  <a:srgbClr val="1F3A5F"/>
-                </a:solidFill>
-              </a:rPr>
-              <a:t>Gram 11: Lambda Shuttle, Category 4, Cardassia</a:t>
-            </a:r>
-          </a:p>
-        </p:txBody>
-      </p:sp>
-      <p:sp>
-        <p:nvSpPr>
-          <p:cNvPr id="22" name="TextBox 21"/>
-          <p:cNvSpPr txBox="1"/>
-          <p:nvPr/>
-        </p:nvSpPr>
-        <p:spPr>
-          <a:xfrm>
-            <a:off x="9531705" y="3066288"/>
-            <a:ext cx="2200046" cy="1447800"/>
-          </a:xfrm>
-          <a:prstGeom prst="rect">
-            <a:avLst/>
-          </a:prstGeom>
-          <a:noFill/>
-        </p:spPr>
-        <p:txBody>
-          <a:bodyPr wrap="square">
-            <a:spAutoFit/>
-          </a:bodyPr>
-          <a:lstStyle/>
-          <a:p>
-            <a:r>
-              <a:rPr sz="800">
-                <a:hlinkClick r:id="rId38"/>
-              </a:rPr>
-              <a:t>Lofar 1</a:t>
-            </a:r>
-          </a:p>
-          <a:p>
-            <a:r>
-              <a:rPr sz="800">
-                <a:hlinkClick r:id="rId39"/>
-              </a:rPr>
-              <a:t>Lofar 2</a:t>
-            </a:r>
-          </a:p>
-        </p:txBody>
-      </p:sp>
-      <p:sp>
-        <p:nvSpPr>
-          <p:cNvPr id="23" name="Rounded Rectangle 22"/>
-          <p:cNvSpPr/>
-          <p:nvPr>
-            <a:hlinkClick r:id="rId40"/>
-          </p:nvPr>
-        </p:nvSpPr>
-        <p:spPr>
-          <a:xfrm>
-            <a:off x="365760" y="4632960"/>
-            <a:ext cx="2200046" cy="365760"/>
-          </a:xfrm>
-          <a:prstGeom prst="roundRect">
-            <a:avLst/>
-          </a:prstGeom>
-          <a:solidFill>
-            <a:srgbClr val="E8EEF7"/>
-          </a:solidFill>
-          <a:ln>
-            <a:solidFill>
-              <a:srgbClr val="1F3A5F"/>
-            </a:solidFill>
-          </a:ln>
-        </p:spPr>
-        <p:style>
-          <a:lnRef idx="1">
-            <a:schemeClr val="accent1"/>
-          </a:lnRef>
-          <a:fillRef idx="3">
-            <a:schemeClr val="accent1"/>
-          </a:fillRef>
-          <a:effectRef idx="2">
-            <a:schemeClr val="accent1"/>
-          </a:effectRef>
-          <a:fontRef idx="minor">
-            <a:schemeClr val="lt1"/>
-          </a:fontRef>
-        </p:style>
-        <p:txBody>
-          <a:bodyPr rtlCol="0" anchor="ctr" lIns="45720" rIns="45720"/>
-          <a:lstStyle/>
-          <a:p>
-            <a:pPr algn="ctr"/>
-            <a:r>
-              <a:rPr sz="900">
-                <a:solidFill>
-                  <a:srgbClr val="1F3A5F"/>
-                </a:solidFill>
-              </a:rPr>
-              <a:t>Gram 12: Constitution-class contact bearing 225, codename Tatooine</a:t>
-            </a:r>
-          </a:p>
-        </p:txBody>
-      </p:sp>
-      <p:sp>
-        <p:nvSpPr>
-          <p:cNvPr id="24" name="TextBox 23"/>
-          <p:cNvSpPr txBox="1"/>
-          <p:nvPr/>
-        </p:nvSpPr>
-        <p:spPr>
-          <a:xfrm>
-            <a:off x="365760" y="5017008"/>
-            <a:ext cx="2200046" cy="1447800"/>
-          </a:xfrm>
-          <a:prstGeom prst="rect">
-            <a:avLst/>
-          </a:prstGeom>
-          <a:noFill/>
-        </p:spPr>
-        <p:txBody>
-          <a:bodyPr wrap="square">
-            <a:spAutoFit/>
-          </a:bodyPr>
-          <a:lstStyle/>
-          <a:p>
-            <a:r>
-              <a:rPr sz="800">
-                <a:hlinkClick r:id="rId41"/>
-              </a:rPr>
-              <a:t>Lofar 1</a:t>
-            </a:r>
-          </a:p>
-          <a:p>
-            <a:r>
-              <a:rPr sz="800">
-                <a:hlinkClick r:id="rId42"/>
-              </a:rPr>
-              <a:t>Lofar 2</a:t>
-            </a:r>
-          </a:p>
-          <a:p>
-            <a:r>
-              <a:rPr sz="800">
-                <a:hlinkClick r:id="rId43"/>
-              </a:rPr>
-              <a:t>Lofar 3</a:t>
-            </a:r>
-          </a:p>
-        </p:txBody>
-      </p:sp>
-      <p:sp>
-        <p:nvSpPr>
-          <p:cNvPr id="25" name="Rounded Rectangle 24"/>
-          <p:cNvSpPr/>
-          <p:nvPr>
-            <a:hlinkClick r:id="rId44"/>
-          </p:nvPr>
-        </p:nvSpPr>
-        <p:spPr>
-          <a:xfrm>
-            <a:off x="2657246" y="4632960"/>
-            <a:ext cx="2200046" cy="365760"/>
-          </a:xfrm>
-          <a:prstGeom prst="roundRect">
-            <a:avLst/>
-          </a:prstGeom>
-          <a:solidFill>
-            <a:srgbClr val="E8EEF7"/>
-          </a:solidFill>
-          <a:ln>
-            <a:solidFill>
-              <a:srgbClr val="1F3A5F"/>
-            </a:solidFill>
-          </a:ln>
-        </p:spPr>
-        <p:style>
-          <a:lnRef idx="1">
-            <a:schemeClr val="accent1"/>
-          </a:lnRef>
-          <a:fillRef idx="3">
-            <a:schemeClr val="accent1"/>
-          </a:fillRef>
-          <a:effectRef idx="2">
-            <a:schemeClr val="accent1"/>
-          </a:effectRef>
-          <a:fontRef idx="minor">
-            <a:schemeClr val="lt1"/>
-          </a:fontRef>
-        </p:style>
-        <p:txBody>
-          <a:bodyPr rtlCol="0" anchor="ctr" lIns="45720" rIns="45720"/>
-          <a:lstStyle/>
-          <a:p>
-            <a:pPr algn="ctr"/>
-            <a:r>
-              <a:rPr sz="900">
-                <a:solidFill>
-                  <a:srgbClr val="1F3A5F"/>
-                </a:solidFill>
-              </a:rPr>
-              <a:t>Gram 13: Slave I contact bearing 078, codename Kobol</a:t>
-            </a:r>
-          </a:p>
-        </p:txBody>
-      </p:sp>
-      <p:sp>
-        <p:nvSpPr>
-          <p:cNvPr id="26" name="TextBox 25"/>
-          <p:cNvSpPr txBox="1"/>
-          <p:nvPr/>
-        </p:nvSpPr>
-        <p:spPr>
-          <a:xfrm>
-            <a:off x="2657246" y="5017008"/>
-            <a:ext cx="2200046" cy="1447800"/>
-          </a:xfrm>
-          <a:prstGeom prst="rect">
-            <a:avLst/>
-          </a:prstGeom>
-          <a:noFill/>
-        </p:spPr>
-        <p:txBody>
-          <a:bodyPr wrap="square">
-            <a:spAutoFit/>
-          </a:bodyPr>
-          <a:lstStyle/>
-          <a:p>
-            <a:r>
-              <a:rPr sz="800">
-                <a:hlinkClick r:id="rId45"/>
-              </a:rPr>
-              <a:t>Lofar 1</a:t>
-            </a:r>
-          </a:p>
-        </p:txBody>
-      </p:sp>
-      <p:sp>
-        <p:nvSpPr>
-          <p:cNvPr id="27" name="Rounded Rectangle 26"/>
-          <p:cNvSpPr/>
-          <p:nvPr>
-            <a:hlinkClick r:id="rId46"/>
-          </p:nvPr>
-        </p:nvSpPr>
-        <p:spPr>
-          <a:xfrm>
-            <a:off x="4948732" y="4632960"/>
-            <a:ext cx="2200046" cy="365760"/>
-          </a:xfrm>
-          <a:prstGeom prst="roundRect">
-            <a:avLst/>
-          </a:prstGeom>
-          <a:solidFill>
-            <a:srgbClr val="E8EEF7"/>
-          </a:solidFill>
-          <a:ln>
-            <a:solidFill>
-              <a:srgbClr val="1F3A5F"/>
-            </a:solidFill>
-          </a:ln>
-        </p:spPr>
-        <p:style>
-          <a:lnRef idx="1">
-            <a:schemeClr val="accent1"/>
-          </a:lnRef>
-          <a:fillRef idx="3">
-            <a:schemeClr val="accent1"/>
-          </a:fillRef>
-          <a:effectRef idx="2">
-            <a:schemeClr val="accent1"/>
-          </a:effectRef>
-          <a:fontRef idx="minor">
-            <a:schemeClr val="lt1"/>
-          </a:fontRef>
-        </p:style>
-        <p:txBody>
-          <a:bodyPr rtlCol="0" anchor="ctr" lIns="45720" rIns="45720"/>
-          <a:lstStyle/>
-          <a:p>
-            <a:pPr algn="ctr"/>
-            <a:r>
-              <a:rPr sz="900">
-                <a:solidFill>
-                  <a:srgbClr val="1F3A5F"/>
-                </a:solidFill>
-              </a:rPr>
-              <a:t>Gram 14: Y-wing, Category 1, Tantive</a:t>
-            </a:r>
-          </a:p>
-        </p:txBody>
-      </p:sp>
-      <p:sp>
-        <p:nvSpPr>
-          <p:cNvPr id="28" name="TextBox 27"/>
-          <p:cNvSpPr txBox="1"/>
-          <p:nvPr/>
-        </p:nvSpPr>
-        <p:spPr>
-          <a:xfrm>
-            <a:off x="4948732" y="5017008"/>
-            <a:ext cx="2200046" cy="1447800"/>
-          </a:xfrm>
-          <a:prstGeom prst="rect">
-            <a:avLst/>
-          </a:prstGeom>
-          <a:noFill/>
-        </p:spPr>
-        <p:txBody>
-          <a:bodyPr wrap="square">
-            <a:spAutoFit/>
-          </a:bodyPr>
-          <a:lstStyle/>
-          <a:p>
-            <a:r>
-              <a:rPr sz="800">
-                <a:hlinkClick r:id="rId47"/>
-              </a:rPr>
-              <a:t>Lofar 1</a:t>
-            </a:r>
-          </a:p>
-          <a:p>
-            <a:r>
-              <a:rPr sz="800">
-                <a:hlinkClick r:id="rId48"/>
-              </a:rPr>
-              <a:t>Lofar 2</a:t>
-            </a:r>
-          </a:p>
-        </p:txBody>
-      </p:sp>
-      <p:sp>
-        <p:nvSpPr>
-          <p:cNvPr id="29" name="Rounded Rectangle 28"/>
-          <p:cNvSpPr/>
-          <p:nvPr>
-            <a:hlinkClick r:id="rId49"/>
-          </p:nvPr>
-        </p:nvSpPr>
-        <p:spPr>
-          <a:xfrm>
-            <a:off x="7240219" y="4632960"/>
-            <a:ext cx="2200046" cy="365760"/>
-          </a:xfrm>
-          <a:prstGeom prst="roundRect">
-            <a:avLst/>
-          </a:prstGeom>
-          <a:solidFill>
-            <a:srgbClr val="E8EEF7"/>
-          </a:solidFill>
-          <a:ln>
-            <a:solidFill>
-              <a:srgbClr val="1F3A5F"/>
-            </a:solidFill>
-          </a:ln>
-        </p:spPr>
-        <p:style>
-          <a:lnRef idx="1">
-            <a:schemeClr val="accent1"/>
-          </a:lnRef>
-          <a:fillRef idx="3">
-            <a:schemeClr val="accent1"/>
-          </a:fillRef>
-          <a:effectRef idx="2">
-            <a:schemeClr val="accent1"/>
-          </a:effectRef>
-          <a:fontRef idx="minor">
-            <a:schemeClr val="lt1"/>
-          </a:fontRef>
-        </p:style>
-        <p:txBody>
-          <a:bodyPr rtlCol="0" anchor="ctr" lIns="45720" rIns="45720"/>
-          <a:lstStyle/>
-          <a:p>
-            <a:pPr algn="ctr"/>
-            <a:r>
-              <a:rPr sz="900">
-                <a:solidFill>
-                  <a:srgbClr val="1F3A5F"/>
-                </a:solidFill>
-              </a:rPr>
-              <a:t>Gram 16: Reliant, Category 1, Betazed</a:t>
-            </a:r>
-          </a:p>
-        </p:txBody>
-      </p:sp>
-      <p:sp>
-        <p:nvSpPr>
-          <p:cNvPr id="30" name="TextBox 29"/>
-          <p:cNvSpPr txBox="1"/>
-          <p:nvPr/>
-        </p:nvSpPr>
-        <p:spPr>
-          <a:xfrm>
-            <a:off x="7240219" y="5017008"/>
-            <a:ext cx="2200046" cy="1447800"/>
-          </a:xfrm>
-          <a:prstGeom prst="rect">
-            <a:avLst/>
-          </a:prstGeom>
-          <a:noFill/>
-        </p:spPr>
-        <p:txBody>
-          <a:bodyPr wrap="square">
-            <a:spAutoFit/>
-          </a:bodyPr>
-          <a:lstStyle/>
-          <a:p>
-            <a:r>
-              <a:rPr sz="800">
-                <a:hlinkClick r:id="rId50"/>
-              </a:rPr>
-              <a:t>Lofar 1</a:t>
-            </a:r>
-          </a:p>
-          <a:p>
-            <a:r>
-              <a:rPr sz="800">
-                <a:hlinkClick r:id="rId51"/>
-              </a:rPr>
-              <a:t>Lofar 2</a:t>
-            </a:r>
-          </a:p>
-          <a:p>
-            <a:r>
-              <a:rPr sz="800">
-                <a:hlinkClick r:id="rId52"/>
-              </a:rPr>
-              <a:t>Lofar 3</a:t>
-            </a:r>
-          </a:p>
-        </p:txBody>
-      </p:sp>
-      <p:sp>
-        <p:nvSpPr>
-          <p:cNvPr id="31" name="Rounded Rectangle 30"/>
-          <p:cNvSpPr/>
-          <p:nvPr>
-            <a:hlinkClick r:id="rId53"/>
-          </p:nvPr>
-        </p:nvSpPr>
-        <p:spPr>
-          <a:xfrm>
-            <a:off x="9531705" y="4632960"/>
-            <a:ext cx="2200046" cy="365760"/>
-          </a:xfrm>
-          <a:prstGeom prst="roundRect">
-            <a:avLst/>
-          </a:prstGeom>
-          <a:solidFill>
-            <a:srgbClr val="E8EEF7"/>
-          </a:solidFill>
-          <a:ln>
-            <a:solidFill>
-              <a:srgbClr val="1F3A5F"/>
-            </a:solidFill>
-          </a:ln>
-        </p:spPr>
-        <p:style>
-          <a:lnRef idx="1">
-            <a:schemeClr val="accent1"/>
-          </a:lnRef>
-          <a:fillRef idx="3">
-            <a:schemeClr val="accent1"/>
-          </a:fillRef>
-          <a:effectRef idx="2">
-            <a:schemeClr val="accent1"/>
-          </a:effectRef>
-          <a:fontRef idx="minor">
-            <a:schemeClr val="lt1"/>
-          </a:fontRef>
-        </p:style>
-        <p:txBody>
-          <a:bodyPr rtlCol="0" anchor="ctr" lIns="45720" rIns="45720"/>
-          <a:lstStyle/>
-          <a:p>
-            <a:pPr algn="ctr"/>
-            <a:r>
-              <a:rPr sz="900">
-                <a:solidFill>
-                  <a:srgbClr val="1F3A5F"/>
-                </a:solidFill>
-              </a:rPr>
-              <a:t>Gram 18: Devastator, Category 4, Vulcan</a:t>
-            </a:r>
-          </a:p>
-        </p:txBody>
-      </p:sp>
-      <p:sp>
-        <p:nvSpPr>
-          <p:cNvPr id="32" name="TextBox 31"/>
-          <p:cNvSpPr txBox="1"/>
-          <p:nvPr/>
-        </p:nvSpPr>
-        <p:spPr>
-          <a:xfrm>
-            <a:off x="9531705" y="5017008"/>
-            <a:ext cx="2200046" cy="1447800"/>
-          </a:xfrm>
-          <a:prstGeom prst="rect">
-            <a:avLst/>
-          </a:prstGeom>
-          <a:noFill/>
-        </p:spPr>
-        <p:txBody>
-          <a:bodyPr wrap="square">
-            <a:spAutoFit/>
-          </a:bodyPr>
-          <a:lstStyle/>
-          <a:p>
-            <a:r>
-              <a:rPr sz="800">
-                <a:hlinkClick r:id="rId54"/>
-              </a:rPr>
-              <a:t>Lofar 1</a:t>
-            </a:r>
-          </a:p>
-          <a:p>
-            <a:r>
-              <a:rPr sz="800">
-                <a:hlinkClick r:id="rId55"/>
-              </a:rPr>
-              <a:t>Lofar 2</a:t>
-            </a:r>
-          </a:p>
-          <a:p>
-            <a:r>
-              <a:rPr sz="800">
-                <a:hlinkClick r:id="rId56"/>
-              </a:rPr>
-              <a:t>Lofar 3</a:t>
+              <a:t>Instructor Version</a:t>
             </a:r>
           </a:p>
         </p:txBody>
@@ -4694,7 +3223,7 @@
                   <a:srgbClr val="FFFFFF"/>
                 </a:solidFill>
               </a:rPr>
-              <a:t>Instructor Progress Test 3 Grams No FR — Page 2 of 2</a:t>
+              <a:t>Instructor Progress Test 3 Grams No FR — Page 1 of 2</a:t>
             </a:r>
           </a:p>
         </p:txBody>
@@ -4749,7 +3278,7 @@
                   <a:srgbClr val="1F3A5F"/>
                 </a:solidFill>
               </a:rPr>
-              <a:t>Gram 19: Intrepid-class contact bearing 256, codename Caprica</a:t>
+              <a:t>Gram 1: Imperial-class, Category 1, Coruscant</a:t>
             </a:r>
           </a:p>
         </p:txBody>
@@ -4791,22 +3320,6 @@
               <a:t>Lofar 2</a:t>
             </a:r>
           </a:p>
-          <a:p>
-            <a:r>
-              <a:rPr sz="800">
-                <a:hlinkClick r:id="rId5"/>
-              </a:rPr>
-              <a:t>Lofar 3</a:t>
-            </a:r>
-          </a:p>
-          <a:p>
-            <a:r>
-              <a:rPr sz="800">
-                <a:hlinkClick r:id="rId6"/>
-              </a:rPr>
-              <a:t>Lofar 4</a:t>
-            </a:r>
-          </a:p>
         </p:txBody>
       </p:sp>
       <p:sp>
@@ -4814,7 +3327,7 @@
           <p:cNvPr id="5" name="Rounded Rectangle 4"/>
           <p:cNvSpPr/>
           <p:nvPr>
-            <a:hlinkClick r:id="rId7"/>
+            <a:hlinkClick r:id="rId5"/>
           </p:nvPr>
         </p:nvSpPr>
         <p:spPr>
@@ -4859,7 +3372,7 @@
                   <a:srgbClr val="1F3A5F"/>
                 </a:solidFill>
               </a:rPr>
-              <a:t>Gram 20: Millennium Falcon, Category 1, Bajor</a:t>
+              <a:t>Gram 2: Acclamator-class, Category 3, Bespin</a:t>
             </a:r>
           </a:p>
         </p:txBody>
@@ -4888,31 +3401,31 @@
           <a:p>
             <a:r>
               <a:rPr sz="800">
+                <a:hlinkClick r:id="rId6"/>
+              </a:rPr>
+              <a:t>Lofar 1</a:t>
+            </a:r>
+          </a:p>
+          <a:p>
+            <a:r>
+              <a:rPr sz="800">
+                <a:hlinkClick r:id="rId7"/>
+              </a:rPr>
+              <a:t>Lofar 2</a:t>
+            </a:r>
+          </a:p>
+          <a:p>
+            <a:r>
+              <a:rPr sz="800">
                 <a:hlinkClick r:id="rId8"/>
               </a:rPr>
-              <a:t>Lofar 1</a:t>
+              <a:t>Lofar 3</a:t>
             </a:r>
           </a:p>
           <a:p>
             <a:r>
               <a:rPr sz="800">
                 <a:hlinkClick r:id="rId9"/>
-              </a:rPr>
-              <a:t>Lofar 2</a:t>
-            </a:r>
-          </a:p>
-          <a:p>
-            <a:r>
-              <a:rPr sz="800">
-                <a:hlinkClick r:id="rId10"/>
-              </a:rPr>
-              <a:t>Lofar 3</a:t>
-            </a:r>
-          </a:p>
-          <a:p>
-            <a:r>
-              <a:rPr sz="800">
-                <a:hlinkClick r:id="rId11"/>
               </a:rPr>
               <a:t>Lofar 4</a:t>
             </a:r>
@@ -4924,7 +3437,7 @@
           <p:cNvPr id="7" name="Rounded Rectangle 6"/>
           <p:cNvSpPr/>
           <p:nvPr>
-            <a:hlinkClick r:id="rId12"/>
+            <a:hlinkClick r:id="rId10"/>
           </p:nvPr>
         </p:nvSpPr>
         <p:spPr>
@@ -4969,7 +3482,7 @@
                   <a:srgbClr val="1F3A5F"/>
                 </a:solidFill>
               </a:rPr>
-              <a:t>Gram 21: Enterprise, Category 1, Betazed</a:t>
+              <a:t>Gram 3: Voyager, Category 4, Hoth</a:t>
             </a:r>
           </a:p>
         </p:txBody>
@@ -4998,9 +3511,33 @@
           <a:p>
             <a:r>
               <a:rPr sz="800">
+                <a:hlinkClick r:id="rId11"/>
+              </a:rPr>
+              <a:t>Lofar 1</a:t>
+            </a:r>
+          </a:p>
+          <a:p>
+            <a:r>
+              <a:rPr sz="800">
+                <a:hlinkClick r:id="rId12"/>
+              </a:rPr>
+              <a:t>Lofar 2</a:t>
+            </a:r>
+          </a:p>
+          <a:p>
+            <a:r>
+              <a:rPr sz="800">
                 <a:hlinkClick r:id="rId13"/>
               </a:rPr>
-              <a:t>Lofar 1</a:t>
+              <a:t>Lofar 3</a:t>
+            </a:r>
+          </a:p>
+          <a:p>
+            <a:r>
+              <a:rPr sz="800">
+                <a:hlinkClick r:id="rId14"/>
+              </a:rPr>
+              <a:t>Lofar 4</a:t>
             </a:r>
           </a:p>
         </p:txBody>
@@ -5010,7 +3547,7 @@
           <p:cNvPr id="9" name="Rounded Rectangle 8"/>
           <p:cNvSpPr/>
           <p:nvPr>
-            <a:hlinkClick r:id="rId14"/>
+            <a:hlinkClick r:id="rId15"/>
           </p:nvPr>
         </p:nvSpPr>
         <p:spPr>
@@ -5055,7 +3592,7 @@
                   <a:srgbClr val="1F3A5F"/>
                 </a:solidFill>
               </a:rPr>
-              <a:t>Gram 23: Akira-class, Category 4, Betazed</a:t>
+              <a:t>Gram 4: Venator-class contact bearing 274, codename Betazed</a:t>
             </a:r>
           </a:p>
         </p:txBody>
@@ -5084,7 +3621,7 @@
           <a:p>
             <a:r>
               <a:rPr sz="800">
-                <a:hlinkClick r:id="rId15"/>
+                <a:hlinkClick r:id="rId16"/>
               </a:rPr>
               <a:t>Lofar 1</a:t>
             </a:r>
@@ -5092,7 +3629,7 @@
           <a:p>
             <a:r>
               <a:rPr sz="800">
-                <a:hlinkClick r:id="rId16"/>
+                <a:hlinkClick r:id="rId17"/>
               </a:rPr>
               <a:t>Lofar 2</a:t>
             </a:r>
@@ -5100,7 +3637,7 @@
           <a:p>
             <a:r>
               <a:rPr sz="800">
-                <a:hlinkClick r:id="rId17"/>
+                <a:hlinkClick r:id="rId18"/>
               </a:rPr>
               <a:t>Lofar 3</a:t>
             </a:r>
@@ -5108,7 +3645,7 @@
           <a:p>
             <a:r>
               <a:rPr sz="800">
-                <a:hlinkClick r:id="rId18"/>
+                <a:hlinkClick r:id="rId19"/>
               </a:rPr>
               <a:t>Lofar 4</a:t>
             </a:r>
@@ -5120,7 +3657,7 @@
           <p:cNvPr id="11" name="Rounded Rectangle 10"/>
           <p:cNvSpPr/>
           <p:nvPr>
-            <a:hlinkClick r:id="rId19"/>
+            <a:hlinkClick r:id="rId20"/>
           </p:nvPr>
         </p:nvSpPr>
         <p:spPr>
@@ -5165,7 +3702,7 @@
                   <a:srgbClr val="1F3A5F"/>
                 </a:solidFill>
               </a:rPr>
-              <a:t>Gram 24: Galaxy-class, Category 3, Betazed</a:t>
+              <a:t>Gram 5: Defiant contact bearing 256, codename Tatooine</a:t>
             </a:r>
           </a:p>
         </p:txBody>
@@ -5194,17 +3731,9 @@
           <a:p>
             <a:r>
               <a:rPr sz="800">
-                <a:hlinkClick r:id="rId20"/>
+                <a:hlinkClick r:id="rId21"/>
               </a:rPr>
               <a:t>Lofar 1</a:t>
-            </a:r>
-          </a:p>
-          <a:p>
-            <a:r>
-              <a:rPr sz="800">
-                <a:hlinkClick r:id="rId21"/>
-              </a:rPr>
-              <a:t>Lofar 2</a:t>
             </a:r>
           </a:p>
         </p:txBody>
@@ -5259,7 +3788,7 @@
                   <a:srgbClr val="1F3A5F"/>
                 </a:solidFill>
               </a:rPr>
-              <a:t>Gram 25: Corellian Corvette, Category 4, Dagobah</a:t>
+              <a:t>Gram 6: Slave I contact bearing 174, codename Cardassia</a:t>
             </a:r>
           </a:p>
         </p:txBody>
@@ -5345,7 +3874,7 @@
                   <a:srgbClr val="1F3A5F"/>
                 </a:solidFill>
               </a:rPr>
-              <a:t>Gram 26: Reliant, Category 4, Risa</a:t>
+              <a:t>Gram 7: Ghost, Category 1, Trill</a:t>
             </a:r>
           </a:p>
         </p:txBody>
@@ -5455,7 +3984,7 @@
                   <a:srgbClr val="1F3A5F"/>
                 </a:solidFill>
               </a:rPr>
-              <a:t>Gram 28: Intrepid-class contact bearing 279, codename Vulcan</a:t>
+              <a:t>Gram 8: A-wing contact bearing 061, codename Romulus</a:t>
             </a:r>
           </a:p>
         </p:txBody>
@@ -5497,6 +4026,14 @@
               <a:t>Lofar 2</a:t>
             </a:r>
           </a:p>
+          <a:p>
+            <a:r>
+              <a:rPr sz="800">
+                <a:hlinkClick r:id="rId32"/>
+              </a:rPr>
+              <a:t>Lofar 3</a:t>
+            </a:r>
+          </a:p>
         </p:txBody>
       </p:sp>
       <p:sp>
@@ -5504,7 +4041,7 @@
           <p:cNvPr id="19" name="Rounded Rectangle 18"/>
           <p:cNvSpPr/>
           <p:nvPr>
-            <a:hlinkClick r:id="rId32"/>
+            <a:hlinkClick r:id="rId33"/>
           </p:nvPr>
         </p:nvSpPr>
         <p:spPr>
@@ -5549,7 +4086,7 @@
                   <a:srgbClr val="1F3A5F"/>
                 </a:solidFill>
               </a:rPr>
-              <a:t>Gram 30: Voyager, Category 2, Bajor</a:t>
+              <a:t>Gram 10: Razor Crest, Category 4, Kobol</a:t>
             </a:r>
           </a:p>
         </p:txBody>
@@ -5578,7 +4115,7 @@
           <a:p>
             <a:r>
               <a:rPr sz="800">
-                <a:hlinkClick r:id="rId33"/>
+                <a:hlinkClick r:id="rId34"/>
               </a:rPr>
               <a:t>Lofar 1</a:t>
             </a:r>
@@ -5586,7 +4123,7 @@
           <a:p>
             <a:r>
               <a:rPr sz="800">
-                <a:hlinkClick r:id="rId34"/>
+                <a:hlinkClick r:id="rId35"/>
               </a:rPr>
               <a:t>Lofar 2</a:t>
             </a:r>
@@ -5594,7 +4131,7 @@
           <a:p>
             <a:r>
               <a:rPr sz="800">
-                <a:hlinkClick r:id="rId35"/>
+                <a:hlinkClick r:id="rId36"/>
               </a:rPr>
               <a:t>Lofar 3</a:t>
             </a:r>
@@ -5606,7 +4143,7 @@
           <p:cNvPr id="21" name="Rounded Rectangle 20"/>
           <p:cNvSpPr/>
           <p:nvPr>
-            <a:hlinkClick r:id="rId36"/>
+            <a:hlinkClick r:id="rId37"/>
           </p:nvPr>
         </p:nvSpPr>
         <p:spPr>
@@ -5651,7 +4188,7 @@
                   <a:srgbClr val="1F3A5F"/>
                 </a:solidFill>
               </a:rPr>
-              <a:t>Gram 31: Lambda Shuttle, Category 3, Bajor</a:t>
+              <a:t>Gram 11: Lambda Shuttle, Category 4, Cardassia</a:t>
             </a:r>
           </a:p>
         </p:txBody>
@@ -5680,9 +4217,17 @@
           <a:p>
             <a:r>
               <a:rPr sz="800">
-                <a:hlinkClick r:id="rId37"/>
+                <a:hlinkClick r:id="rId38"/>
               </a:rPr>
               <a:t>Lofar 1</a:t>
+            </a:r>
+          </a:p>
+          <a:p>
+            <a:r>
+              <a:rPr sz="800">
+                <a:hlinkClick r:id="rId39"/>
+              </a:rPr>
+              <a:t>Lofar 2</a:t>
             </a:r>
           </a:p>
         </p:txBody>
@@ -5692,7 +4237,7 @@
           <p:cNvPr id="23" name="Rounded Rectangle 22"/>
           <p:cNvSpPr/>
           <p:nvPr>
-            <a:hlinkClick r:id="rId38"/>
+            <a:hlinkClick r:id="rId40"/>
           </p:nvPr>
         </p:nvSpPr>
         <p:spPr>
@@ -5737,7 +4282,7 @@
                   <a:srgbClr val="1F3A5F"/>
                 </a:solidFill>
               </a:rPr>
-              <a:t>Gram 32: Nebulon-B, Category 4, Cardassia</a:t>
+              <a:t>Gram 12: Constitution-class contact bearing 225, codename Tatooine</a:t>
             </a:r>
           </a:p>
         </p:txBody>
@@ -5766,7 +4311,7 @@
           <a:p>
             <a:r>
               <a:rPr sz="800">
-                <a:hlinkClick r:id="rId39"/>
+                <a:hlinkClick r:id="rId41"/>
               </a:rPr>
               <a:t>Lofar 1</a:t>
             </a:r>
@@ -5774,7 +4319,7 @@
           <a:p>
             <a:r>
               <a:rPr sz="800">
-                <a:hlinkClick r:id="rId40"/>
+                <a:hlinkClick r:id="rId42"/>
               </a:rPr>
               <a:t>Lofar 2</a:t>
             </a:r>
@@ -5782,17 +4327,9 @@
           <a:p>
             <a:r>
               <a:rPr sz="800">
-                <a:hlinkClick r:id="rId41"/>
+                <a:hlinkClick r:id="rId43"/>
               </a:rPr>
               <a:t>Lofar 3</a:t>
-            </a:r>
-          </a:p>
-          <a:p>
-            <a:r>
-              <a:rPr sz="800">
-                <a:hlinkClick r:id="rId42"/>
-              </a:rPr>
-              <a:t>Lofar 4</a:t>
             </a:r>
           </a:p>
         </p:txBody>
@@ -5802,7 +4339,7 @@
           <p:cNvPr id="25" name="Rounded Rectangle 24"/>
           <p:cNvSpPr/>
           <p:nvPr>
-            <a:hlinkClick r:id="rId43"/>
+            <a:hlinkClick r:id="rId44"/>
           </p:nvPr>
         </p:nvSpPr>
         <p:spPr>
@@ -5847,7 +4384,7 @@
                   <a:srgbClr val="1F3A5F"/>
                 </a:solidFill>
               </a:rPr>
-              <a:t>Gram 33: Prometheus, Category 3, Romulus</a:t>
+              <a:t>Gram 13: Slave I contact bearing 078, codename Kobol</a:t>
             </a:r>
           </a:p>
         </p:txBody>
@@ -5876,7 +4413,7 @@
           <a:p>
             <a:r>
               <a:rPr sz="800">
-                <a:hlinkClick r:id="rId44"/>
+                <a:hlinkClick r:id="rId45"/>
               </a:rPr>
               <a:t>Lofar 1</a:t>
             </a:r>
@@ -5888,7 +4425,7 @@
           <p:cNvPr id="27" name="Rounded Rectangle 26"/>
           <p:cNvSpPr/>
           <p:nvPr>
-            <a:hlinkClick r:id="rId45"/>
+            <a:hlinkClick r:id="rId46"/>
           </p:nvPr>
         </p:nvSpPr>
         <p:spPr>
@@ -5933,7 +4470,7 @@
                   <a:srgbClr val="1F3A5F"/>
                 </a:solidFill>
               </a:rPr>
-              <a:t>Gram 34: Miranda-class, Category 2, Dagobah</a:t>
+              <a:t>Gram 14: Y-wing, Category 1, Tantive</a:t>
             </a:r>
           </a:p>
         </p:txBody>
@@ -5962,7 +4499,7 @@
           <a:p>
             <a:r>
               <a:rPr sz="800">
-                <a:hlinkClick r:id="rId46"/>
+                <a:hlinkClick r:id="rId47"/>
               </a:rPr>
               <a:t>Lofar 1</a:t>
             </a:r>
@@ -5970,17 +4507,9 @@
           <a:p>
             <a:r>
               <a:rPr sz="800">
-                <a:hlinkClick r:id="rId47"/>
+                <a:hlinkClick r:id="rId48"/>
               </a:rPr>
               <a:t>Lofar 2</a:t>
-            </a:r>
-          </a:p>
-          <a:p>
-            <a:r>
-              <a:rPr sz="800">
-                <a:hlinkClick r:id="rId48"/>
-              </a:rPr>
-              <a:t>Lofar 3</a:t>
             </a:r>
           </a:p>
         </p:txBody>
@@ -6035,7 +4564,7 @@
                   <a:srgbClr val="1F3A5F"/>
                 </a:solidFill>
               </a:rPr>
-              <a:t>Gram 35: Nebulon-B, Category 4, Gandalf</a:t>
+              <a:t>Gram 16: Reliant, Category 1, Betazed</a:t>
             </a:r>
           </a:p>
         </p:txBody>
@@ -6069,6 +4598,22 @@
               <a:t>Lofar 1</a:t>
             </a:r>
           </a:p>
+          <a:p>
+            <a:r>
+              <a:rPr sz="800">
+                <a:hlinkClick r:id="rId51"/>
+              </a:rPr>
+              <a:t>Lofar 2</a:t>
+            </a:r>
+          </a:p>
+          <a:p>
+            <a:r>
+              <a:rPr sz="800">
+                <a:hlinkClick r:id="rId52"/>
+              </a:rPr>
+              <a:t>Lofar 3</a:t>
+            </a:r>
+          </a:p>
         </p:txBody>
       </p:sp>
       <p:sp>
@@ -6076,7 +4621,7 @@
           <p:cNvPr id="31" name="Rounded Rectangle 30"/>
           <p:cNvSpPr/>
           <p:nvPr>
-            <a:hlinkClick r:id="rId51"/>
+            <a:hlinkClick r:id="rId53"/>
           </p:nvPr>
         </p:nvSpPr>
         <p:spPr>
@@ -6121,7 +4666,7 @@
                   <a:srgbClr val="1F3A5F"/>
                 </a:solidFill>
               </a:rPr>
-              <a:t>Gram 36: Tantive IV contact bearing 226, codename Romulus</a:t>
+              <a:t>Gram 18: Devastator, Category 4, Vulcan</a:t>
             </a:r>
           </a:p>
         </p:txBody>
@@ -6150,6 +4695,1549 @@
           <a:p>
             <a:r>
               <a:rPr sz="800">
+                <a:hlinkClick r:id="rId54"/>
+              </a:rPr>
+              <a:t>Lofar 1</a:t>
+            </a:r>
+          </a:p>
+          <a:p>
+            <a:r>
+              <a:rPr sz="800">
+                <a:hlinkClick r:id="rId55"/>
+              </a:rPr>
+              <a:t>Lofar 2</a:t>
+            </a:r>
+          </a:p>
+          <a:p>
+            <a:r>
+              <a:rPr sz="800">
+                <a:hlinkClick r:id="rId56"/>
+              </a:rPr>
+              <a:t>Lofar 3</a:t>
+            </a:r>
+          </a:p>
+        </p:txBody>
+      </p:sp>
+    </p:spTree>
+  </p:cSld>
+  <p:clrMapOvr>
+    <a:masterClrMapping/>
+  </p:clrMapOvr>
+</p:sld>
+</file>
+
+<file path=ppt/slides/slide3.xml><?xml version="1.0" encoding="utf-8"?>
+<p:sld xmlns:a="http://schemas.openxmlformats.org/drawingml/2006/main" xmlns:p="http://schemas.openxmlformats.org/presentationml/2006/main" xmlns:r="http://schemas.openxmlformats.org/officeDocument/2006/relationships">
+  <p:cSld>
+    <p:spTree>
+      <p:nvGrpSpPr>
+        <p:cNvPr id="1" name=""/>
+        <p:cNvGrpSpPr/>
+        <p:nvPr/>
+      </p:nvGrpSpPr>
+      <p:grpSpPr/>
+      <p:sp>
+        <p:nvSpPr>
+          <p:cNvPr id="2" name="Rectangle 1"/>
+          <p:cNvSpPr/>
+          <p:nvPr/>
+        </p:nvSpPr>
+        <p:spPr>
+          <a:xfrm>
+            <a:off x="0" y="0"/>
+            <a:ext cx="12188952" cy="548640"/>
+          </a:xfrm>
+          <a:prstGeom prst="rect">
+            <a:avLst/>
+          </a:prstGeom>
+          <a:solidFill>
+            <a:srgbClr val="1F3A5F"/>
+          </a:solidFill>
+          <a:ln>
+            <a:noFill/>
+          </a:ln>
+        </p:spPr>
+        <p:style>
+          <a:lnRef idx="1">
+            <a:schemeClr val="accent1"/>
+          </a:lnRef>
+          <a:fillRef idx="3">
+            <a:schemeClr val="accent1"/>
+          </a:fillRef>
+          <a:effectRef idx="2">
+            <a:schemeClr val="accent1"/>
+          </a:effectRef>
+          <a:fontRef idx="minor">
+            <a:schemeClr val="lt1"/>
+          </a:fontRef>
+        </p:style>
+        <p:txBody>
+          <a:bodyPr rtlCol="0" anchor="ctr" lIns="182880" rIns="182880"/>
+          <a:lstStyle/>
+          <a:p>
+            <a:pPr algn="ctr"/>
+            <a:r>
+              <a:rPr sz="2000" b="1">
+                <a:solidFill>
+                  <a:srgbClr val="FFFFFF"/>
+                </a:solidFill>
+              </a:rPr>
+              <a:t>Instructor Progress Test 3 Grams No FR — Page 2 of 2</a:t>
+            </a:r>
+          </a:p>
+        </p:txBody>
+      </p:sp>
+      <p:sp>
+        <p:nvSpPr>
+          <p:cNvPr id="3" name="Rounded Rectangle 2"/>
+          <p:cNvSpPr/>
+          <p:nvPr>
+            <a:hlinkClick r:id="rId2"/>
+          </p:nvPr>
+        </p:nvSpPr>
+        <p:spPr>
+          <a:xfrm>
+            <a:off x="365760" y="731520"/>
+            <a:ext cx="2200046" cy="365760"/>
+          </a:xfrm>
+          <a:prstGeom prst="roundRect">
+            <a:avLst/>
+          </a:prstGeom>
+          <a:solidFill>
+            <a:srgbClr val="E8EEF7"/>
+          </a:solidFill>
+          <a:ln>
+            <a:solidFill>
+              <a:srgbClr val="1F3A5F"/>
+            </a:solidFill>
+          </a:ln>
+        </p:spPr>
+        <p:style>
+          <a:lnRef idx="1">
+            <a:schemeClr val="accent1"/>
+          </a:lnRef>
+          <a:fillRef idx="3">
+            <a:schemeClr val="accent1"/>
+          </a:fillRef>
+          <a:effectRef idx="2">
+            <a:schemeClr val="accent1"/>
+          </a:effectRef>
+          <a:fontRef idx="minor">
+            <a:schemeClr val="lt1"/>
+          </a:fontRef>
+        </p:style>
+        <p:txBody>
+          <a:bodyPr rtlCol="0" anchor="ctr" lIns="45720" rIns="45720"/>
+          <a:lstStyle/>
+          <a:p>
+            <a:pPr algn="ctr"/>
+            <a:r>
+              <a:rPr sz="900">
+                <a:solidFill>
+                  <a:srgbClr val="1F3A5F"/>
+                </a:solidFill>
+              </a:rPr>
+              <a:t>Gram 19: Intrepid-class contact bearing 256, codename Caprica</a:t>
+            </a:r>
+          </a:p>
+        </p:txBody>
+      </p:sp>
+      <p:sp>
+        <p:nvSpPr>
+          <p:cNvPr id="4" name="TextBox 3"/>
+          <p:cNvSpPr txBox="1"/>
+          <p:nvPr/>
+        </p:nvSpPr>
+        <p:spPr>
+          <a:xfrm>
+            <a:off x="365760" y="1115568"/>
+            <a:ext cx="2200046" cy="1447800"/>
+          </a:xfrm>
+          <a:prstGeom prst="rect">
+            <a:avLst/>
+          </a:prstGeom>
+          <a:noFill/>
+        </p:spPr>
+        <p:txBody>
+          <a:bodyPr wrap="square">
+            <a:spAutoFit/>
+          </a:bodyPr>
+          <a:lstStyle/>
+          <a:p>
+            <a:r>
+              <a:rPr sz="800">
+                <a:hlinkClick r:id="rId3"/>
+              </a:rPr>
+              <a:t>Lofar 1</a:t>
+            </a:r>
+          </a:p>
+          <a:p>
+            <a:r>
+              <a:rPr sz="800">
+                <a:hlinkClick r:id="rId4"/>
+              </a:rPr>
+              <a:t>Lofar 2</a:t>
+            </a:r>
+          </a:p>
+          <a:p>
+            <a:r>
+              <a:rPr sz="800">
+                <a:hlinkClick r:id="rId5"/>
+              </a:rPr>
+              <a:t>Lofar 3</a:t>
+            </a:r>
+          </a:p>
+          <a:p>
+            <a:r>
+              <a:rPr sz="800">
+                <a:hlinkClick r:id="rId6"/>
+              </a:rPr>
+              <a:t>Lofar 4</a:t>
+            </a:r>
+          </a:p>
+        </p:txBody>
+      </p:sp>
+      <p:sp>
+        <p:nvSpPr>
+          <p:cNvPr id="5" name="Rounded Rectangle 4"/>
+          <p:cNvSpPr/>
+          <p:nvPr>
+            <a:hlinkClick r:id="rId7"/>
+          </p:nvPr>
+        </p:nvSpPr>
+        <p:spPr>
+          <a:xfrm>
+            <a:off x="2657246" y="731520"/>
+            <a:ext cx="2200046" cy="365760"/>
+          </a:xfrm>
+          <a:prstGeom prst="roundRect">
+            <a:avLst/>
+          </a:prstGeom>
+          <a:solidFill>
+            <a:srgbClr val="E8EEF7"/>
+          </a:solidFill>
+          <a:ln>
+            <a:solidFill>
+              <a:srgbClr val="1F3A5F"/>
+            </a:solidFill>
+          </a:ln>
+        </p:spPr>
+        <p:style>
+          <a:lnRef idx="1">
+            <a:schemeClr val="accent1"/>
+          </a:lnRef>
+          <a:fillRef idx="3">
+            <a:schemeClr val="accent1"/>
+          </a:fillRef>
+          <a:effectRef idx="2">
+            <a:schemeClr val="accent1"/>
+          </a:effectRef>
+          <a:fontRef idx="minor">
+            <a:schemeClr val="lt1"/>
+          </a:fontRef>
+        </p:style>
+        <p:txBody>
+          <a:bodyPr rtlCol="0" anchor="ctr" lIns="45720" rIns="45720"/>
+          <a:lstStyle/>
+          <a:p>
+            <a:pPr algn="ctr"/>
+            <a:r>
+              <a:rPr sz="900">
+                <a:solidFill>
+                  <a:srgbClr val="1F3A5F"/>
+                </a:solidFill>
+              </a:rPr>
+              <a:t>Gram 20: Millennium Falcon, Category 1, Bajor</a:t>
+            </a:r>
+          </a:p>
+        </p:txBody>
+      </p:sp>
+      <p:sp>
+        <p:nvSpPr>
+          <p:cNvPr id="6" name="TextBox 5"/>
+          <p:cNvSpPr txBox="1"/>
+          <p:nvPr/>
+        </p:nvSpPr>
+        <p:spPr>
+          <a:xfrm>
+            <a:off x="2657246" y="1115568"/>
+            <a:ext cx="2200046" cy="1447800"/>
+          </a:xfrm>
+          <a:prstGeom prst="rect">
+            <a:avLst/>
+          </a:prstGeom>
+          <a:noFill/>
+        </p:spPr>
+        <p:txBody>
+          <a:bodyPr wrap="square">
+            <a:spAutoFit/>
+          </a:bodyPr>
+          <a:lstStyle/>
+          <a:p>
+            <a:r>
+              <a:rPr sz="800">
+                <a:hlinkClick r:id="rId8"/>
+              </a:rPr>
+              <a:t>Lofar 1</a:t>
+            </a:r>
+          </a:p>
+          <a:p>
+            <a:r>
+              <a:rPr sz="800">
+                <a:hlinkClick r:id="rId9"/>
+              </a:rPr>
+              <a:t>Lofar 2</a:t>
+            </a:r>
+          </a:p>
+          <a:p>
+            <a:r>
+              <a:rPr sz="800">
+                <a:hlinkClick r:id="rId10"/>
+              </a:rPr>
+              <a:t>Lofar 3</a:t>
+            </a:r>
+          </a:p>
+          <a:p>
+            <a:r>
+              <a:rPr sz="800">
+                <a:hlinkClick r:id="rId11"/>
+              </a:rPr>
+              <a:t>Lofar 4</a:t>
+            </a:r>
+          </a:p>
+        </p:txBody>
+      </p:sp>
+      <p:sp>
+        <p:nvSpPr>
+          <p:cNvPr id="7" name="Rounded Rectangle 6"/>
+          <p:cNvSpPr/>
+          <p:nvPr>
+            <a:hlinkClick r:id="rId12"/>
+          </p:nvPr>
+        </p:nvSpPr>
+        <p:spPr>
+          <a:xfrm>
+            <a:off x="4948732" y="731520"/>
+            <a:ext cx="2200046" cy="365760"/>
+          </a:xfrm>
+          <a:prstGeom prst="roundRect">
+            <a:avLst/>
+          </a:prstGeom>
+          <a:solidFill>
+            <a:srgbClr val="E8EEF7"/>
+          </a:solidFill>
+          <a:ln>
+            <a:solidFill>
+              <a:srgbClr val="1F3A5F"/>
+            </a:solidFill>
+          </a:ln>
+        </p:spPr>
+        <p:style>
+          <a:lnRef idx="1">
+            <a:schemeClr val="accent1"/>
+          </a:lnRef>
+          <a:fillRef idx="3">
+            <a:schemeClr val="accent1"/>
+          </a:fillRef>
+          <a:effectRef idx="2">
+            <a:schemeClr val="accent1"/>
+          </a:effectRef>
+          <a:fontRef idx="minor">
+            <a:schemeClr val="lt1"/>
+          </a:fontRef>
+        </p:style>
+        <p:txBody>
+          <a:bodyPr rtlCol="0" anchor="ctr" lIns="45720" rIns="45720"/>
+          <a:lstStyle/>
+          <a:p>
+            <a:pPr algn="ctr"/>
+            <a:r>
+              <a:rPr sz="900">
+                <a:solidFill>
+                  <a:srgbClr val="1F3A5F"/>
+                </a:solidFill>
+              </a:rPr>
+              <a:t>Gram 21: Enterprise, Category 1, Betazed</a:t>
+            </a:r>
+          </a:p>
+        </p:txBody>
+      </p:sp>
+      <p:sp>
+        <p:nvSpPr>
+          <p:cNvPr id="8" name="TextBox 7"/>
+          <p:cNvSpPr txBox="1"/>
+          <p:nvPr/>
+        </p:nvSpPr>
+        <p:spPr>
+          <a:xfrm>
+            <a:off x="4948732" y="1115568"/>
+            <a:ext cx="2200046" cy="1447800"/>
+          </a:xfrm>
+          <a:prstGeom prst="rect">
+            <a:avLst/>
+          </a:prstGeom>
+          <a:noFill/>
+        </p:spPr>
+        <p:txBody>
+          <a:bodyPr wrap="square">
+            <a:spAutoFit/>
+          </a:bodyPr>
+          <a:lstStyle/>
+          <a:p>
+            <a:r>
+              <a:rPr sz="800">
+                <a:hlinkClick r:id="rId13"/>
+              </a:rPr>
+              <a:t>Lofar 1</a:t>
+            </a:r>
+          </a:p>
+        </p:txBody>
+      </p:sp>
+      <p:sp>
+        <p:nvSpPr>
+          <p:cNvPr id="9" name="Rounded Rectangle 8"/>
+          <p:cNvSpPr/>
+          <p:nvPr>
+            <a:hlinkClick r:id="rId14"/>
+          </p:nvPr>
+        </p:nvSpPr>
+        <p:spPr>
+          <a:xfrm>
+            <a:off x="7240219" y="731520"/>
+            <a:ext cx="2200046" cy="365760"/>
+          </a:xfrm>
+          <a:prstGeom prst="roundRect">
+            <a:avLst/>
+          </a:prstGeom>
+          <a:solidFill>
+            <a:srgbClr val="E8EEF7"/>
+          </a:solidFill>
+          <a:ln>
+            <a:solidFill>
+              <a:srgbClr val="1F3A5F"/>
+            </a:solidFill>
+          </a:ln>
+        </p:spPr>
+        <p:style>
+          <a:lnRef idx="1">
+            <a:schemeClr val="accent1"/>
+          </a:lnRef>
+          <a:fillRef idx="3">
+            <a:schemeClr val="accent1"/>
+          </a:fillRef>
+          <a:effectRef idx="2">
+            <a:schemeClr val="accent1"/>
+          </a:effectRef>
+          <a:fontRef idx="minor">
+            <a:schemeClr val="lt1"/>
+          </a:fontRef>
+        </p:style>
+        <p:txBody>
+          <a:bodyPr rtlCol="0" anchor="ctr" lIns="45720" rIns="45720"/>
+          <a:lstStyle/>
+          <a:p>
+            <a:pPr algn="ctr"/>
+            <a:r>
+              <a:rPr sz="900">
+                <a:solidFill>
+                  <a:srgbClr val="1F3A5F"/>
+                </a:solidFill>
+              </a:rPr>
+              <a:t>Gram 23: Akira-class, Category 4, Betazed</a:t>
+            </a:r>
+          </a:p>
+        </p:txBody>
+      </p:sp>
+      <p:sp>
+        <p:nvSpPr>
+          <p:cNvPr id="10" name="TextBox 9"/>
+          <p:cNvSpPr txBox="1"/>
+          <p:nvPr/>
+        </p:nvSpPr>
+        <p:spPr>
+          <a:xfrm>
+            <a:off x="7240219" y="1115568"/>
+            <a:ext cx="2200046" cy="1447800"/>
+          </a:xfrm>
+          <a:prstGeom prst="rect">
+            <a:avLst/>
+          </a:prstGeom>
+          <a:noFill/>
+        </p:spPr>
+        <p:txBody>
+          <a:bodyPr wrap="square">
+            <a:spAutoFit/>
+          </a:bodyPr>
+          <a:lstStyle/>
+          <a:p>
+            <a:r>
+              <a:rPr sz="800">
+                <a:hlinkClick r:id="rId15"/>
+              </a:rPr>
+              <a:t>Lofar 1</a:t>
+            </a:r>
+          </a:p>
+          <a:p>
+            <a:r>
+              <a:rPr sz="800">
+                <a:hlinkClick r:id="rId16"/>
+              </a:rPr>
+              <a:t>Lofar 2</a:t>
+            </a:r>
+          </a:p>
+          <a:p>
+            <a:r>
+              <a:rPr sz="800">
+                <a:hlinkClick r:id="rId17"/>
+              </a:rPr>
+              <a:t>Lofar 3</a:t>
+            </a:r>
+          </a:p>
+          <a:p>
+            <a:r>
+              <a:rPr sz="800">
+                <a:hlinkClick r:id="rId18"/>
+              </a:rPr>
+              <a:t>Lofar 4</a:t>
+            </a:r>
+          </a:p>
+        </p:txBody>
+      </p:sp>
+      <p:sp>
+        <p:nvSpPr>
+          <p:cNvPr id="11" name="Rounded Rectangle 10"/>
+          <p:cNvSpPr/>
+          <p:nvPr>
+            <a:hlinkClick r:id="rId19"/>
+          </p:nvPr>
+        </p:nvSpPr>
+        <p:spPr>
+          <a:xfrm>
+            <a:off x="9531705" y="731520"/>
+            <a:ext cx="2200046" cy="365760"/>
+          </a:xfrm>
+          <a:prstGeom prst="roundRect">
+            <a:avLst/>
+          </a:prstGeom>
+          <a:solidFill>
+            <a:srgbClr val="E8EEF7"/>
+          </a:solidFill>
+          <a:ln>
+            <a:solidFill>
+              <a:srgbClr val="1F3A5F"/>
+            </a:solidFill>
+          </a:ln>
+        </p:spPr>
+        <p:style>
+          <a:lnRef idx="1">
+            <a:schemeClr val="accent1"/>
+          </a:lnRef>
+          <a:fillRef idx="3">
+            <a:schemeClr val="accent1"/>
+          </a:fillRef>
+          <a:effectRef idx="2">
+            <a:schemeClr val="accent1"/>
+          </a:effectRef>
+          <a:fontRef idx="minor">
+            <a:schemeClr val="lt1"/>
+          </a:fontRef>
+        </p:style>
+        <p:txBody>
+          <a:bodyPr rtlCol="0" anchor="ctr" lIns="45720" rIns="45720"/>
+          <a:lstStyle/>
+          <a:p>
+            <a:pPr algn="ctr"/>
+            <a:r>
+              <a:rPr sz="900">
+                <a:solidFill>
+                  <a:srgbClr val="1F3A5F"/>
+                </a:solidFill>
+              </a:rPr>
+              <a:t>Gram 24: Galaxy-class, Category 3, Betazed</a:t>
+            </a:r>
+          </a:p>
+        </p:txBody>
+      </p:sp>
+      <p:sp>
+        <p:nvSpPr>
+          <p:cNvPr id="12" name="TextBox 11"/>
+          <p:cNvSpPr txBox="1"/>
+          <p:nvPr/>
+        </p:nvSpPr>
+        <p:spPr>
+          <a:xfrm>
+            <a:off x="9531705" y="1115568"/>
+            <a:ext cx="2200046" cy="1447800"/>
+          </a:xfrm>
+          <a:prstGeom prst="rect">
+            <a:avLst/>
+          </a:prstGeom>
+          <a:noFill/>
+        </p:spPr>
+        <p:txBody>
+          <a:bodyPr wrap="square">
+            <a:spAutoFit/>
+          </a:bodyPr>
+          <a:lstStyle/>
+          <a:p>
+            <a:r>
+              <a:rPr sz="800">
+                <a:hlinkClick r:id="rId20"/>
+              </a:rPr>
+              <a:t>Lofar 1</a:t>
+            </a:r>
+          </a:p>
+          <a:p>
+            <a:r>
+              <a:rPr sz="800">
+                <a:hlinkClick r:id="rId21"/>
+              </a:rPr>
+              <a:t>Lofar 2</a:t>
+            </a:r>
+          </a:p>
+        </p:txBody>
+      </p:sp>
+      <p:sp>
+        <p:nvSpPr>
+          <p:cNvPr id="13" name="Rounded Rectangle 12"/>
+          <p:cNvSpPr/>
+          <p:nvPr>
+            <a:hlinkClick r:id="rId22"/>
+          </p:nvPr>
+        </p:nvSpPr>
+        <p:spPr>
+          <a:xfrm>
+            <a:off x="365760" y="2682240"/>
+            <a:ext cx="2200046" cy="365760"/>
+          </a:xfrm>
+          <a:prstGeom prst="roundRect">
+            <a:avLst/>
+          </a:prstGeom>
+          <a:solidFill>
+            <a:srgbClr val="E8EEF7"/>
+          </a:solidFill>
+          <a:ln>
+            <a:solidFill>
+              <a:srgbClr val="1F3A5F"/>
+            </a:solidFill>
+          </a:ln>
+        </p:spPr>
+        <p:style>
+          <a:lnRef idx="1">
+            <a:schemeClr val="accent1"/>
+          </a:lnRef>
+          <a:fillRef idx="3">
+            <a:schemeClr val="accent1"/>
+          </a:fillRef>
+          <a:effectRef idx="2">
+            <a:schemeClr val="accent1"/>
+          </a:effectRef>
+          <a:fontRef idx="minor">
+            <a:schemeClr val="lt1"/>
+          </a:fontRef>
+        </p:style>
+        <p:txBody>
+          <a:bodyPr rtlCol="0" anchor="ctr" lIns="45720" rIns="45720"/>
+          <a:lstStyle/>
+          <a:p>
+            <a:pPr algn="ctr"/>
+            <a:r>
+              <a:rPr sz="900">
+                <a:solidFill>
+                  <a:srgbClr val="1F3A5F"/>
+                </a:solidFill>
+              </a:rPr>
+              <a:t>Gram 25: Corellian Corvette, Category 4, Dagobah</a:t>
+            </a:r>
+          </a:p>
+        </p:txBody>
+      </p:sp>
+      <p:sp>
+        <p:nvSpPr>
+          <p:cNvPr id="14" name="TextBox 13"/>
+          <p:cNvSpPr txBox="1"/>
+          <p:nvPr/>
+        </p:nvSpPr>
+        <p:spPr>
+          <a:xfrm>
+            <a:off x="365760" y="3066288"/>
+            <a:ext cx="2200046" cy="1447800"/>
+          </a:xfrm>
+          <a:prstGeom prst="rect">
+            <a:avLst/>
+          </a:prstGeom>
+          <a:noFill/>
+        </p:spPr>
+        <p:txBody>
+          <a:bodyPr wrap="square">
+            <a:spAutoFit/>
+          </a:bodyPr>
+          <a:lstStyle/>
+          <a:p>
+            <a:r>
+              <a:rPr sz="800">
+                <a:hlinkClick r:id="rId23"/>
+              </a:rPr>
+              <a:t>Lofar 1</a:t>
+            </a:r>
+          </a:p>
+        </p:txBody>
+      </p:sp>
+      <p:sp>
+        <p:nvSpPr>
+          <p:cNvPr id="15" name="Rounded Rectangle 14"/>
+          <p:cNvSpPr/>
+          <p:nvPr>
+            <a:hlinkClick r:id="rId24"/>
+          </p:nvPr>
+        </p:nvSpPr>
+        <p:spPr>
+          <a:xfrm>
+            <a:off x="2657246" y="2682240"/>
+            <a:ext cx="2200046" cy="365760"/>
+          </a:xfrm>
+          <a:prstGeom prst="roundRect">
+            <a:avLst/>
+          </a:prstGeom>
+          <a:solidFill>
+            <a:srgbClr val="E8EEF7"/>
+          </a:solidFill>
+          <a:ln>
+            <a:solidFill>
+              <a:srgbClr val="1F3A5F"/>
+            </a:solidFill>
+          </a:ln>
+        </p:spPr>
+        <p:style>
+          <a:lnRef idx="1">
+            <a:schemeClr val="accent1"/>
+          </a:lnRef>
+          <a:fillRef idx="3">
+            <a:schemeClr val="accent1"/>
+          </a:fillRef>
+          <a:effectRef idx="2">
+            <a:schemeClr val="accent1"/>
+          </a:effectRef>
+          <a:fontRef idx="minor">
+            <a:schemeClr val="lt1"/>
+          </a:fontRef>
+        </p:style>
+        <p:txBody>
+          <a:bodyPr rtlCol="0" anchor="ctr" lIns="45720" rIns="45720"/>
+          <a:lstStyle/>
+          <a:p>
+            <a:pPr algn="ctr"/>
+            <a:r>
+              <a:rPr sz="900">
+                <a:solidFill>
+                  <a:srgbClr val="1F3A5F"/>
+                </a:solidFill>
+              </a:rPr>
+              <a:t>Gram 26: Reliant, Category 4, Risa</a:t>
+            </a:r>
+          </a:p>
+        </p:txBody>
+      </p:sp>
+      <p:sp>
+        <p:nvSpPr>
+          <p:cNvPr id="16" name="TextBox 15"/>
+          <p:cNvSpPr txBox="1"/>
+          <p:nvPr/>
+        </p:nvSpPr>
+        <p:spPr>
+          <a:xfrm>
+            <a:off x="2657246" y="3066288"/>
+            <a:ext cx="2200046" cy="1447800"/>
+          </a:xfrm>
+          <a:prstGeom prst="rect">
+            <a:avLst/>
+          </a:prstGeom>
+          <a:noFill/>
+        </p:spPr>
+        <p:txBody>
+          <a:bodyPr wrap="square">
+            <a:spAutoFit/>
+          </a:bodyPr>
+          <a:lstStyle/>
+          <a:p>
+            <a:r>
+              <a:rPr sz="800">
+                <a:hlinkClick r:id="rId25"/>
+              </a:rPr>
+              <a:t>Lofar 1</a:t>
+            </a:r>
+          </a:p>
+          <a:p>
+            <a:r>
+              <a:rPr sz="800">
+                <a:hlinkClick r:id="rId26"/>
+              </a:rPr>
+              <a:t>Lofar 2</a:t>
+            </a:r>
+          </a:p>
+          <a:p>
+            <a:r>
+              <a:rPr sz="800">
+                <a:hlinkClick r:id="rId27"/>
+              </a:rPr>
+              <a:t>Lofar 3</a:t>
+            </a:r>
+          </a:p>
+          <a:p>
+            <a:r>
+              <a:rPr sz="800">
+                <a:hlinkClick r:id="rId28"/>
+              </a:rPr>
+              <a:t>Lofar 4</a:t>
+            </a:r>
+          </a:p>
+        </p:txBody>
+      </p:sp>
+      <p:sp>
+        <p:nvSpPr>
+          <p:cNvPr id="17" name="Rounded Rectangle 16"/>
+          <p:cNvSpPr/>
+          <p:nvPr>
+            <a:hlinkClick r:id="rId29"/>
+          </p:nvPr>
+        </p:nvSpPr>
+        <p:spPr>
+          <a:xfrm>
+            <a:off x="4948732" y="2682240"/>
+            <a:ext cx="2200046" cy="365760"/>
+          </a:xfrm>
+          <a:prstGeom prst="roundRect">
+            <a:avLst/>
+          </a:prstGeom>
+          <a:solidFill>
+            <a:srgbClr val="E8EEF7"/>
+          </a:solidFill>
+          <a:ln>
+            <a:solidFill>
+              <a:srgbClr val="1F3A5F"/>
+            </a:solidFill>
+          </a:ln>
+        </p:spPr>
+        <p:style>
+          <a:lnRef idx="1">
+            <a:schemeClr val="accent1"/>
+          </a:lnRef>
+          <a:fillRef idx="3">
+            <a:schemeClr val="accent1"/>
+          </a:fillRef>
+          <a:effectRef idx="2">
+            <a:schemeClr val="accent1"/>
+          </a:effectRef>
+          <a:fontRef idx="minor">
+            <a:schemeClr val="lt1"/>
+          </a:fontRef>
+        </p:style>
+        <p:txBody>
+          <a:bodyPr rtlCol="0" anchor="ctr" lIns="45720" rIns="45720"/>
+          <a:lstStyle/>
+          <a:p>
+            <a:pPr algn="ctr"/>
+            <a:r>
+              <a:rPr sz="900">
+                <a:solidFill>
+                  <a:srgbClr val="1F3A5F"/>
+                </a:solidFill>
+              </a:rPr>
+              <a:t>Gram 28: Intrepid-class contact bearing 279, codename Vulcan</a:t>
+            </a:r>
+          </a:p>
+        </p:txBody>
+      </p:sp>
+      <p:sp>
+        <p:nvSpPr>
+          <p:cNvPr id="18" name="TextBox 17"/>
+          <p:cNvSpPr txBox="1"/>
+          <p:nvPr/>
+        </p:nvSpPr>
+        <p:spPr>
+          <a:xfrm>
+            <a:off x="4948732" y="3066288"/>
+            <a:ext cx="2200046" cy="1447800"/>
+          </a:xfrm>
+          <a:prstGeom prst="rect">
+            <a:avLst/>
+          </a:prstGeom>
+          <a:noFill/>
+        </p:spPr>
+        <p:txBody>
+          <a:bodyPr wrap="square">
+            <a:spAutoFit/>
+          </a:bodyPr>
+          <a:lstStyle/>
+          <a:p>
+            <a:r>
+              <a:rPr sz="800">
+                <a:hlinkClick r:id="rId30"/>
+              </a:rPr>
+              <a:t>Lofar 1</a:t>
+            </a:r>
+          </a:p>
+          <a:p>
+            <a:r>
+              <a:rPr sz="800">
+                <a:hlinkClick r:id="rId31"/>
+              </a:rPr>
+              <a:t>Lofar 2</a:t>
+            </a:r>
+          </a:p>
+        </p:txBody>
+      </p:sp>
+      <p:sp>
+        <p:nvSpPr>
+          <p:cNvPr id="19" name="Rounded Rectangle 18"/>
+          <p:cNvSpPr/>
+          <p:nvPr>
+            <a:hlinkClick r:id="rId32"/>
+          </p:nvPr>
+        </p:nvSpPr>
+        <p:spPr>
+          <a:xfrm>
+            <a:off x="7240219" y="2682240"/>
+            <a:ext cx="2200046" cy="365760"/>
+          </a:xfrm>
+          <a:prstGeom prst="roundRect">
+            <a:avLst/>
+          </a:prstGeom>
+          <a:solidFill>
+            <a:srgbClr val="E8EEF7"/>
+          </a:solidFill>
+          <a:ln>
+            <a:solidFill>
+              <a:srgbClr val="1F3A5F"/>
+            </a:solidFill>
+          </a:ln>
+        </p:spPr>
+        <p:style>
+          <a:lnRef idx="1">
+            <a:schemeClr val="accent1"/>
+          </a:lnRef>
+          <a:fillRef idx="3">
+            <a:schemeClr val="accent1"/>
+          </a:fillRef>
+          <a:effectRef idx="2">
+            <a:schemeClr val="accent1"/>
+          </a:effectRef>
+          <a:fontRef idx="minor">
+            <a:schemeClr val="lt1"/>
+          </a:fontRef>
+        </p:style>
+        <p:txBody>
+          <a:bodyPr rtlCol="0" anchor="ctr" lIns="45720" rIns="45720"/>
+          <a:lstStyle/>
+          <a:p>
+            <a:pPr algn="ctr"/>
+            <a:r>
+              <a:rPr sz="900">
+                <a:solidFill>
+                  <a:srgbClr val="1F3A5F"/>
+                </a:solidFill>
+              </a:rPr>
+              <a:t>Gram 30: Voyager, Category 2, Bajor</a:t>
+            </a:r>
+          </a:p>
+        </p:txBody>
+      </p:sp>
+      <p:sp>
+        <p:nvSpPr>
+          <p:cNvPr id="20" name="TextBox 19"/>
+          <p:cNvSpPr txBox="1"/>
+          <p:nvPr/>
+        </p:nvSpPr>
+        <p:spPr>
+          <a:xfrm>
+            <a:off x="7240219" y="3066288"/>
+            <a:ext cx="2200046" cy="1447800"/>
+          </a:xfrm>
+          <a:prstGeom prst="rect">
+            <a:avLst/>
+          </a:prstGeom>
+          <a:noFill/>
+        </p:spPr>
+        <p:txBody>
+          <a:bodyPr wrap="square">
+            <a:spAutoFit/>
+          </a:bodyPr>
+          <a:lstStyle/>
+          <a:p>
+            <a:r>
+              <a:rPr sz="800">
+                <a:hlinkClick r:id="rId33"/>
+              </a:rPr>
+              <a:t>Lofar 1</a:t>
+            </a:r>
+          </a:p>
+          <a:p>
+            <a:r>
+              <a:rPr sz="800">
+                <a:hlinkClick r:id="rId34"/>
+              </a:rPr>
+              <a:t>Lofar 2</a:t>
+            </a:r>
+          </a:p>
+          <a:p>
+            <a:r>
+              <a:rPr sz="800">
+                <a:hlinkClick r:id="rId35"/>
+              </a:rPr>
+              <a:t>Lofar 3</a:t>
+            </a:r>
+          </a:p>
+        </p:txBody>
+      </p:sp>
+      <p:sp>
+        <p:nvSpPr>
+          <p:cNvPr id="21" name="Rounded Rectangle 20"/>
+          <p:cNvSpPr/>
+          <p:nvPr>
+            <a:hlinkClick r:id="rId36"/>
+          </p:nvPr>
+        </p:nvSpPr>
+        <p:spPr>
+          <a:xfrm>
+            <a:off x="9531705" y="2682240"/>
+            <a:ext cx="2200046" cy="365760"/>
+          </a:xfrm>
+          <a:prstGeom prst="roundRect">
+            <a:avLst/>
+          </a:prstGeom>
+          <a:solidFill>
+            <a:srgbClr val="E8EEF7"/>
+          </a:solidFill>
+          <a:ln>
+            <a:solidFill>
+              <a:srgbClr val="1F3A5F"/>
+            </a:solidFill>
+          </a:ln>
+        </p:spPr>
+        <p:style>
+          <a:lnRef idx="1">
+            <a:schemeClr val="accent1"/>
+          </a:lnRef>
+          <a:fillRef idx="3">
+            <a:schemeClr val="accent1"/>
+          </a:fillRef>
+          <a:effectRef idx="2">
+            <a:schemeClr val="accent1"/>
+          </a:effectRef>
+          <a:fontRef idx="minor">
+            <a:schemeClr val="lt1"/>
+          </a:fontRef>
+        </p:style>
+        <p:txBody>
+          <a:bodyPr rtlCol="0" anchor="ctr" lIns="45720" rIns="45720"/>
+          <a:lstStyle/>
+          <a:p>
+            <a:pPr algn="ctr"/>
+            <a:r>
+              <a:rPr sz="900">
+                <a:solidFill>
+                  <a:srgbClr val="1F3A5F"/>
+                </a:solidFill>
+              </a:rPr>
+              <a:t>Gram 31: Lambda Shuttle, Category 3, Bajor</a:t>
+            </a:r>
+          </a:p>
+        </p:txBody>
+      </p:sp>
+      <p:sp>
+        <p:nvSpPr>
+          <p:cNvPr id="22" name="TextBox 21"/>
+          <p:cNvSpPr txBox="1"/>
+          <p:nvPr/>
+        </p:nvSpPr>
+        <p:spPr>
+          <a:xfrm>
+            <a:off x="9531705" y="3066288"/>
+            <a:ext cx="2200046" cy="1447800"/>
+          </a:xfrm>
+          <a:prstGeom prst="rect">
+            <a:avLst/>
+          </a:prstGeom>
+          <a:noFill/>
+        </p:spPr>
+        <p:txBody>
+          <a:bodyPr wrap="square">
+            <a:spAutoFit/>
+          </a:bodyPr>
+          <a:lstStyle/>
+          <a:p>
+            <a:r>
+              <a:rPr sz="800">
+                <a:hlinkClick r:id="rId37"/>
+              </a:rPr>
+              <a:t>Lofar 1</a:t>
+            </a:r>
+          </a:p>
+        </p:txBody>
+      </p:sp>
+      <p:sp>
+        <p:nvSpPr>
+          <p:cNvPr id="23" name="Rounded Rectangle 22"/>
+          <p:cNvSpPr/>
+          <p:nvPr>
+            <a:hlinkClick r:id="rId38"/>
+          </p:nvPr>
+        </p:nvSpPr>
+        <p:spPr>
+          <a:xfrm>
+            <a:off x="365760" y="4632960"/>
+            <a:ext cx="2200046" cy="365760"/>
+          </a:xfrm>
+          <a:prstGeom prst="roundRect">
+            <a:avLst/>
+          </a:prstGeom>
+          <a:solidFill>
+            <a:srgbClr val="E8EEF7"/>
+          </a:solidFill>
+          <a:ln>
+            <a:solidFill>
+              <a:srgbClr val="1F3A5F"/>
+            </a:solidFill>
+          </a:ln>
+        </p:spPr>
+        <p:style>
+          <a:lnRef idx="1">
+            <a:schemeClr val="accent1"/>
+          </a:lnRef>
+          <a:fillRef idx="3">
+            <a:schemeClr val="accent1"/>
+          </a:fillRef>
+          <a:effectRef idx="2">
+            <a:schemeClr val="accent1"/>
+          </a:effectRef>
+          <a:fontRef idx="minor">
+            <a:schemeClr val="lt1"/>
+          </a:fontRef>
+        </p:style>
+        <p:txBody>
+          <a:bodyPr rtlCol="0" anchor="ctr" lIns="45720" rIns="45720"/>
+          <a:lstStyle/>
+          <a:p>
+            <a:pPr algn="ctr"/>
+            <a:r>
+              <a:rPr sz="900">
+                <a:solidFill>
+                  <a:srgbClr val="1F3A5F"/>
+                </a:solidFill>
+              </a:rPr>
+              <a:t>Gram 32: Nebulon-B, Category 4, Cardassia</a:t>
+            </a:r>
+          </a:p>
+        </p:txBody>
+      </p:sp>
+      <p:sp>
+        <p:nvSpPr>
+          <p:cNvPr id="24" name="TextBox 23"/>
+          <p:cNvSpPr txBox="1"/>
+          <p:nvPr/>
+        </p:nvSpPr>
+        <p:spPr>
+          <a:xfrm>
+            <a:off x="365760" y="5017008"/>
+            <a:ext cx="2200046" cy="1447800"/>
+          </a:xfrm>
+          <a:prstGeom prst="rect">
+            <a:avLst/>
+          </a:prstGeom>
+          <a:noFill/>
+        </p:spPr>
+        <p:txBody>
+          <a:bodyPr wrap="square">
+            <a:spAutoFit/>
+          </a:bodyPr>
+          <a:lstStyle/>
+          <a:p>
+            <a:r>
+              <a:rPr sz="800">
+                <a:hlinkClick r:id="rId39"/>
+              </a:rPr>
+              <a:t>Lofar 1</a:t>
+            </a:r>
+          </a:p>
+          <a:p>
+            <a:r>
+              <a:rPr sz="800">
+                <a:hlinkClick r:id="rId40"/>
+              </a:rPr>
+              <a:t>Lofar 2</a:t>
+            </a:r>
+          </a:p>
+          <a:p>
+            <a:r>
+              <a:rPr sz="800">
+                <a:hlinkClick r:id="rId41"/>
+              </a:rPr>
+              <a:t>Lofar 3</a:t>
+            </a:r>
+          </a:p>
+          <a:p>
+            <a:r>
+              <a:rPr sz="800">
+                <a:hlinkClick r:id="rId42"/>
+              </a:rPr>
+              <a:t>Lofar 4</a:t>
+            </a:r>
+          </a:p>
+        </p:txBody>
+      </p:sp>
+      <p:sp>
+        <p:nvSpPr>
+          <p:cNvPr id="25" name="Rounded Rectangle 24"/>
+          <p:cNvSpPr/>
+          <p:nvPr>
+            <a:hlinkClick r:id="rId43"/>
+          </p:nvPr>
+        </p:nvSpPr>
+        <p:spPr>
+          <a:xfrm>
+            <a:off x="2657246" y="4632960"/>
+            <a:ext cx="2200046" cy="365760"/>
+          </a:xfrm>
+          <a:prstGeom prst="roundRect">
+            <a:avLst/>
+          </a:prstGeom>
+          <a:solidFill>
+            <a:srgbClr val="E8EEF7"/>
+          </a:solidFill>
+          <a:ln>
+            <a:solidFill>
+              <a:srgbClr val="1F3A5F"/>
+            </a:solidFill>
+          </a:ln>
+        </p:spPr>
+        <p:style>
+          <a:lnRef idx="1">
+            <a:schemeClr val="accent1"/>
+          </a:lnRef>
+          <a:fillRef idx="3">
+            <a:schemeClr val="accent1"/>
+          </a:fillRef>
+          <a:effectRef idx="2">
+            <a:schemeClr val="accent1"/>
+          </a:effectRef>
+          <a:fontRef idx="minor">
+            <a:schemeClr val="lt1"/>
+          </a:fontRef>
+        </p:style>
+        <p:txBody>
+          <a:bodyPr rtlCol="0" anchor="ctr" lIns="45720" rIns="45720"/>
+          <a:lstStyle/>
+          <a:p>
+            <a:pPr algn="ctr"/>
+            <a:r>
+              <a:rPr sz="900">
+                <a:solidFill>
+                  <a:srgbClr val="1F3A5F"/>
+                </a:solidFill>
+              </a:rPr>
+              <a:t>Gram 33: Prometheus, Category 3, Romulus</a:t>
+            </a:r>
+          </a:p>
+        </p:txBody>
+      </p:sp>
+      <p:sp>
+        <p:nvSpPr>
+          <p:cNvPr id="26" name="TextBox 25"/>
+          <p:cNvSpPr txBox="1"/>
+          <p:nvPr/>
+        </p:nvSpPr>
+        <p:spPr>
+          <a:xfrm>
+            <a:off x="2657246" y="5017008"/>
+            <a:ext cx="2200046" cy="1447800"/>
+          </a:xfrm>
+          <a:prstGeom prst="rect">
+            <a:avLst/>
+          </a:prstGeom>
+          <a:noFill/>
+        </p:spPr>
+        <p:txBody>
+          <a:bodyPr wrap="square">
+            <a:spAutoFit/>
+          </a:bodyPr>
+          <a:lstStyle/>
+          <a:p>
+            <a:r>
+              <a:rPr sz="800">
+                <a:hlinkClick r:id="rId44"/>
+              </a:rPr>
+              <a:t>Lofar 1</a:t>
+            </a:r>
+          </a:p>
+        </p:txBody>
+      </p:sp>
+      <p:sp>
+        <p:nvSpPr>
+          <p:cNvPr id="27" name="Rounded Rectangle 26"/>
+          <p:cNvSpPr/>
+          <p:nvPr>
+            <a:hlinkClick r:id="rId45"/>
+          </p:nvPr>
+        </p:nvSpPr>
+        <p:spPr>
+          <a:xfrm>
+            <a:off x="4948732" y="4632960"/>
+            <a:ext cx="2200046" cy="365760"/>
+          </a:xfrm>
+          <a:prstGeom prst="roundRect">
+            <a:avLst/>
+          </a:prstGeom>
+          <a:solidFill>
+            <a:srgbClr val="E8EEF7"/>
+          </a:solidFill>
+          <a:ln>
+            <a:solidFill>
+              <a:srgbClr val="1F3A5F"/>
+            </a:solidFill>
+          </a:ln>
+        </p:spPr>
+        <p:style>
+          <a:lnRef idx="1">
+            <a:schemeClr val="accent1"/>
+          </a:lnRef>
+          <a:fillRef idx="3">
+            <a:schemeClr val="accent1"/>
+          </a:fillRef>
+          <a:effectRef idx="2">
+            <a:schemeClr val="accent1"/>
+          </a:effectRef>
+          <a:fontRef idx="minor">
+            <a:schemeClr val="lt1"/>
+          </a:fontRef>
+        </p:style>
+        <p:txBody>
+          <a:bodyPr rtlCol="0" anchor="ctr" lIns="45720" rIns="45720"/>
+          <a:lstStyle/>
+          <a:p>
+            <a:pPr algn="ctr"/>
+            <a:r>
+              <a:rPr sz="900">
+                <a:solidFill>
+                  <a:srgbClr val="1F3A5F"/>
+                </a:solidFill>
+              </a:rPr>
+              <a:t>Gram 34: Miranda-class, Category 2, Dagobah</a:t>
+            </a:r>
+          </a:p>
+        </p:txBody>
+      </p:sp>
+      <p:sp>
+        <p:nvSpPr>
+          <p:cNvPr id="28" name="TextBox 27"/>
+          <p:cNvSpPr txBox="1"/>
+          <p:nvPr/>
+        </p:nvSpPr>
+        <p:spPr>
+          <a:xfrm>
+            <a:off x="4948732" y="5017008"/>
+            <a:ext cx="2200046" cy="1447800"/>
+          </a:xfrm>
+          <a:prstGeom prst="rect">
+            <a:avLst/>
+          </a:prstGeom>
+          <a:noFill/>
+        </p:spPr>
+        <p:txBody>
+          <a:bodyPr wrap="square">
+            <a:spAutoFit/>
+          </a:bodyPr>
+          <a:lstStyle/>
+          <a:p>
+            <a:r>
+              <a:rPr sz="800">
+                <a:hlinkClick r:id="rId46"/>
+              </a:rPr>
+              <a:t>Lofar 1</a:t>
+            </a:r>
+          </a:p>
+          <a:p>
+            <a:r>
+              <a:rPr sz="800">
+                <a:hlinkClick r:id="rId47"/>
+              </a:rPr>
+              <a:t>Lofar 2</a:t>
+            </a:r>
+          </a:p>
+          <a:p>
+            <a:r>
+              <a:rPr sz="800">
+                <a:hlinkClick r:id="rId48"/>
+              </a:rPr>
+              <a:t>Lofar 3</a:t>
+            </a:r>
+          </a:p>
+        </p:txBody>
+      </p:sp>
+      <p:sp>
+        <p:nvSpPr>
+          <p:cNvPr id="29" name="Rounded Rectangle 28"/>
+          <p:cNvSpPr/>
+          <p:nvPr>
+            <a:hlinkClick r:id="rId49"/>
+          </p:nvPr>
+        </p:nvSpPr>
+        <p:spPr>
+          <a:xfrm>
+            <a:off x="7240219" y="4632960"/>
+            <a:ext cx="2200046" cy="365760"/>
+          </a:xfrm>
+          <a:prstGeom prst="roundRect">
+            <a:avLst/>
+          </a:prstGeom>
+          <a:solidFill>
+            <a:srgbClr val="E8EEF7"/>
+          </a:solidFill>
+          <a:ln>
+            <a:solidFill>
+              <a:srgbClr val="1F3A5F"/>
+            </a:solidFill>
+          </a:ln>
+        </p:spPr>
+        <p:style>
+          <a:lnRef idx="1">
+            <a:schemeClr val="accent1"/>
+          </a:lnRef>
+          <a:fillRef idx="3">
+            <a:schemeClr val="accent1"/>
+          </a:fillRef>
+          <a:effectRef idx="2">
+            <a:schemeClr val="accent1"/>
+          </a:effectRef>
+          <a:fontRef idx="minor">
+            <a:schemeClr val="lt1"/>
+          </a:fontRef>
+        </p:style>
+        <p:txBody>
+          <a:bodyPr rtlCol="0" anchor="ctr" lIns="45720" rIns="45720"/>
+          <a:lstStyle/>
+          <a:p>
+            <a:pPr algn="ctr"/>
+            <a:r>
+              <a:rPr sz="900">
+                <a:solidFill>
+                  <a:srgbClr val="1F3A5F"/>
+                </a:solidFill>
+              </a:rPr>
+              <a:t>Gram 35: Nebulon-B, Category 4, Gandalf</a:t>
+            </a:r>
+          </a:p>
+        </p:txBody>
+      </p:sp>
+      <p:sp>
+        <p:nvSpPr>
+          <p:cNvPr id="30" name="TextBox 29"/>
+          <p:cNvSpPr txBox="1"/>
+          <p:nvPr/>
+        </p:nvSpPr>
+        <p:spPr>
+          <a:xfrm>
+            <a:off x="7240219" y="5017008"/>
+            <a:ext cx="2200046" cy="1447800"/>
+          </a:xfrm>
+          <a:prstGeom prst="rect">
+            <a:avLst/>
+          </a:prstGeom>
+          <a:noFill/>
+        </p:spPr>
+        <p:txBody>
+          <a:bodyPr wrap="square">
+            <a:spAutoFit/>
+          </a:bodyPr>
+          <a:lstStyle/>
+          <a:p>
+            <a:r>
+              <a:rPr sz="800">
+                <a:hlinkClick r:id="rId50"/>
+              </a:rPr>
+              <a:t>Lofar 1</a:t>
+            </a:r>
+          </a:p>
+        </p:txBody>
+      </p:sp>
+      <p:sp>
+        <p:nvSpPr>
+          <p:cNvPr id="31" name="Rounded Rectangle 30"/>
+          <p:cNvSpPr/>
+          <p:nvPr>
+            <a:hlinkClick r:id="rId51"/>
+          </p:nvPr>
+        </p:nvSpPr>
+        <p:spPr>
+          <a:xfrm>
+            <a:off x="9531705" y="4632960"/>
+            <a:ext cx="2200046" cy="365760"/>
+          </a:xfrm>
+          <a:prstGeom prst="roundRect">
+            <a:avLst/>
+          </a:prstGeom>
+          <a:solidFill>
+            <a:srgbClr val="E8EEF7"/>
+          </a:solidFill>
+          <a:ln>
+            <a:solidFill>
+              <a:srgbClr val="1F3A5F"/>
+            </a:solidFill>
+          </a:ln>
+        </p:spPr>
+        <p:style>
+          <a:lnRef idx="1">
+            <a:schemeClr val="accent1"/>
+          </a:lnRef>
+          <a:fillRef idx="3">
+            <a:schemeClr val="accent1"/>
+          </a:fillRef>
+          <a:effectRef idx="2">
+            <a:schemeClr val="accent1"/>
+          </a:effectRef>
+          <a:fontRef idx="minor">
+            <a:schemeClr val="lt1"/>
+          </a:fontRef>
+        </p:style>
+        <p:txBody>
+          <a:bodyPr rtlCol="0" anchor="ctr" lIns="45720" rIns="45720"/>
+          <a:lstStyle/>
+          <a:p>
+            <a:pPr algn="ctr"/>
+            <a:r>
+              <a:rPr sz="900">
+                <a:solidFill>
+                  <a:srgbClr val="1F3A5F"/>
+                </a:solidFill>
+              </a:rPr>
+              <a:t>Gram 36: Tantive IV contact bearing 226, codename Romulus</a:t>
+            </a:r>
+          </a:p>
+        </p:txBody>
+      </p:sp>
+      <p:sp>
+        <p:nvSpPr>
+          <p:cNvPr id="32" name="TextBox 31"/>
+          <p:cNvSpPr txBox="1"/>
+          <p:nvPr/>
+        </p:nvSpPr>
+        <p:spPr>
+          <a:xfrm>
+            <a:off x="9531705" y="5017008"/>
+            <a:ext cx="2200046" cy="1447800"/>
+          </a:xfrm>
+          <a:prstGeom prst="rect">
+            <a:avLst/>
+          </a:prstGeom>
+          <a:noFill/>
+        </p:spPr>
+        <p:txBody>
+          <a:bodyPr wrap="square">
+            <a:spAutoFit/>
+          </a:bodyPr>
+          <a:lstStyle/>
+          <a:p>
+            <a:r>
+              <a:rPr sz="800">
                 <a:hlinkClick r:id="rId52"/>
               </a:rPr>
               <a:t>Lofar 1</a:t>
@@ -6177,6 +6265,92 @@
                 <a:hlinkClick r:id="rId55"/>
               </a:rPr>
               <a:t>Lofar 4</a:t>
+            </a:r>
+          </a:p>
+        </p:txBody>
+      </p:sp>
+    </p:spTree>
+  </p:cSld>
+  <p:clrMapOvr>
+    <a:masterClrMapping/>
+  </p:clrMapOvr>
+</p:sld>
+</file>
+
+<file path=ppt/slides/slide4.xml><?xml version="1.0" encoding="utf-8"?>
+<p:sld xmlns:a="http://schemas.openxmlformats.org/drawingml/2006/main" xmlns:p="http://schemas.openxmlformats.org/presentationml/2006/main" xmlns:r="http://schemas.openxmlformats.org/officeDocument/2006/relationships">
+  <p:cSld>
+    <p:spTree>
+      <p:nvGrpSpPr>
+        <p:cNvPr id="1" name=""/>
+        <p:cNvGrpSpPr/>
+        <p:nvPr/>
+      </p:nvGrpSpPr>
+      <p:grpSpPr/>
+      <p:sp>
+        <p:nvSpPr>
+          <p:cNvPr id="2" name="TextBox 1"/>
+          <p:cNvSpPr txBox="1"/>
+          <p:nvPr/>
+        </p:nvSpPr>
+        <p:spPr>
+          <a:xfrm>
+            <a:off x="914400" y="2377440"/>
+            <a:ext cx="10360152" cy="1280160"/>
+          </a:xfrm>
+          <a:prstGeom prst="rect">
+            <a:avLst/>
+          </a:prstGeom>
+          <a:noFill/>
+        </p:spPr>
+        <p:txBody>
+          <a:bodyPr wrap="square">
+            <a:spAutoFit/>
+          </a:bodyPr>
+          <a:lstStyle/>
+          <a:p>
+            <a:pPr algn="ctr"/>
+            <a:r>
+              <a:rPr sz="4000" b="1">
+                <a:solidFill>
+                  <a:srgbClr val="1F3A5F"/>
+                </a:solidFill>
+              </a:rPr>
+              <a:t>End of Instructor Progress Test 3 Grams No FR</a:t>
+            </a:r>
+          </a:p>
+        </p:txBody>
+      </p:sp>
+      <p:sp>
+        <p:nvSpPr>
+          <p:cNvPr id="3" name="TextBox 2"/>
+          <p:cNvSpPr txBox="1"/>
+          <p:nvPr/>
+        </p:nvSpPr>
+        <p:spPr>
+          <a:xfrm>
+            <a:off x="914400" y="3840480"/>
+            <a:ext cx="10360152" cy="731520"/>
+          </a:xfrm>
+          <a:prstGeom prst="rect">
+            <a:avLst/>
+          </a:prstGeom>
+          <a:noFill/>
+        </p:spPr>
+        <p:txBody>
+          <a:bodyPr wrap="none">
+            <a:spAutoFit/>
+          </a:bodyPr>
+          <a:lstStyle/>
+          <a:p>
+            <a:pPr algn="ctr"/>
+            <a:r>
+              <a:rPr sz="2400">
+                <a:solidFill>
+                  <a:srgbClr val="1F3A5F"/>
+                </a:solidFill>
+              </a:rPr>
+              <a:t>Instructor Version</a:t>
             </a:r>
           </a:p>
         </p:txBody>

--- a/source/Instructor Progress Test 3 Grams No FR/Instructor Progress Test 3 Grams No FR.pptx
+++ b/source/Instructor Progress Test 3 Grams No FR/Instructor Progress Test 3 Grams No FR.pptx
@@ -7,8 +7,6 @@
   <p:sldIdLst>
     <p:sldId id="256" r:id="rId7"/>
     <p:sldId id="257" r:id="rId8"/>
-    <p:sldId id="258" r:id="rId9"/>
-    <p:sldId id="259" r:id="rId10"/>
   </p:sldIdLst>
   <p:sldSz cx="12188952" cy="6858000" type="screen4x3"/>
   <p:notesSz cx="6858000" cy="9144000"/>
@@ -3093,14 +3091,120 @@
       <p:grpSpPr/>
       <p:sp>
         <p:nvSpPr>
-          <p:cNvPr id="2" name="TextBox 1"/>
+          <p:cNvPr id="2" name="Rectangle 1"/>
+          <p:cNvSpPr/>
+          <p:nvPr/>
+        </p:nvSpPr>
+        <p:spPr>
+          <a:xfrm>
+            <a:off x="0" y="0"/>
+            <a:ext cx="12188952" cy="548640"/>
+          </a:xfrm>
+          <a:prstGeom prst="rect">
+            <a:avLst/>
+          </a:prstGeom>
+          <a:solidFill>
+            <a:srgbClr val="1F3A5F"/>
+          </a:solidFill>
+          <a:ln>
+            <a:noFill/>
+          </a:ln>
+        </p:spPr>
+        <p:style>
+          <a:lnRef idx="1">
+            <a:schemeClr val="accent1"/>
+          </a:lnRef>
+          <a:fillRef idx="3">
+            <a:schemeClr val="accent1"/>
+          </a:fillRef>
+          <a:effectRef idx="2">
+            <a:schemeClr val="accent1"/>
+          </a:effectRef>
+          <a:fontRef idx="minor">
+            <a:schemeClr val="lt1"/>
+          </a:fontRef>
+        </p:style>
+        <p:txBody>
+          <a:bodyPr rtlCol="0" anchor="ctr" lIns="182880" rIns="182880"/>
+          <a:lstStyle/>
+          <a:p>
+            <a:pPr algn="ctr"/>
+            <a:r>
+              <a:rPr sz="2000" b="1">
+                <a:solidFill>
+                  <a:srgbClr val="FFFFFF"/>
+                </a:solidFill>
+              </a:rPr>
+              <a:t>Instructor Progress Test 3 Grams No FR — Page 1 of 2</a:t>
+            </a:r>
+          </a:p>
+        </p:txBody>
+      </p:sp>
+      <p:sp>
+        <p:nvSpPr>
+          <p:cNvPr id="3" name="Rounded Rectangle 2">
+            <a:hlinkClick r:id="rId2"/>
+          </p:cNvPr>
+          <p:cNvSpPr/>
+          <p:nvPr/>
+        </p:nvSpPr>
+        <p:spPr>
+          <a:xfrm>
+            <a:off x="365760" y="731520"/>
+            <a:ext cx="2200046" cy="365760"/>
+          </a:xfrm>
+          <a:prstGeom prst="roundRect">
+            <a:avLst/>
+          </a:prstGeom>
+          <a:solidFill>
+            <a:srgbClr val="E8EEF7"/>
+          </a:solidFill>
+          <a:ln>
+            <a:solidFill>
+              <a:srgbClr val="1F3A5F"/>
+            </a:solidFill>
+          </a:ln>
+        </p:spPr>
+        <p:style>
+          <a:lnRef idx="1">
+            <a:schemeClr val="accent1"/>
+          </a:lnRef>
+          <a:fillRef idx="3">
+            <a:schemeClr val="accent1"/>
+          </a:fillRef>
+          <a:effectRef idx="2">
+            <a:schemeClr val="accent1"/>
+          </a:effectRef>
+          <a:fontRef idx="minor">
+            <a:schemeClr val="lt1"/>
+          </a:fontRef>
+        </p:style>
+        <p:txBody>
+          <a:bodyPr rtlCol="0" anchor="ctr" lIns="45720" rIns="45720"/>
+          <a:lstStyle/>
+          <a:p>
+            <a:pPr algn="ctr"/>
+            <a:r>
+              <a:rPr sz="900">
+                <a:solidFill>
+                  <a:srgbClr val="1F3A5F"/>
+                </a:solidFill>
+              </a:rPr>
+              <a:t>Gram 1: Imperial-class, Category 1, Coruscant</a:t>
+            </a:r>
+          </a:p>
+        </p:txBody>
+      </p:sp>
+      <p:sp>
+        <p:nvSpPr>
+          <p:cNvPr id="4" name="TextBox 3"/>
           <p:cNvSpPr txBox="1"/>
           <p:nvPr/>
         </p:nvSpPr>
         <p:spPr>
           <a:xfrm>
-            <a:off x="914400" y="2377440"/>
-            <a:ext cx="10360152" cy="1280160"/>
+            <a:off x="365760" y="1115568"/>
+            <a:ext cx="2200046" cy="1447800"/>
           </a:xfrm>
           <a:prstGeom prst="rect">
             <a:avLst/>
@@ -3113,28 +3217,88 @@
           </a:bodyPr>
           <a:lstStyle/>
           <a:p>
+            <a:r>
+              <a:rPr sz="800">
+                <a:hlinkClick r:id="rId3"/>
+              </a:rPr>
+              <a:t>Lofar 1</a:t>
+            </a:r>
+          </a:p>
+          <a:p>
+            <a:r>
+              <a:rPr sz="800">
+                <a:hlinkClick r:id="rId4"/>
+              </a:rPr>
+              <a:t>Lofar 2</a:t>
+            </a:r>
+          </a:p>
+        </p:txBody>
+      </p:sp>
+      <p:sp>
+        <p:nvSpPr>
+          <p:cNvPr id="5" name="Rounded Rectangle 4">
+            <a:hlinkClick r:id="rId5"/>
+          </p:cNvPr>
+          <p:cNvSpPr/>
+          <p:nvPr/>
+        </p:nvSpPr>
+        <p:spPr>
+          <a:xfrm>
+            <a:off x="2657246" y="731520"/>
+            <a:ext cx="2200046" cy="365760"/>
+          </a:xfrm>
+          <a:prstGeom prst="roundRect">
+            <a:avLst/>
+          </a:prstGeom>
+          <a:solidFill>
+            <a:srgbClr val="E8EEF7"/>
+          </a:solidFill>
+          <a:ln>
+            <a:solidFill>
+              <a:srgbClr val="1F3A5F"/>
+            </a:solidFill>
+          </a:ln>
+        </p:spPr>
+        <p:style>
+          <a:lnRef idx="1">
+            <a:schemeClr val="accent1"/>
+          </a:lnRef>
+          <a:fillRef idx="3">
+            <a:schemeClr val="accent1"/>
+          </a:fillRef>
+          <a:effectRef idx="2">
+            <a:schemeClr val="accent1"/>
+          </a:effectRef>
+          <a:fontRef idx="minor">
+            <a:schemeClr val="lt1"/>
+          </a:fontRef>
+        </p:style>
+        <p:txBody>
+          <a:bodyPr rtlCol="0" anchor="ctr" lIns="45720" rIns="45720"/>
+          <a:lstStyle/>
+          <a:p>
             <a:pPr algn="ctr"/>
             <a:r>
-              <a:rPr sz="4000" b="1">
+              <a:rPr sz="900">
                 <a:solidFill>
                   <a:srgbClr val="1F3A5F"/>
                 </a:solidFill>
               </a:rPr>
-              <a:t>Welcome to Instructor Progress Test 3 Grams No FR</a:t>
-            </a:r>
-          </a:p>
-        </p:txBody>
-      </p:sp>
-      <p:sp>
-        <p:nvSpPr>
-          <p:cNvPr id="3" name="TextBox 2"/>
+              <a:t>Gram 2: Acclamator-class, Category 3, Bespin</a:t>
+            </a:r>
+          </a:p>
+        </p:txBody>
+      </p:sp>
+      <p:sp>
+        <p:nvSpPr>
+          <p:cNvPr id="6" name="TextBox 5"/>
           <p:cNvSpPr txBox="1"/>
           <p:nvPr/>
         </p:nvSpPr>
         <p:spPr>
           <a:xfrm>
-            <a:off x="914400" y="3840480"/>
-            <a:ext cx="10360152" cy="731520"/>
+            <a:off x="2657246" y="1115568"/>
+            <a:ext cx="2200046" cy="1447800"/>
           </a:xfrm>
           <a:prstGeom prst="rect">
             <a:avLst/>
@@ -3142,19 +3306,1326 @@
           <a:noFill/>
         </p:spPr>
         <p:txBody>
-          <a:bodyPr wrap="none">
+          <a:bodyPr wrap="square">
             <a:spAutoFit/>
           </a:bodyPr>
           <a:lstStyle/>
           <a:p>
+            <a:r>
+              <a:rPr sz="800">
+                <a:hlinkClick r:id="rId6"/>
+              </a:rPr>
+              <a:t>Lofar 1</a:t>
+            </a:r>
+          </a:p>
+          <a:p>
+            <a:r>
+              <a:rPr sz="800">
+                <a:hlinkClick r:id="rId7"/>
+              </a:rPr>
+              <a:t>Lofar 2</a:t>
+            </a:r>
+          </a:p>
+          <a:p>
+            <a:r>
+              <a:rPr sz="800">
+                <a:hlinkClick r:id="rId8"/>
+              </a:rPr>
+              <a:t>Lofar 3</a:t>
+            </a:r>
+          </a:p>
+          <a:p>
+            <a:r>
+              <a:rPr sz="800">
+                <a:hlinkClick r:id="rId9"/>
+              </a:rPr>
+              <a:t>Lofar 4</a:t>
+            </a:r>
+          </a:p>
+        </p:txBody>
+      </p:sp>
+      <p:sp>
+        <p:nvSpPr>
+          <p:cNvPr id="7" name="Rounded Rectangle 6">
+            <a:hlinkClick r:id="rId10"/>
+          </p:cNvPr>
+          <p:cNvSpPr/>
+          <p:nvPr/>
+        </p:nvSpPr>
+        <p:spPr>
+          <a:xfrm>
+            <a:off x="4948732" y="731520"/>
+            <a:ext cx="2200046" cy="365760"/>
+          </a:xfrm>
+          <a:prstGeom prst="roundRect">
+            <a:avLst/>
+          </a:prstGeom>
+          <a:solidFill>
+            <a:srgbClr val="E8EEF7"/>
+          </a:solidFill>
+          <a:ln>
+            <a:solidFill>
+              <a:srgbClr val="1F3A5F"/>
+            </a:solidFill>
+          </a:ln>
+        </p:spPr>
+        <p:style>
+          <a:lnRef idx="1">
+            <a:schemeClr val="accent1"/>
+          </a:lnRef>
+          <a:fillRef idx="3">
+            <a:schemeClr val="accent1"/>
+          </a:fillRef>
+          <a:effectRef idx="2">
+            <a:schemeClr val="accent1"/>
+          </a:effectRef>
+          <a:fontRef idx="minor">
+            <a:schemeClr val="lt1"/>
+          </a:fontRef>
+        </p:style>
+        <p:txBody>
+          <a:bodyPr rtlCol="0" anchor="ctr" lIns="45720" rIns="45720"/>
+          <a:lstStyle/>
+          <a:p>
             <a:pPr algn="ctr"/>
             <a:r>
-              <a:rPr sz="2400">
+              <a:rPr sz="900">
                 <a:solidFill>
                   <a:srgbClr val="1F3A5F"/>
                 </a:solidFill>
               </a:rPr>
-              <a:t>Instructor Version</a:t>
+              <a:t>Gram 3: Voyager, Category 4, Hoth</a:t>
+            </a:r>
+          </a:p>
+        </p:txBody>
+      </p:sp>
+      <p:sp>
+        <p:nvSpPr>
+          <p:cNvPr id="8" name="TextBox 7"/>
+          <p:cNvSpPr txBox="1"/>
+          <p:nvPr/>
+        </p:nvSpPr>
+        <p:spPr>
+          <a:xfrm>
+            <a:off x="4948732" y="1115568"/>
+            <a:ext cx="2200046" cy="1447800"/>
+          </a:xfrm>
+          <a:prstGeom prst="rect">
+            <a:avLst/>
+          </a:prstGeom>
+          <a:noFill/>
+        </p:spPr>
+        <p:txBody>
+          <a:bodyPr wrap="square">
+            <a:spAutoFit/>
+          </a:bodyPr>
+          <a:lstStyle/>
+          <a:p>
+            <a:r>
+              <a:rPr sz="800">
+                <a:hlinkClick r:id="rId11"/>
+              </a:rPr>
+              <a:t>Lofar 1</a:t>
+            </a:r>
+          </a:p>
+          <a:p>
+            <a:r>
+              <a:rPr sz="800">
+                <a:hlinkClick r:id="rId12"/>
+              </a:rPr>
+              <a:t>Lofar 2</a:t>
+            </a:r>
+          </a:p>
+          <a:p>
+            <a:r>
+              <a:rPr sz="800">
+                <a:hlinkClick r:id="rId13"/>
+              </a:rPr>
+              <a:t>Lofar 3</a:t>
+            </a:r>
+          </a:p>
+          <a:p>
+            <a:r>
+              <a:rPr sz="800">
+                <a:hlinkClick r:id="rId14"/>
+              </a:rPr>
+              <a:t>Lofar 4</a:t>
+            </a:r>
+          </a:p>
+        </p:txBody>
+      </p:sp>
+      <p:sp>
+        <p:nvSpPr>
+          <p:cNvPr id="9" name="Rounded Rectangle 8">
+            <a:hlinkClick r:id="rId15"/>
+          </p:cNvPr>
+          <p:cNvSpPr/>
+          <p:nvPr/>
+        </p:nvSpPr>
+        <p:spPr>
+          <a:xfrm>
+            <a:off x="7240219" y="731520"/>
+            <a:ext cx="2200046" cy="365760"/>
+          </a:xfrm>
+          <a:prstGeom prst="roundRect">
+            <a:avLst/>
+          </a:prstGeom>
+          <a:solidFill>
+            <a:srgbClr val="E8EEF7"/>
+          </a:solidFill>
+          <a:ln>
+            <a:solidFill>
+              <a:srgbClr val="1F3A5F"/>
+            </a:solidFill>
+          </a:ln>
+        </p:spPr>
+        <p:style>
+          <a:lnRef idx="1">
+            <a:schemeClr val="accent1"/>
+          </a:lnRef>
+          <a:fillRef idx="3">
+            <a:schemeClr val="accent1"/>
+          </a:fillRef>
+          <a:effectRef idx="2">
+            <a:schemeClr val="accent1"/>
+          </a:effectRef>
+          <a:fontRef idx="minor">
+            <a:schemeClr val="lt1"/>
+          </a:fontRef>
+        </p:style>
+        <p:txBody>
+          <a:bodyPr rtlCol="0" anchor="ctr" lIns="45720" rIns="45720"/>
+          <a:lstStyle/>
+          <a:p>
+            <a:pPr algn="ctr"/>
+            <a:r>
+              <a:rPr sz="900">
+                <a:solidFill>
+                  <a:srgbClr val="1F3A5F"/>
+                </a:solidFill>
+              </a:rPr>
+              <a:t>Gram 4: Venator-class contact bearing 274, codename Betazed</a:t>
+            </a:r>
+          </a:p>
+        </p:txBody>
+      </p:sp>
+      <p:sp>
+        <p:nvSpPr>
+          <p:cNvPr id="10" name="TextBox 9"/>
+          <p:cNvSpPr txBox="1"/>
+          <p:nvPr/>
+        </p:nvSpPr>
+        <p:spPr>
+          <a:xfrm>
+            <a:off x="7240219" y="1115568"/>
+            <a:ext cx="2200046" cy="1447800"/>
+          </a:xfrm>
+          <a:prstGeom prst="rect">
+            <a:avLst/>
+          </a:prstGeom>
+          <a:noFill/>
+        </p:spPr>
+        <p:txBody>
+          <a:bodyPr wrap="square">
+            <a:spAutoFit/>
+          </a:bodyPr>
+          <a:lstStyle/>
+          <a:p>
+            <a:r>
+              <a:rPr sz="800">
+                <a:hlinkClick r:id="rId16"/>
+              </a:rPr>
+              <a:t>Lofar 1</a:t>
+            </a:r>
+          </a:p>
+          <a:p>
+            <a:r>
+              <a:rPr sz="800">
+                <a:hlinkClick r:id="rId17"/>
+              </a:rPr>
+              <a:t>Lofar 2</a:t>
+            </a:r>
+          </a:p>
+          <a:p>
+            <a:r>
+              <a:rPr sz="800">
+                <a:hlinkClick r:id="rId18"/>
+              </a:rPr>
+              <a:t>Lofar 3</a:t>
+            </a:r>
+          </a:p>
+          <a:p>
+            <a:r>
+              <a:rPr sz="800">
+                <a:hlinkClick r:id="rId19"/>
+              </a:rPr>
+              <a:t>Lofar 4</a:t>
+            </a:r>
+          </a:p>
+        </p:txBody>
+      </p:sp>
+      <p:sp>
+        <p:nvSpPr>
+          <p:cNvPr id="11" name="Rounded Rectangle 10">
+            <a:hlinkClick r:id="rId20"/>
+          </p:cNvPr>
+          <p:cNvSpPr/>
+          <p:nvPr/>
+        </p:nvSpPr>
+        <p:spPr>
+          <a:xfrm>
+            <a:off x="9531705" y="731520"/>
+            <a:ext cx="2200046" cy="365760"/>
+          </a:xfrm>
+          <a:prstGeom prst="roundRect">
+            <a:avLst/>
+          </a:prstGeom>
+          <a:solidFill>
+            <a:srgbClr val="E8EEF7"/>
+          </a:solidFill>
+          <a:ln>
+            <a:solidFill>
+              <a:srgbClr val="1F3A5F"/>
+            </a:solidFill>
+          </a:ln>
+        </p:spPr>
+        <p:style>
+          <a:lnRef idx="1">
+            <a:schemeClr val="accent1"/>
+          </a:lnRef>
+          <a:fillRef idx="3">
+            <a:schemeClr val="accent1"/>
+          </a:fillRef>
+          <a:effectRef idx="2">
+            <a:schemeClr val="accent1"/>
+          </a:effectRef>
+          <a:fontRef idx="minor">
+            <a:schemeClr val="lt1"/>
+          </a:fontRef>
+        </p:style>
+        <p:txBody>
+          <a:bodyPr rtlCol="0" anchor="ctr" lIns="45720" rIns="45720"/>
+          <a:lstStyle/>
+          <a:p>
+            <a:pPr algn="ctr"/>
+            <a:r>
+              <a:rPr sz="900">
+                <a:solidFill>
+                  <a:srgbClr val="1F3A5F"/>
+                </a:solidFill>
+              </a:rPr>
+              <a:t>Gram 5: Defiant contact bearing 256, codename Tatooine</a:t>
+            </a:r>
+          </a:p>
+        </p:txBody>
+      </p:sp>
+      <p:sp>
+        <p:nvSpPr>
+          <p:cNvPr id="12" name="TextBox 11"/>
+          <p:cNvSpPr txBox="1"/>
+          <p:nvPr/>
+        </p:nvSpPr>
+        <p:spPr>
+          <a:xfrm>
+            <a:off x="9531705" y="1115568"/>
+            <a:ext cx="2200046" cy="1447800"/>
+          </a:xfrm>
+          <a:prstGeom prst="rect">
+            <a:avLst/>
+          </a:prstGeom>
+          <a:noFill/>
+        </p:spPr>
+        <p:txBody>
+          <a:bodyPr wrap="square">
+            <a:spAutoFit/>
+          </a:bodyPr>
+          <a:lstStyle/>
+          <a:p>
+            <a:r>
+              <a:rPr sz="800">
+                <a:hlinkClick r:id="rId21"/>
+              </a:rPr>
+              <a:t>Lofar 1</a:t>
+            </a:r>
+          </a:p>
+        </p:txBody>
+      </p:sp>
+      <p:sp>
+        <p:nvSpPr>
+          <p:cNvPr id="13" name="Rounded Rectangle 12">
+            <a:hlinkClick r:id="rId22"/>
+          </p:cNvPr>
+          <p:cNvSpPr/>
+          <p:nvPr/>
+        </p:nvSpPr>
+        <p:spPr>
+          <a:xfrm>
+            <a:off x="365760" y="2682240"/>
+            <a:ext cx="2200046" cy="365760"/>
+          </a:xfrm>
+          <a:prstGeom prst="roundRect">
+            <a:avLst/>
+          </a:prstGeom>
+          <a:solidFill>
+            <a:srgbClr val="E8EEF7"/>
+          </a:solidFill>
+          <a:ln>
+            <a:solidFill>
+              <a:srgbClr val="1F3A5F"/>
+            </a:solidFill>
+          </a:ln>
+        </p:spPr>
+        <p:style>
+          <a:lnRef idx="1">
+            <a:schemeClr val="accent1"/>
+          </a:lnRef>
+          <a:fillRef idx="3">
+            <a:schemeClr val="accent1"/>
+          </a:fillRef>
+          <a:effectRef idx="2">
+            <a:schemeClr val="accent1"/>
+          </a:effectRef>
+          <a:fontRef idx="minor">
+            <a:schemeClr val="lt1"/>
+          </a:fontRef>
+        </p:style>
+        <p:txBody>
+          <a:bodyPr rtlCol="0" anchor="ctr" lIns="45720" rIns="45720"/>
+          <a:lstStyle/>
+          <a:p>
+            <a:pPr algn="ctr"/>
+            <a:r>
+              <a:rPr sz="900">
+                <a:solidFill>
+                  <a:srgbClr val="1F3A5F"/>
+                </a:solidFill>
+              </a:rPr>
+              <a:t>Gram 6: Slave I contact bearing 174, codename Cardassia</a:t>
+            </a:r>
+          </a:p>
+        </p:txBody>
+      </p:sp>
+      <p:sp>
+        <p:nvSpPr>
+          <p:cNvPr id="14" name="TextBox 13"/>
+          <p:cNvSpPr txBox="1"/>
+          <p:nvPr/>
+        </p:nvSpPr>
+        <p:spPr>
+          <a:xfrm>
+            <a:off x="365760" y="3066288"/>
+            <a:ext cx="2200046" cy="1447800"/>
+          </a:xfrm>
+          <a:prstGeom prst="rect">
+            <a:avLst/>
+          </a:prstGeom>
+          <a:noFill/>
+        </p:spPr>
+        <p:txBody>
+          <a:bodyPr wrap="square">
+            <a:spAutoFit/>
+          </a:bodyPr>
+          <a:lstStyle/>
+          <a:p>
+            <a:r>
+              <a:rPr sz="800">
+                <a:hlinkClick r:id="rId23"/>
+              </a:rPr>
+              <a:t>Lofar 1</a:t>
+            </a:r>
+          </a:p>
+        </p:txBody>
+      </p:sp>
+      <p:sp>
+        <p:nvSpPr>
+          <p:cNvPr id="15" name="Rounded Rectangle 14">
+            <a:hlinkClick r:id="rId24"/>
+          </p:cNvPr>
+          <p:cNvSpPr/>
+          <p:nvPr/>
+        </p:nvSpPr>
+        <p:spPr>
+          <a:xfrm>
+            <a:off x="2657246" y="2682240"/>
+            <a:ext cx="2200046" cy="365760"/>
+          </a:xfrm>
+          <a:prstGeom prst="roundRect">
+            <a:avLst/>
+          </a:prstGeom>
+          <a:solidFill>
+            <a:srgbClr val="E8EEF7"/>
+          </a:solidFill>
+          <a:ln>
+            <a:solidFill>
+              <a:srgbClr val="1F3A5F"/>
+            </a:solidFill>
+          </a:ln>
+        </p:spPr>
+        <p:style>
+          <a:lnRef idx="1">
+            <a:schemeClr val="accent1"/>
+          </a:lnRef>
+          <a:fillRef idx="3">
+            <a:schemeClr val="accent1"/>
+          </a:fillRef>
+          <a:effectRef idx="2">
+            <a:schemeClr val="accent1"/>
+          </a:effectRef>
+          <a:fontRef idx="minor">
+            <a:schemeClr val="lt1"/>
+          </a:fontRef>
+        </p:style>
+        <p:txBody>
+          <a:bodyPr rtlCol="0" anchor="ctr" lIns="45720" rIns="45720"/>
+          <a:lstStyle/>
+          <a:p>
+            <a:pPr algn="ctr"/>
+            <a:r>
+              <a:rPr sz="900">
+                <a:solidFill>
+                  <a:srgbClr val="1F3A5F"/>
+                </a:solidFill>
+              </a:rPr>
+              <a:t>Gram 7: Ghost, Category 1, Trill</a:t>
+            </a:r>
+          </a:p>
+        </p:txBody>
+      </p:sp>
+      <p:sp>
+        <p:nvSpPr>
+          <p:cNvPr id="16" name="TextBox 15"/>
+          <p:cNvSpPr txBox="1"/>
+          <p:nvPr/>
+        </p:nvSpPr>
+        <p:spPr>
+          <a:xfrm>
+            <a:off x="2657246" y="3066288"/>
+            <a:ext cx="2200046" cy="1447800"/>
+          </a:xfrm>
+          <a:prstGeom prst="rect">
+            <a:avLst/>
+          </a:prstGeom>
+          <a:noFill/>
+        </p:spPr>
+        <p:txBody>
+          <a:bodyPr wrap="square">
+            <a:spAutoFit/>
+          </a:bodyPr>
+          <a:lstStyle/>
+          <a:p>
+            <a:r>
+              <a:rPr sz="800">
+                <a:hlinkClick r:id="rId25"/>
+              </a:rPr>
+              <a:t>Lofar 1</a:t>
+            </a:r>
+          </a:p>
+          <a:p>
+            <a:r>
+              <a:rPr sz="800">
+                <a:hlinkClick r:id="rId26"/>
+              </a:rPr>
+              <a:t>Lofar 2</a:t>
+            </a:r>
+          </a:p>
+          <a:p>
+            <a:r>
+              <a:rPr sz="800">
+                <a:hlinkClick r:id="rId27"/>
+              </a:rPr>
+              <a:t>Lofar 3</a:t>
+            </a:r>
+          </a:p>
+          <a:p>
+            <a:r>
+              <a:rPr sz="800">
+                <a:hlinkClick r:id="rId28"/>
+              </a:rPr>
+              <a:t>Lofar 4</a:t>
+            </a:r>
+          </a:p>
+        </p:txBody>
+      </p:sp>
+      <p:sp>
+        <p:nvSpPr>
+          <p:cNvPr id="17" name="Rounded Rectangle 16">
+            <a:hlinkClick r:id="rId29"/>
+          </p:cNvPr>
+          <p:cNvSpPr/>
+          <p:nvPr/>
+        </p:nvSpPr>
+        <p:spPr>
+          <a:xfrm>
+            <a:off x="4948732" y="2682240"/>
+            <a:ext cx="2200046" cy="365760"/>
+          </a:xfrm>
+          <a:prstGeom prst="roundRect">
+            <a:avLst/>
+          </a:prstGeom>
+          <a:solidFill>
+            <a:srgbClr val="E8EEF7"/>
+          </a:solidFill>
+          <a:ln>
+            <a:solidFill>
+              <a:srgbClr val="1F3A5F"/>
+            </a:solidFill>
+          </a:ln>
+        </p:spPr>
+        <p:style>
+          <a:lnRef idx="1">
+            <a:schemeClr val="accent1"/>
+          </a:lnRef>
+          <a:fillRef idx="3">
+            <a:schemeClr val="accent1"/>
+          </a:fillRef>
+          <a:effectRef idx="2">
+            <a:schemeClr val="accent1"/>
+          </a:effectRef>
+          <a:fontRef idx="minor">
+            <a:schemeClr val="lt1"/>
+          </a:fontRef>
+        </p:style>
+        <p:txBody>
+          <a:bodyPr rtlCol="0" anchor="ctr" lIns="45720" rIns="45720"/>
+          <a:lstStyle/>
+          <a:p>
+            <a:pPr algn="ctr"/>
+            <a:r>
+              <a:rPr sz="900">
+                <a:solidFill>
+                  <a:srgbClr val="1F3A5F"/>
+                </a:solidFill>
+              </a:rPr>
+              <a:t>Gram 8: A-wing contact bearing 061, codename Romulus</a:t>
+            </a:r>
+          </a:p>
+        </p:txBody>
+      </p:sp>
+      <p:sp>
+        <p:nvSpPr>
+          <p:cNvPr id="18" name="TextBox 17"/>
+          <p:cNvSpPr txBox="1"/>
+          <p:nvPr/>
+        </p:nvSpPr>
+        <p:spPr>
+          <a:xfrm>
+            <a:off x="4948732" y="3066288"/>
+            <a:ext cx="2200046" cy="1447800"/>
+          </a:xfrm>
+          <a:prstGeom prst="rect">
+            <a:avLst/>
+          </a:prstGeom>
+          <a:noFill/>
+        </p:spPr>
+        <p:txBody>
+          <a:bodyPr wrap="square">
+            <a:spAutoFit/>
+          </a:bodyPr>
+          <a:lstStyle/>
+          <a:p>
+            <a:r>
+              <a:rPr sz="800">
+                <a:hlinkClick r:id="rId30"/>
+              </a:rPr>
+              <a:t>Lofar 1</a:t>
+            </a:r>
+          </a:p>
+          <a:p>
+            <a:r>
+              <a:rPr sz="800">
+                <a:hlinkClick r:id="rId31"/>
+              </a:rPr>
+              <a:t>Lofar 2</a:t>
+            </a:r>
+          </a:p>
+          <a:p>
+            <a:r>
+              <a:rPr sz="800">
+                <a:hlinkClick r:id="rId32"/>
+              </a:rPr>
+              <a:t>Lofar 3</a:t>
+            </a:r>
+          </a:p>
+        </p:txBody>
+      </p:sp>
+      <p:sp>
+        <p:nvSpPr>
+          <p:cNvPr id="19" name="Rounded Rectangle 18">
+            <a:hlinkClick r:id="rId33"/>
+          </p:cNvPr>
+          <p:cNvSpPr/>
+          <p:nvPr/>
+        </p:nvSpPr>
+        <p:spPr>
+          <a:xfrm>
+            <a:off x="7240219" y="2682240"/>
+            <a:ext cx="2200046" cy="365760"/>
+          </a:xfrm>
+          <a:prstGeom prst="roundRect">
+            <a:avLst/>
+          </a:prstGeom>
+          <a:solidFill>
+            <a:srgbClr val="E8EEF7"/>
+          </a:solidFill>
+          <a:ln>
+            <a:solidFill>
+              <a:srgbClr val="1F3A5F"/>
+            </a:solidFill>
+          </a:ln>
+        </p:spPr>
+        <p:style>
+          <a:lnRef idx="1">
+            <a:schemeClr val="accent1"/>
+          </a:lnRef>
+          <a:fillRef idx="3">
+            <a:schemeClr val="accent1"/>
+          </a:fillRef>
+          <a:effectRef idx="2">
+            <a:schemeClr val="accent1"/>
+          </a:effectRef>
+          <a:fontRef idx="minor">
+            <a:schemeClr val="lt1"/>
+          </a:fontRef>
+        </p:style>
+        <p:txBody>
+          <a:bodyPr rtlCol="0" anchor="ctr" lIns="45720" rIns="45720"/>
+          <a:lstStyle/>
+          <a:p>
+            <a:pPr algn="ctr"/>
+            <a:r>
+              <a:rPr sz="900">
+                <a:solidFill>
+                  <a:srgbClr val="1F3A5F"/>
+                </a:solidFill>
+              </a:rPr>
+              <a:t>Gram 10: Razor Crest, Category 4, Kobol</a:t>
+            </a:r>
+          </a:p>
+        </p:txBody>
+      </p:sp>
+      <p:sp>
+        <p:nvSpPr>
+          <p:cNvPr id="20" name="TextBox 19"/>
+          <p:cNvSpPr txBox="1"/>
+          <p:nvPr/>
+        </p:nvSpPr>
+        <p:spPr>
+          <a:xfrm>
+            <a:off x="7240219" y="3066288"/>
+            <a:ext cx="2200046" cy="1447800"/>
+          </a:xfrm>
+          <a:prstGeom prst="rect">
+            <a:avLst/>
+          </a:prstGeom>
+          <a:noFill/>
+        </p:spPr>
+        <p:txBody>
+          <a:bodyPr wrap="square">
+            <a:spAutoFit/>
+          </a:bodyPr>
+          <a:lstStyle/>
+          <a:p>
+            <a:r>
+              <a:rPr sz="800">
+                <a:hlinkClick r:id="rId34"/>
+              </a:rPr>
+              <a:t>Lofar 1</a:t>
+            </a:r>
+          </a:p>
+          <a:p>
+            <a:r>
+              <a:rPr sz="800">
+                <a:hlinkClick r:id="rId35"/>
+              </a:rPr>
+              <a:t>Lofar 2</a:t>
+            </a:r>
+          </a:p>
+          <a:p>
+            <a:r>
+              <a:rPr sz="800">
+                <a:hlinkClick r:id="rId36"/>
+              </a:rPr>
+              <a:t>Lofar 3</a:t>
+            </a:r>
+          </a:p>
+        </p:txBody>
+      </p:sp>
+      <p:sp>
+        <p:nvSpPr>
+          <p:cNvPr id="21" name="Rounded Rectangle 20">
+            <a:hlinkClick r:id="rId37"/>
+          </p:cNvPr>
+          <p:cNvSpPr/>
+          <p:nvPr/>
+        </p:nvSpPr>
+        <p:spPr>
+          <a:xfrm>
+            <a:off x="9531705" y="2682240"/>
+            <a:ext cx="2200046" cy="365760"/>
+          </a:xfrm>
+          <a:prstGeom prst="roundRect">
+            <a:avLst/>
+          </a:prstGeom>
+          <a:solidFill>
+            <a:srgbClr val="E8EEF7"/>
+          </a:solidFill>
+          <a:ln>
+            <a:solidFill>
+              <a:srgbClr val="1F3A5F"/>
+            </a:solidFill>
+          </a:ln>
+        </p:spPr>
+        <p:style>
+          <a:lnRef idx="1">
+            <a:schemeClr val="accent1"/>
+          </a:lnRef>
+          <a:fillRef idx="3">
+            <a:schemeClr val="accent1"/>
+          </a:fillRef>
+          <a:effectRef idx="2">
+            <a:schemeClr val="accent1"/>
+          </a:effectRef>
+          <a:fontRef idx="minor">
+            <a:schemeClr val="lt1"/>
+          </a:fontRef>
+        </p:style>
+        <p:txBody>
+          <a:bodyPr rtlCol="0" anchor="ctr" lIns="45720" rIns="45720"/>
+          <a:lstStyle/>
+          <a:p>
+            <a:pPr algn="ctr"/>
+            <a:r>
+              <a:rPr sz="900">
+                <a:solidFill>
+                  <a:srgbClr val="1F3A5F"/>
+                </a:solidFill>
+              </a:rPr>
+              <a:t>Gram 11: Lambda Shuttle, Category 4, Cardassia</a:t>
+            </a:r>
+          </a:p>
+        </p:txBody>
+      </p:sp>
+      <p:sp>
+        <p:nvSpPr>
+          <p:cNvPr id="22" name="TextBox 21"/>
+          <p:cNvSpPr txBox="1"/>
+          <p:nvPr/>
+        </p:nvSpPr>
+        <p:spPr>
+          <a:xfrm>
+            <a:off x="9531705" y="3066288"/>
+            <a:ext cx="2200046" cy="1447800"/>
+          </a:xfrm>
+          <a:prstGeom prst="rect">
+            <a:avLst/>
+          </a:prstGeom>
+          <a:noFill/>
+        </p:spPr>
+        <p:txBody>
+          <a:bodyPr wrap="square">
+            <a:spAutoFit/>
+          </a:bodyPr>
+          <a:lstStyle/>
+          <a:p>
+            <a:r>
+              <a:rPr sz="800">
+                <a:hlinkClick r:id="rId38"/>
+              </a:rPr>
+              <a:t>Lofar 1</a:t>
+            </a:r>
+          </a:p>
+          <a:p>
+            <a:r>
+              <a:rPr sz="800">
+                <a:hlinkClick r:id="rId39"/>
+              </a:rPr>
+              <a:t>Lofar 2</a:t>
+            </a:r>
+          </a:p>
+        </p:txBody>
+      </p:sp>
+      <p:sp>
+        <p:nvSpPr>
+          <p:cNvPr id="23" name="Rounded Rectangle 22">
+            <a:hlinkClick r:id="rId40"/>
+          </p:cNvPr>
+          <p:cNvSpPr/>
+          <p:nvPr/>
+        </p:nvSpPr>
+        <p:spPr>
+          <a:xfrm>
+            <a:off x="365760" y="4632960"/>
+            <a:ext cx="2200046" cy="365760"/>
+          </a:xfrm>
+          <a:prstGeom prst="roundRect">
+            <a:avLst/>
+          </a:prstGeom>
+          <a:solidFill>
+            <a:srgbClr val="E8EEF7"/>
+          </a:solidFill>
+          <a:ln>
+            <a:solidFill>
+              <a:srgbClr val="1F3A5F"/>
+            </a:solidFill>
+          </a:ln>
+        </p:spPr>
+        <p:style>
+          <a:lnRef idx="1">
+            <a:schemeClr val="accent1"/>
+          </a:lnRef>
+          <a:fillRef idx="3">
+            <a:schemeClr val="accent1"/>
+          </a:fillRef>
+          <a:effectRef idx="2">
+            <a:schemeClr val="accent1"/>
+          </a:effectRef>
+          <a:fontRef idx="minor">
+            <a:schemeClr val="lt1"/>
+          </a:fontRef>
+        </p:style>
+        <p:txBody>
+          <a:bodyPr rtlCol="0" anchor="ctr" lIns="45720" rIns="45720"/>
+          <a:lstStyle/>
+          <a:p>
+            <a:pPr algn="ctr"/>
+            <a:r>
+              <a:rPr sz="900">
+                <a:solidFill>
+                  <a:srgbClr val="1F3A5F"/>
+                </a:solidFill>
+              </a:rPr>
+              <a:t>Gram 12: Constitution-class contact bearing 225, codename Tatooine</a:t>
+            </a:r>
+          </a:p>
+        </p:txBody>
+      </p:sp>
+      <p:sp>
+        <p:nvSpPr>
+          <p:cNvPr id="24" name="TextBox 23"/>
+          <p:cNvSpPr txBox="1"/>
+          <p:nvPr/>
+        </p:nvSpPr>
+        <p:spPr>
+          <a:xfrm>
+            <a:off x="365760" y="5017008"/>
+            <a:ext cx="2200046" cy="1447800"/>
+          </a:xfrm>
+          <a:prstGeom prst="rect">
+            <a:avLst/>
+          </a:prstGeom>
+          <a:noFill/>
+        </p:spPr>
+        <p:txBody>
+          <a:bodyPr wrap="square">
+            <a:spAutoFit/>
+          </a:bodyPr>
+          <a:lstStyle/>
+          <a:p>
+            <a:r>
+              <a:rPr sz="800">
+                <a:hlinkClick r:id="rId41"/>
+              </a:rPr>
+              <a:t>Lofar 1</a:t>
+            </a:r>
+          </a:p>
+          <a:p>
+            <a:r>
+              <a:rPr sz="800">
+                <a:hlinkClick r:id="rId42"/>
+              </a:rPr>
+              <a:t>Lofar 2</a:t>
+            </a:r>
+          </a:p>
+          <a:p>
+            <a:r>
+              <a:rPr sz="800">
+                <a:hlinkClick r:id="rId43"/>
+              </a:rPr>
+              <a:t>Lofar 3</a:t>
+            </a:r>
+          </a:p>
+        </p:txBody>
+      </p:sp>
+      <p:sp>
+        <p:nvSpPr>
+          <p:cNvPr id="25" name="Rounded Rectangle 24">
+            <a:hlinkClick r:id="rId44"/>
+          </p:cNvPr>
+          <p:cNvSpPr/>
+          <p:nvPr/>
+        </p:nvSpPr>
+        <p:spPr>
+          <a:xfrm>
+            <a:off x="2657246" y="4632960"/>
+            <a:ext cx="2200046" cy="365760"/>
+          </a:xfrm>
+          <a:prstGeom prst="roundRect">
+            <a:avLst/>
+          </a:prstGeom>
+          <a:solidFill>
+            <a:srgbClr val="E8EEF7"/>
+          </a:solidFill>
+          <a:ln>
+            <a:solidFill>
+              <a:srgbClr val="1F3A5F"/>
+            </a:solidFill>
+          </a:ln>
+        </p:spPr>
+        <p:style>
+          <a:lnRef idx="1">
+            <a:schemeClr val="accent1"/>
+          </a:lnRef>
+          <a:fillRef idx="3">
+            <a:schemeClr val="accent1"/>
+          </a:fillRef>
+          <a:effectRef idx="2">
+            <a:schemeClr val="accent1"/>
+          </a:effectRef>
+          <a:fontRef idx="minor">
+            <a:schemeClr val="lt1"/>
+          </a:fontRef>
+        </p:style>
+        <p:txBody>
+          <a:bodyPr rtlCol="0" anchor="ctr" lIns="45720" rIns="45720"/>
+          <a:lstStyle/>
+          <a:p>
+            <a:pPr algn="ctr"/>
+            <a:r>
+              <a:rPr sz="900">
+                <a:solidFill>
+                  <a:srgbClr val="1F3A5F"/>
+                </a:solidFill>
+              </a:rPr>
+              <a:t>Gram 13: Slave I contact bearing 078, codename Kobol</a:t>
+            </a:r>
+          </a:p>
+        </p:txBody>
+      </p:sp>
+      <p:sp>
+        <p:nvSpPr>
+          <p:cNvPr id="26" name="TextBox 25"/>
+          <p:cNvSpPr txBox="1"/>
+          <p:nvPr/>
+        </p:nvSpPr>
+        <p:spPr>
+          <a:xfrm>
+            <a:off x="2657246" y="5017008"/>
+            <a:ext cx="2200046" cy="1447800"/>
+          </a:xfrm>
+          <a:prstGeom prst="rect">
+            <a:avLst/>
+          </a:prstGeom>
+          <a:noFill/>
+        </p:spPr>
+        <p:txBody>
+          <a:bodyPr wrap="square">
+            <a:spAutoFit/>
+          </a:bodyPr>
+          <a:lstStyle/>
+          <a:p>
+            <a:r>
+              <a:rPr sz="800">
+                <a:hlinkClick r:id="rId45"/>
+              </a:rPr>
+              <a:t>Lofar 1</a:t>
+            </a:r>
+          </a:p>
+        </p:txBody>
+      </p:sp>
+      <p:sp>
+        <p:nvSpPr>
+          <p:cNvPr id="27" name="Rounded Rectangle 26">
+            <a:hlinkClick r:id="rId46"/>
+          </p:cNvPr>
+          <p:cNvSpPr/>
+          <p:nvPr/>
+        </p:nvSpPr>
+        <p:spPr>
+          <a:xfrm>
+            <a:off x="4948732" y="4632960"/>
+            <a:ext cx="2200046" cy="365760"/>
+          </a:xfrm>
+          <a:prstGeom prst="roundRect">
+            <a:avLst/>
+          </a:prstGeom>
+          <a:solidFill>
+            <a:srgbClr val="E8EEF7"/>
+          </a:solidFill>
+          <a:ln>
+            <a:solidFill>
+              <a:srgbClr val="1F3A5F"/>
+            </a:solidFill>
+          </a:ln>
+        </p:spPr>
+        <p:style>
+          <a:lnRef idx="1">
+            <a:schemeClr val="accent1"/>
+          </a:lnRef>
+          <a:fillRef idx="3">
+            <a:schemeClr val="accent1"/>
+          </a:fillRef>
+          <a:effectRef idx="2">
+            <a:schemeClr val="accent1"/>
+          </a:effectRef>
+          <a:fontRef idx="minor">
+            <a:schemeClr val="lt1"/>
+          </a:fontRef>
+        </p:style>
+        <p:txBody>
+          <a:bodyPr rtlCol="0" anchor="ctr" lIns="45720" rIns="45720"/>
+          <a:lstStyle/>
+          <a:p>
+            <a:pPr algn="ctr"/>
+            <a:r>
+              <a:rPr sz="900">
+                <a:solidFill>
+                  <a:srgbClr val="1F3A5F"/>
+                </a:solidFill>
+              </a:rPr>
+              <a:t>Gram 14: Y-wing, Category 1, Tantive</a:t>
+            </a:r>
+          </a:p>
+        </p:txBody>
+      </p:sp>
+      <p:sp>
+        <p:nvSpPr>
+          <p:cNvPr id="28" name="TextBox 27"/>
+          <p:cNvSpPr txBox="1"/>
+          <p:nvPr/>
+        </p:nvSpPr>
+        <p:spPr>
+          <a:xfrm>
+            <a:off x="4948732" y="5017008"/>
+            <a:ext cx="2200046" cy="1447800"/>
+          </a:xfrm>
+          <a:prstGeom prst="rect">
+            <a:avLst/>
+          </a:prstGeom>
+          <a:noFill/>
+        </p:spPr>
+        <p:txBody>
+          <a:bodyPr wrap="square">
+            <a:spAutoFit/>
+          </a:bodyPr>
+          <a:lstStyle/>
+          <a:p>
+            <a:r>
+              <a:rPr sz="800">
+                <a:hlinkClick r:id="rId47"/>
+              </a:rPr>
+              <a:t>Lofar 1</a:t>
+            </a:r>
+          </a:p>
+          <a:p>
+            <a:r>
+              <a:rPr sz="800">
+                <a:hlinkClick r:id="rId48"/>
+              </a:rPr>
+              <a:t>Lofar 2</a:t>
+            </a:r>
+          </a:p>
+        </p:txBody>
+      </p:sp>
+      <p:sp>
+        <p:nvSpPr>
+          <p:cNvPr id="29" name="Rounded Rectangle 28">
+            <a:hlinkClick r:id="rId49"/>
+          </p:cNvPr>
+          <p:cNvSpPr/>
+          <p:nvPr/>
+        </p:nvSpPr>
+        <p:spPr>
+          <a:xfrm>
+            <a:off x="7240219" y="4632960"/>
+            <a:ext cx="2200046" cy="365760"/>
+          </a:xfrm>
+          <a:prstGeom prst="roundRect">
+            <a:avLst/>
+          </a:prstGeom>
+          <a:solidFill>
+            <a:srgbClr val="E8EEF7"/>
+          </a:solidFill>
+          <a:ln>
+            <a:solidFill>
+              <a:srgbClr val="1F3A5F"/>
+            </a:solidFill>
+          </a:ln>
+        </p:spPr>
+        <p:style>
+          <a:lnRef idx="1">
+            <a:schemeClr val="accent1"/>
+          </a:lnRef>
+          <a:fillRef idx="3">
+            <a:schemeClr val="accent1"/>
+          </a:fillRef>
+          <a:effectRef idx="2">
+            <a:schemeClr val="accent1"/>
+          </a:effectRef>
+          <a:fontRef idx="minor">
+            <a:schemeClr val="lt1"/>
+          </a:fontRef>
+        </p:style>
+        <p:txBody>
+          <a:bodyPr rtlCol="0" anchor="ctr" lIns="45720" rIns="45720"/>
+          <a:lstStyle/>
+          <a:p>
+            <a:pPr algn="ctr"/>
+            <a:r>
+              <a:rPr sz="900">
+                <a:solidFill>
+                  <a:srgbClr val="1F3A5F"/>
+                </a:solidFill>
+              </a:rPr>
+              <a:t>Gram 16: Reliant, Category 1, Betazed</a:t>
+            </a:r>
+          </a:p>
+        </p:txBody>
+      </p:sp>
+      <p:sp>
+        <p:nvSpPr>
+          <p:cNvPr id="30" name="TextBox 29"/>
+          <p:cNvSpPr txBox="1"/>
+          <p:nvPr/>
+        </p:nvSpPr>
+        <p:spPr>
+          <a:xfrm>
+            <a:off x="7240219" y="5017008"/>
+            <a:ext cx="2200046" cy="1447800"/>
+          </a:xfrm>
+          <a:prstGeom prst="rect">
+            <a:avLst/>
+          </a:prstGeom>
+          <a:noFill/>
+        </p:spPr>
+        <p:txBody>
+          <a:bodyPr wrap="square">
+            <a:spAutoFit/>
+          </a:bodyPr>
+          <a:lstStyle/>
+          <a:p>
+            <a:r>
+              <a:rPr sz="800">
+                <a:hlinkClick r:id="rId50"/>
+              </a:rPr>
+              <a:t>Lofar 1</a:t>
+            </a:r>
+          </a:p>
+          <a:p>
+            <a:r>
+              <a:rPr sz="800">
+                <a:hlinkClick r:id="rId51"/>
+              </a:rPr>
+              <a:t>Lofar 2</a:t>
+            </a:r>
+          </a:p>
+          <a:p>
+            <a:r>
+              <a:rPr sz="800">
+                <a:hlinkClick r:id="rId52"/>
+              </a:rPr>
+              <a:t>Lofar 3</a:t>
+            </a:r>
+          </a:p>
+        </p:txBody>
+      </p:sp>
+      <p:sp>
+        <p:nvSpPr>
+          <p:cNvPr id="31" name="Rounded Rectangle 30">
+            <a:hlinkClick r:id="rId53"/>
+          </p:cNvPr>
+          <p:cNvSpPr/>
+          <p:nvPr/>
+        </p:nvSpPr>
+        <p:spPr>
+          <a:xfrm>
+            <a:off x="9531705" y="4632960"/>
+            <a:ext cx="2200046" cy="365760"/>
+          </a:xfrm>
+          <a:prstGeom prst="roundRect">
+            <a:avLst/>
+          </a:prstGeom>
+          <a:solidFill>
+            <a:srgbClr val="E8EEF7"/>
+          </a:solidFill>
+          <a:ln>
+            <a:solidFill>
+              <a:srgbClr val="1F3A5F"/>
+            </a:solidFill>
+          </a:ln>
+        </p:spPr>
+        <p:style>
+          <a:lnRef idx="1">
+            <a:schemeClr val="accent1"/>
+          </a:lnRef>
+          <a:fillRef idx="3">
+            <a:schemeClr val="accent1"/>
+          </a:fillRef>
+          <a:effectRef idx="2">
+            <a:schemeClr val="accent1"/>
+          </a:effectRef>
+          <a:fontRef idx="minor">
+            <a:schemeClr val="lt1"/>
+          </a:fontRef>
+        </p:style>
+        <p:txBody>
+          <a:bodyPr rtlCol="0" anchor="ctr" lIns="45720" rIns="45720"/>
+          <a:lstStyle/>
+          <a:p>
+            <a:pPr algn="ctr"/>
+            <a:r>
+              <a:rPr sz="900">
+                <a:solidFill>
+                  <a:srgbClr val="1F3A5F"/>
+                </a:solidFill>
+              </a:rPr>
+              <a:t>Gram 18: Devastator, Category 4, Vulcan</a:t>
+            </a:r>
+          </a:p>
+        </p:txBody>
+      </p:sp>
+      <p:sp>
+        <p:nvSpPr>
+          <p:cNvPr id="32" name="TextBox 31"/>
+          <p:cNvSpPr txBox="1"/>
+          <p:nvPr/>
+        </p:nvSpPr>
+        <p:spPr>
+          <a:xfrm>
+            <a:off x="9531705" y="5017008"/>
+            <a:ext cx="2200046" cy="1447800"/>
+          </a:xfrm>
+          <a:prstGeom prst="rect">
+            <a:avLst/>
+          </a:prstGeom>
+          <a:noFill/>
+        </p:spPr>
+        <p:txBody>
+          <a:bodyPr wrap="square">
+            <a:spAutoFit/>
+          </a:bodyPr>
+          <a:lstStyle/>
+          <a:p>
+            <a:r>
+              <a:rPr sz="800">
+                <a:hlinkClick r:id="rId54"/>
+              </a:rPr>
+              <a:t>Lofar 1</a:t>
+            </a:r>
+          </a:p>
+          <a:p>
+            <a:r>
+              <a:rPr sz="800">
+                <a:hlinkClick r:id="rId55"/>
+              </a:rPr>
+              <a:t>Lofar 2</a:t>
+            </a:r>
+          </a:p>
+          <a:p>
+            <a:r>
+              <a:rPr sz="800">
+                <a:hlinkClick r:id="rId56"/>
+              </a:rPr>
+              <a:t>Lofar 3</a:t>
             </a:r>
           </a:p>
         </p:txBody>
@@ -3223,18 +4694,18 @@
                   <a:srgbClr val="FFFFFF"/>
                 </a:solidFill>
               </a:rPr>
-              <a:t>Instructor Progress Test 3 Grams No FR — Page 1 of 2</a:t>
-            </a:r>
-          </a:p>
-        </p:txBody>
-      </p:sp>
-      <p:sp>
-        <p:nvSpPr>
-          <p:cNvPr id="3" name="Rounded Rectangle 2"/>
+              <a:t>Instructor Progress Test 3 Grams No FR — Page 2 of 2</a:t>
+            </a:r>
+          </a:p>
+        </p:txBody>
+      </p:sp>
+      <p:sp>
+        <p:nvSpPr>
+          <p:cNvPr id="3" name="Rounded Rectangle 2">
+            <a:hlinkClick r:id="rId2"/>
+          </p:cNvPr>
           <p:cNvSpPr/>
-          <p:nvPr>
-            <a:hlinkClick r:id="rId2"/>
-          </p:nvPr>
+          <p:nvPr/>
         </p:nvSpPr>
         <p:spPr>
           <a:xfrm>
@@ -3278,7 +4749,7 @@
                   <a:srgbClr val="1F3A5F"/>
                 </a:solidFill>
               </a:rPr>
-              <a:t>Gram 1: Imperial-class, Category 1, Coruscant</a:t>
+              <a:t>Gram 19: Intrepid-class contact bearing 256, codename Caprica</a:t>
             </a:r>
           </a:p>
         </p:txBody>
@@ -3320,15 +4791,31 @@
               <a:t>Lofar 2</a:t>
             </a:r>
           </a:p>
-        </p:txBody>
-      </p:sp>
-      <p:sp>
-        <p:nvSpPr>
-          <p:cNvPr id="5" name="Rounded Rectangle 4"/>
+          <a:p>
+            <a:r>
+              <a:rPr sz="800">
+                <a:hlinkClick r:id="rId5"/>
+              </a:rPr>
+              <a:t>Lofar 3</a:t>
+            </a:r>
+          </a:p>
+          <a:p>
+            <a:r>
+              <a:rPr sz="800">
+                <a:hlinkClick r:id="rId6"/>
+              </a:rPr>
+              <a:t>Lofar 4</a:t>
+            </a:r>
+          </a:p>
+        </p:txBody>
+      </p:sp>
+      <p:sp>
+        <p:nvSpPr>
+          <p:cNvPr id="5" name="Rounded Rectangle 4">
+            <a:hlinkClick r:id="rId7"/>
+          </p:cNvPr>
           <p:cNvSpPr/>
-          <p:nvPr>
-            <a:hlinkClick r:id="rId5"/>
-          </p:nvPr>
+          <p:nvPr/>
         </p:nvSpPr>
         <p:spPr>
           <a:xfrm>
@@ -3372,7 +4859,7 @@
                   <a:srgbClr val="1F3A5F"/>
                 </a:solidFill>
               </a:rPr>
-              <a:t>Gram 2: Acclamator-class, Category 3, Bespin</a:t>
+              <a:t>Gram 20: Millennium Falcon, Category 1, Bajor</a:t>
             </a:r>
           </a:p>
         </p:txBody>
@@ -3401,7 +4888,7 @@
           <a:p>
             <a:r>
               <a:rPr sz="800">
-                <a:hlinkClick r:id="rId6"/>
+                <a:hlinkClick r:id="rId8"/>
               </a:rPr>
               <a:t>Lofar 1</a:t>
             </a:r>
@@ -3409,7 +4896,7 @@
           <a:p>
             <a:r>
               <a:rPr sz="800">
-                <a:hlinkClick r:id="rId7"/>
+                <a:hlinkClick r:id="rId9"/>
               </a:rPr>
               <a:t>Lofar 2</a:t>
             </a:r>
@@ -3417,7 +4904,7 @@
           <a:p>
             <a:r>
               <a:rPr sz="800">
-                <a:hlinkClick r:id="rId8"/>
+                <a:hlinkClick r:id="rId10"/>
               </a:rPr>
               <a:t>Lofar 3</a:t>
             </a:r>
@@ -3425,7 +4912,7 @@
           <a:p>
             <a:r>
               <a:rPr sz="800">
-                <a:hlinkClick r:id="rId9"/>
+                <a:hlinkClick r:id="rId11"/>
               </a:rPr>
               <a:t>Lofar 4</a:t>
             </a:r>
@@ -3434,11 +4921,11 @@
       </p:sp>
       <p:sp>
         <p:nvSpPr>
-          <p:cNvPr id="7" name="Rounded Rectangle 6"/>
+          <p:cNvPr id="7" name="Rounded Rectangle 6">
+            <a:hlinkClick r:id="rId12"/>
+          </p:cNvPr>
           <p:cNvSpPr/>
-          <p:nvPr>
-            <a:hlinkClick r:id="rId10"/>
-          </p:nvPr>
+          <p:nvPr/>
         </p:nvSpPr>
         <p:spPr>
           <a:xfrm>
@@ -3482,7 +4969,7 @@
                   <a:srgbClr val="1F3A5F"/>
                 </a:solidFill>
               </a:rPr>
-              <a:t>Gram 3: Voyager, Category 4, Hoth</a:t>
+              <a:t>Gram 21: Enterprise, Category 1, Betazed</a:t>
             </a:r>
           </a:p>
         </p:txBody>
@@ -3511,44 +4998,20 @@
           <a:p>
             <a:r>
               <a:rPr sz="800">
-                <a:hlinkClick r:id="rId11"/>
+                <a:hlinkClick r:id="rId13"/>
               </a:rPr>
               <a:t>Lofar 1</a:t>
             </a:r>
           </a:p>
-          <a:p>
-            <a:r>
-              <a:rPr sz="800">
-                <a:hlinkClick r:id="rId12"/>
-              </a:rPr>
-              <a:t>Lofar 2</a:t>
-            </a:r>
-          </a:p>
-          <a:p>
-            <a:r>
-              <a:rPr sz="800">
-                <a:hlinkClick r:id="rId13"/>
-              </a:rPr>
-              <a:t>Lofar 3</a:t>
-            </a:r>
-          </a:p>
-          <a:p>
-            <a:r>
-              <a:rPr sz="800">
-                <a:hlinkClick r:id="rId14"/>
-              </a:rPr>
-              <a:t>Lofar 4</a:t>
-            </a:r>
-          </a:p>
-        </p:txBody>
-      </p:sp>
-      <p:sp>
-        <p:nvSpPr>
-          <p:cNvPr id="9" name="Rounded Rectangle 8"/>
+        </p:txBody>
+      </p:sp>
+      <p:sp>
+        <p:nvSpPr>
+          <p:cNvPr id="9" name="Rounded Rectangle 8">
+            <a:hlinkClick r:id="rId14"/>
+          </p:cNvPr>
           <p:cNvSpPr/>
-          <p:nvPr>
-            <a:hlinkClick r:id="rId15"/>
-          </p:nvPr>
+          <p:nvPr/>
         </p:nvSpPr>
         <p:spPr>
           <a:xfrm>
@@ -3592,7 +5055,7 @@
                   <a:srgbClr val="1F3A5F"/>
                 </a:solidFill>
               </a:rPr>
-              <a:t>Gram 4: Venator-class contact bearing 274, codename Betazed</a:t>
+              <a:t>Gram 23: Akira-class, Category 4, Betazed</a:t>
             </a:r>
           </a:p>
         </p:txBody>
@@ -3621,9 +5084,17 @@
           <a:p>
             <a:r>
               <a:rPr sz="800">
+                <a:hlinkClick r:id="rId15"/>
+              </a:rPr>
+              <a:t>Lofar 1</a:t>
+            </a:r>
+          </a:p>
+          <a:p>
+            <a:r>
+              <a:rPr sz="800">
                 <a:hlinkClick r:id="rId16"/>
               </a:rPr>
-              <a:t>Lofar 1</a:t>
+              <a:t>Lofar 2</a:t>
             </a:r>
           </a:p>
           <a:p>
@@ -3631,7 +5102,7 @@
               <a:rPr sz="800">
                 <a:hlinkClick r:id="rId17"/>
               </a:rPr>
-              <a:t>Lofar 2</a:t>
+              <a:t>Lofar 3</a:t>
             </a:r>
           </a:p>
           <a:p>
@@ -3639,14 +5110,6 @@
               <a:rPr sz="800">
                 <a:hlinkClick r:id="rId18"/>
               </a:rPr>
-              <a:t>Lofar 3</a:t>
-            </a:r>
-          </a:p>
-          <a:p>
-            <a:r>
-              <a:rPr sz="800">
-                <a:hlinkClick r:id="rId19"/>
-              </a:rPr>
               <a:t>Lofar 4</a:t>
             </a:r>
           </a:p>
@@ -3654,11 +5117,11 @@
       </p:sp>
       <p:sp>
         <p:nvSpPr>
-          <p:cNvPr id="11" name="Rounded Rectangle 10"/>
+          <p:cNvPr id="11" name="Rounded Rectangle 10">
+            <a:hlinkClick r:id="rId19"/>
+          </p:cNvPr>
           <p:cNvSpPr/>
-          <p:nvPr>
-            <a:hlinkClick r:id="rId20"/>
-          </p:nvPr>
+          <p:nvPr/>
         </p:nvSpPr>
         <p:spPr>
           <a:xfrm>
@@ -3702,7 +5165,7 @@
                   <a:srgbClr val="1F3A5F"/>
                 </a:solidFill>
               </a:rPr>
-              <a:t>Gram 5: Defiant contact bearing 256, codename Tatooine</a:t>
+              <a:t>Gram 24: Galaxy-class, Category 3, Betazed</a:t>
             </a:r>
           </a:p>
         </p:txBody>
@@ -3731,20 +5194,28 @@
           <a:p>
             <a:r>
               <a:rPr sz="800">
+                <a:hlinkClick r:id="rId20"/>
+              </a:rPr>
+              <a:t>Lofar 1</a:t>
+            </a:r>
+          </a:p>
+          <a:p>
+            <a:r>
+              <a:rPr sz="800">
                 <a:hlinkClick r:id="rId21"/>
               </a:rPr>
-              <a:t>Lofar 1</a:t>
-            </a:r>
-          </a:p>
-        </p:txBody>
-      </p:sp>
-      <p:sp>
-        <p:nvSpPr>
-          <p:cNvPr id="13" name="Rounded Rectangle 12"/>
+              <a:t>Lofar 2</a:t>
+            </a:r>
+          </a:p>
+        </p:txBody>
+      </p:sp>
+      <p:sp>
+        <p:nvSpPr>
+          <p:cNvPr id="13" name="Rounded Rectangle 12">
+            <a:hlinkClick r:id="rId22"/>
+          </p:cNvPr>
           <p:cNvSpPr/>
-          <p:nvPr>
-            <a:hlinkClick r:id="rId22"/>
-          </p:nvPr>
+          <p:nvPr/>
         </p:nvSpPr>
         <p:spPr>
           <a:xfrm>
@@ -3788,7 +5259,7 @@
                   <a:srgbClr val="1F3A5F"/>
                 </a:solidFill>
               </a:rPr>
-              <a:t>Gram 6: Slave I contact bearing 174, codename Cardassia</a:t>
+              <a:t>Gram 25: Corellian Corvette, Category 4, Dagobah</a:t>
             </a:r>
           </a:p>
         </p:txBody>
@@ -3826,11 +5297,11 @@
       </p:sp>
       <p:sp>
         <p:nvSpPr>
-          <p:cNvPr id="15" name="Rounded Rectangle 14"/>
+          <p:cNvPr id="15" name="Rounded Rectangle 14">
+            <a:hlinkClick r:id="rId24"/>
+          </p:cNvPr>
           <p:cNvSpPr/>
-          <p:nvPr>
-            <a:hlinkClick r:id="rId24"/>
-          </p:nvPr>
+          <p:nvPr/>
         </p:nvSpPr>
         <p:spPr>
           <a:xfrm>
@@ -3874,7 +5345,7 @@
                   <a:srgbClr val="1F3A5F"/>
                 </a:solidFill>
               </a:rPr>
-              <a:t>Gram 7: Ghost, Category 1, Trill</a:t>
+              <a:t>Gram 26: Reliant, Category 4, Risa</a:t>
             </a:r>
           </a:p>
         </p:txBody>
@@ -3936,11 +5407,11 @@
       </p:sp>
       <p:sp>
         <p:nvSpPr>
-          <p:cNvPr id="17" name="Rounded Rectangle 16"/>
+          <p:cNvPr id="17" name="Rounded Rectangle 16">
+            <a:hlinkClick r:id="rId29"/>
+          </p:cNvPr>
           <p:cNvSpPr/>
-          <p:nvPr>
-            <a:hlinkClick r:id="rId29"/>
-          </p:nvPr>
+          <p:nvPr/>
         </p:nvSpPr>
         <p:spPr>
           <a:xfrm>
@@ -3984,7 +5455,7 @@
                   <a:srgbClr val="1F3A5F"/>
                 </a:solidFill>
               </a:rPr>
-              <a:t>Gram 8: A-wing contact bearing 061, codename Romulus</a:t>
+              <a:t>Gram 28: Intrepid-class contact bearing 279, codename Vulcan</a:t>
             </a:r>
           </a:p>
         </p:txBody>
@@ -4026,23 +5497,15 @@
               <a:t>Lofar 2</a:t>
             </a:r>
           </a:p>
-          <a:p>
-            <a:r>
-              <a:rPr sz="800">
-                <a:hlinkClick r:id="rId32"/>
-              </a:rPr>
-              <a:t>Lofar 3</a:t>
-            </a:r>
-          </a:p>
-        </p:txBody>
-      </p:sp>
-      <p:sp>
-        <p:nvSpPr>
-          <p:cNvPr id="19" name="Rounded Rectangle 18"/>
+        </p:txBody>
+      </p:sp>
+      <p:sp>
+        <p:nvSpPr>
+          <p:cNvPr id="19" name="Rounded Rectangle 18">
+            <a:hlinkClick r:id="rId32"/>
+          </p:cNvPr>
           <p:cNvSpPr/>
-          <p:nvPr>
-            <a:hlinkClick r:id="rId33"/>
-          </p:nvPr>
+          <p:nvPr/>
         </p:nvSpPr>
         <p:spPr>
           <a:xfrm>
@@ -4086,7 +5549,7 @@
                   <a:srgbClr val="1F3A5F"/>
                 </a:solidFill>
               </a:rPr>
-              <a:t>Gram 10: Razor Crest, Category 4, Kobol</a:t>
+              <a:t>Gram 30: Voyager, Category 2, Bajor</a:t>
             </a:r>
           </a:p>
         </p:txBody>
@@ -4115,9 +5578,17 @@
           <a:p>
             <a:r>
               <a:rPr sz="800">
+                <a:hlinkClick r:id="rId33"/>
+              </a:rPr>
+              <a:t>Lofar 1</a:t>
+            </a:r>
+          </a:p>
+          <a:p>
+            <a:r>
+              <a:rPr sz="800">
                 <a:hlinkClick r:id="rId34"/>
               </a:rPr>
-              <a:t>Lofar 1</a:t>
+              <a:t>Lofar 2</a:t>
             </a:r>
           </a:p>
           <a:p>
@@ -4125,14 +5596,6 @@
               <a:rPr sz="800">
                 <a:hlinkClick r:id="rId35"/>
               </a:rPr>
-              <a:t>Lofar 2</a:t>
-            </a:r>
-          </a:p>
-          <a:p>
-            <a:r>
-              <a:rPr sz="800">
-                <a:hlinkClick r:id="rId36"/>
-              </a:rPr>
               <a:t>Lofar 3</a:t>
             </a:r>
           </a:p>
@@ -4140,11 +5603,11 @@
       </p:sp>
       <p:sp>
         <p:nvSpPr>
-          <p:cNvPr id="21" name="Rounded Rectangle 20"/>
+          <p:cNvPr id="21" name="Rounded Rectangle 20">
+            <a:hlinkClick r:id="rId36"/>
+          </p:cNvPr>
           <p:cNvSpPr/>
-          <p:nvPr>
-            <a:hlinkClick r:id="rId37"/>
-          </p:nvPr>
+          <p:nvPr/>
         </p:nvSpPr>
         <p:spPr>
           <a:xfrm>
@@ -4188,7 +5651,7 @@
                   <a:srgbClr val="1F3A5F"/>
                 </a:solidFill>
               </a:rPr>
-              <a:t>Gram 11: Lambda Shuttle, Category 4, Cardassia</a:t>
+              <a:t>Gram 31: Lambda Shuttle, Category 3, Bajor</a:t>
             </a:r>
           </a:p>
         </p:txBody>
@@ -4217,28 +5680,20 @@
           <a:p>
             <a:r>
               <a:rPr sz="800">
-                <a:hlinkClick r:id="rId38"/>
+                <a:hlinkClick r:id="rId37"/>
               </a:rPr>
               <a:t>Lofar 1</a:t>
             </a:r>
           </a:p>
-          <a:p>
-            <a:r>
-              <a:rPr sz="800">
-                <a:hlinkClick r:id="rId39"/>
-              </a:rPr>
-              <a:t>Lofar 2</a:t>
-            </a:r>
-          </a:p>
-        </p:txBody>
-      </p:sp>
-      <p:sp>
-        <p:nvSpPr>
-          <p:cNvPr id="23" name="Rounded Rectangle 22"/>
+        </p:txBody>
+      </p:sp>
+      <p:sp>
+        <p:nvSpPr>
+          <p:cNvPr id="23" name="Rounded Rectangle 22">
+            <a:hlinkClick r:id="rId38"/>
+          </p:cNvPr>
           <p:cNvSpPr/>
-          <p:nvPr>
-            <a:hlinkClick r:id="rId40"/>
-          </p:nvPr>
+          <p:nvPr/>
         </p:nvSpPr>
         <p:spPr>
           <a:xfrm>
@@ -4282,7 +5737,7 @@
                   <a:srgbClr val="1F3A5F"/>
                 </a:solidFill>
               </a:rPr>
-              <a:t>Gram 12: Constitution-class contact bearing 225, codename Tatooine</a:t>
+              <a:t>Gram 32: Nebulon-B, Category 4, Cardassia</a:t>
             </a:r>
           </a:p>
         </p:txBody>
@@ -4311,9 +5766,25 @@
           <a:p>
             <a:r>
               <a:rPr sz="800">
+                <a:hlinkClick r:id="rId39"/>
+              </a:rPr>
+              <a:t>Lofar 1</a:t>
+            </a:r>
+          </a:p>
+          <a:p>
+            <a:r>
+              <a:rPr sz="800">
+                <a:hlinkClick r:id="rId40"/>
+              </a:rPr>
+              <a:t>Lofar 2</a:t>
+            </a:r>
+          </a:p>
+          <a:p>
+            <a:r>
+              <a:rPr sz="800">
                 <a:hlinkClick r:id="rId41"/>
               </a:rPr>
-              <a:t>Lofar 1</a:t>
+              <a:t>Lofar 3</a:t>
             </a:r>
           </a:p>
           <a:p>
@@ -4321,26 +5792,18 @@
               <a:rPr sz="800">
                 <a:hlinkClick r:id="rId42"/>
               </a:rPr>
-              <a:t>Lofar 2</a:t>
-            </a:r>
-          </a:p>
-          <a:p>
-            <a:r>
-              <a:rPr sz="800">
-                <a:hlinkClick r:id="rId43"/>
-              </a:rPr>
-              <a:t>Lofar 3</a:t>
-            </a:r>
-          </a:p>
-        </p:txBody>
-      </p:sp>
-      <p:sp>
-        <p:nvSpPr>
-          <p:cNvPr id="25" name="Rounded Rectangle 24"/>
+              <a:t>Lofar 4</a:t>
+            </a:r>
+          </a:p>
+        </p:txBody>
+      </p:sp>
+      <p:sp>
+        <p:nvSpPr>
+          <p:cNvPr id="25" name="Rounded Rectangle 24">
+            <a:hlinkClick r:id="rId43"/>
+          </p:cNvPr>
           <p:cNvSpPr/>
-          <p:nvPr>
-            <a:hlinkClick r:id="rId44"/>
-          </p:nvPr>
+          <p:nvPr/>
         </p:nvSpPr>
         <p:spPr>
           <a:xfrm>
@@ -4384,7 +5847,7 @@
                   <a:srgbClr val="1F3A5F"/>
                 </a:solidFill>
               </a:rPr>
-              <a:t>Gram 13: Slave I contact bearing 078, codename Kobol</a:t>
+              <a:t>Gram 33: Prometheus, Category 3, Romulus</a:t>
             </a:r>
           </a:p>
         </p:txBody>
@@ -4413,7 +5876,7 @@
           <a:p>
             <a:r>
               <a:rPr sz="800">
-                <a:hlinkClick r:id="rId45"/>
+                <a:hlinkClick r:id="rId44"/>
               </a:rPr>
               <a:t>Lofar 1</a:t>
             </a:r>
@@ -4422,11 +5885,11 @@
       </p:sp>
       <p:sp>
         <p:nvSpPr>
-          <p:cNvPr id="27" name="Rounded Rectangle 26"/>
+          <p:cNvPr id="27" name="Rounded Rectangle 26">
+            <a:hlinkClick r:id="rId45"/>
+          </p:cNvPr>
           <p:cNvSpPr/>
-          <p:nvPr>
-            <a:hlinkClick r:id="rId46"/>
-          </p:nvPr>
+          <p:nvPr/>
         </p:nvSpPr>
         <p:spPr>
           <a:xfrm>
@@ -4470,7 +5933,7 @@
                   <a:srgbClr val="1F3A5F"/>
                 </a:solidFill>
               </a:rPr>
-              <a:t>Gram 14: Y-wing, Category 1, Tantive</a:t>
+              <a:t>Gram 34: Miranda-class, Category 2, Dagobah</a:t>
             </a:r>
           </a:p>
         </p:txBody>
@@ -4499,9 +5962,17 @@
           <a:p>
             <a:r>
               <a:rPr sz="800">
+                <a:hlinkClick r:id="rId46"/>
+              </a:rPr>
+              <a:t>Lofar 1</a:t>
+            </a:r>
+          </a:p>
+          <a:p>
+            <a:r>
+              <a:rPr sz="800">
                 <a:hlinkClick r:id="rId47"/>
               </a:rPr>
-              <a:t>Lofar 1</a:t>
+              <a:t>Lofar 2</a:t>
             </a:r>
           </a:p>
           <a:p>
@@ -4509,18 +5980,18 @@
               <a:rPr sz="800">
                 <a:hlinkClick r:id="rId48"/>
               </a:rPr>
-              <a:t>Lofar 2</a:t>
-            </a:r>
-          </a:p>
-        </p:txBody>
-      </p:sp>
-      <p:sp>
-        <p:nvSpPr>
-          <p:cNvPr id="29" name="Rounded Rectangle 28"/>
+              <a:t>Lofar 3</a:t>
+            </a:r>
+          </a:p>
+        </p:txBody>
+      </p:sp>
+      <p:sp>
+        <p:nvSpPr>
+          <p:cNvPr id="29" name="Rounded Rectangle 28">
+            <a:hlinkClick r:id="rId49"/>
+          </p:cNvPr>
           <p:cNvSpPr/>
-          <p:nvPr>
-            <a:hlinkClick r:id="rId49"/>
-          </p:nvPr>
+          <p:nvPr/>
         </p:nvSpPr>
         <p:spPr>
           <a:xfrm>
@@ -4564,7 +6035,7 @@
                   <a:srgbClr val="1F3A5F"/>
                 </a:solidFill>
               </a:rPr>
-              <a:t>Gram 16: Reliant, Category 1, Betazed</a:t>
+              <a:t>Gram 35: Nebulon-B, Category 4, Gandalf</a:t>
             </a:r>
           </a:p>
         </p:txBody>
@@ -4598,31 +6069,15 @@
               <a:t>Lofar 1</a:t>
             </a:r>
           </a:p>
-          <a:p>
-            <a:r>
-              <a:rPr sz="800">
-                <a:hlinkClick r:id="rId51"/>
-              </a:rPr>
-              <a:t>Lofar 2</a:t>
-            </a:r>
-          </a:p>
-          <a:p>
-            <a:r>
-              <a:rPr sz="800">
-                <a:hlinkClick r:id="rId52"/>
-              </a:rPr>
-              <a:t>Lofar 3</a:t>
-            </a:r>
-          </a:p>
-        </p:txBody>
-      </p:sp>
-      <p:sp>
-        <p:nvSpPr>
-          <p:cNvPr id="31" name="Rounded Rectangle 30"/>
+        </p:txBody>
+      </p:sp>
+      <p:sp>
+        <p:nvSpPr>
+          <p:cNvPr id="31" name="Rounded Rectangle 30">
+            <a:hlinkClick r:id="rId51"/>
+          </p:cNvPr>
           <p:cNvSpPr/>
-          <p:nvPr>
-            <a:hlinkClick r:id="rId53"/>
-          </p:nvPr>
+          <p:nvPr/>
         </p:nvSpPr>
         <p:spPr>
           <a:xfrm>
@@ -4666,7 +6121,7 @@
                   <a:srgbClr val="1F3A5F"/>
                 </a:solidFill>
               </a:rPr>
-              <a:t>Gram 18: Devastator, Category 4, Vulcan</a:t>
+              <a:t>Gram 36: Tantive IV contact bearing 226, codename Romulus</a:t>
             </a:r>
           </a:p>
         </p:txBody>
@@ -4695,9 +6150,25 @@
           <a:p>
             <a:r>
               <a:rPr sz="800">
+                <a:hlinkClick r:id="rId52"/>
+              </a:rPr>
+              <a:t>Lofar 1</a:t>
+            </a:r>
+          </a:p>
+          <a:p>
+            <a:r>
+              <a:rPr sz="800">
+                <a:hlinkClick r:id="rId53"/>
+              </a:rPr>
+              <a:t>Lofar 2</a:t>
+            </a:r>
+          </a:p>
+          <a:p>
+            <a:r>
+              <a:rPr sz="800">
                 <a:hlinkClick r:id="rId54"/>
               </a:rPr>
-              <a:t>Lofar 1</a:t>
+              <a:t>Lofar 3</a:t>
             </a:r>
           </a:p>
           <a:p>
@@ -4705,1652 +6176,7 @@
               <a:rPr sz="800">
                 <a:hlinkClick r:id="rId55"/>
               </a:rPr>
-              <a:t>Lofar 2</a:t>
-            </a:r>
-          </a:p>
-          <a:p>
-            <a:r>
-              <a:rPr sz="800">
-                <a:hlinkClick r:id="rId56"/>
-              </a:rPr>
-              <a:t>Lofar 3</a:t>
-            </a:r>
-          </a:p>
-        </p:txBody>
-      </p:sp>
-    </p:spTree>
-  </p:cSld>
-  <p:clrMapOvr>
-    <a:masterClrMapping/>
-  </p:clrMapOvr>
-</p:sld>
-</file>
-
-<file path=ppt/slides/slide3.xml><?xml version="1.0" encoding="utf-8"?>
-<p:sld xmlns:a="http://schemas.openxmlformats.org/drawingml/2006/main" xmlns:p="http://schemas.openxmlformats.org/presentationml/2006/main" xmlns:r="http://schemas.openxmlformats.org/officeDocument/2006/relationships">
-  <p:cSld>
-    <p:spTree>
-      <p:nvGrpSpPr>
-        <p:cNvPr id="1" name=""/>
-        <p:cNvGrpSpPr/>
-        <p:nvPr/>
-      </p:nvGrpSpPr>
-      <p:grpSpPr/>
-      <p:sp>
-        <p:nvSpPr>
-          <p:cNvPr id="2" name="Rectangle 1"/>
-          <p:cNvSpPr/>
-          <p:nvPr/>
-        </p:nvSpPr>
-        <p:spPr>
-          <a:xfrm>
-            <a:off x="0" y="0"/>
-            <a:ext cx="12188952" cy="548640"/>
-          </a:xfrm>
-          <a:prstGeom prst="rect">
-            <a:avLst/>
-          </a:prstGeom>
-          <a:solidFill>
-            <a:srgbClr val="1F3A5F"/>
-          </a:solidFill>
-          <a:ln>
-            <a:noFill/>
-          </a:ln>
-        </p:spPr>
-        <p:style>
-          <a:lnRef idx="1">
-            <a:schemeClr val="accent1"/>
-          </a:lnRef>
-          <a:fillRef idx="3">
-            <a:schemeClr val="accent1"/>
-          </a:fillRef>
-          <a:effectRef idx="2">
-            <a:schemeClr val="accent1"/>
-          </a:effectRef>
-          <a:fontRef idx="minor">
-            <a:schemeClr val="lt1"/>
-          </a:fontRef>
-        </p:style>
-        <p:txBody>
-          <a:bodyPr rtlCol="0" anchor="ctr" lIns="182880" rIns="182880"/>
-          <a:lstStyle/>
-          <a:p>
-            <a:pPr algn="ctr"/>
-            <a:r>
-              <a:rPr sz="2000" b="1">
-                <a:solidFill>
-                  <a:srgbClr val="FFFFFF"/>
-                </a:solidFill>
-              </a:rPr>
-              <a:t>Instructor Progress Test 3 Grams No FR — Page 2 of 2</a:t>
-            </a:r>
-          </a:p>
-        </p:txBody>
-      </p:sp>
-      <p:sp>
-        <p:nvSpPr>
-          <p:cNvPr id="3" name="Rounded Rectangle 2"/>
-          <p:cNvSpPr/>
-          <p:nvPr>
-            <a:hlinkClick r:id="rId2"/>
-          </p:nvPr>
-        </p:nvSpPr>
-        <p:spPr>
-          <a:xfrm>
-            <a:off x="365760" y="731520"/>
-            <a:ext cx="2200046" cy="365760"/>
-          </a:xfrm>
-          <a:prstGeom prst="roundRect">
-            <a:avLst/>
-          </a:prstGeom>
-          <a:solidFill>
-            <a:srgbClr val="E8EEF7"/>
-          </a:solidFill>
-          <a:ln>
-            <a:solidFill>
-              <a:srgbClr val="1F3A5F"/>
-            </a:solidFill>
-          </a:ln>
-        </p:spPr>
-        <p:style>
-          <a:lnRef idx="1">
-            <a:schemeClr val="accent1"/>
-          </a:lnRef>
-          <a:fillRef idx="3">
-            <a:schemeClr val="accent1"/>
-          </a:fillRef>
-          <a:effectRef idx="2">
-            <a:schemeClr val="accent1"/>
-          </a:effectRef>
-          <a:fontRef idx="minor">
-            <a:schemeClr val="lt1"/>
-          </a:fontRef>
-        </p:style>
-        <p:txBody>
-          <a:bodyPr rtlCol="0" anchor="ctr" lIns="45720" rIns="45720"/>
-          <a:lstStyle/>
-          <a:p>
-            <a:pPr algn="ctr"/>
-            <a:r>
-              <a:rPr sz="900">
-                <a:solidFill>
-                  <a:srgbClr val="1F3A5F"/>
-                </a:solidFill>
-              </a:rPr>
-              <a:t>Gram 19: Intrepid-class contact bearing 256, codename Caprica</a:t>
-            </a:r>
-          </a:p>
-        </p:txBody>
-      </p:sp>
-      <p:sp>
-        <p:nvSpPr>
-          <p:cNvPr id="4" name="TextBox 3"/>
-          <p:cNvSpPr txBox="1"/>
-          <p:nvPr/>
-        </p:nvSpPr>
-        <p:spPr>
-          <a:xfrm>
-            <a:off x="365760" y="1115568"/>
-            <a:ext cx="2200046" cy="1447800"/>
-          </a:xfrm>
-          <a:prstGeom prst="rect">
-            <a:avLst/>
-          </a:prstGeom>
-          <a:noFill/>
-        </p:spPr>
-        <p:txBody>
-          <a:bodyPr wrap="square">
-            <a:spAutoFit/>
-          </a:bodyPr>
-          <a:lstStyle/>
-          <a:p>
-            <a:r>
-              <a:rPr sz="800">
-                <a:hlinkClick r:id="rId3"/>
-              </a:rPr>
-              <a:t>Lofar 1</a:t>
-            </a:r>
-          </a:p>
-          <a:p>
-            <a:r>
-              <a:rPr sz="800">
-                <a:hlinkClick r:id="rId4"/>
-              </a:rPr>
-              <a:t>Lofar 2</a:t>
-            </a:r>
-          </a:p>
-          <a:p>
-            <a:r>
-              <a:rPr sz="800">
-                <a:hlinkClick r:id="rId5"/>
-              </a:rPr>
-              <a:t>Lofar 3</a:t>
-            </a:r>
-          </a:p>
-          <a:p>
-            <a:r>
-              <a:rPr sz="800">
-                <a:hlinkClick r:id="rId6"/>
-              </a:rPr>
               <a:t>Lofar 4</a:t>
-            </a:r>
-          </a:p>
-        </p:txBody>
-      </p:sp>
-      <p:sp>
-        <p:nvSpPr>
-          <p:cNvPr id="5" name="Rounded Rectangle 4"/>
-          <p:cNvSpPr/>
-          <p:nvPr>
-            <a:hlinkClick r:id="rId7"/>
-          </p:nvPr>
-        </p:nvSpPr>
-        <p:spPr>
-          <a:xfrm>
-            <a:off x="2657246" y="731520"/>
-            <a:ext cx="2200046" cy="365760"/>
-          </a:xfrm>
-          <a:prstGeom prst="roundRect">
-            <a:avLst/>
-          </a:prstGeom>
-          <a:solidFill>
-            <a:srgbClr val="E8EEF7"/>
-          </a:solidFill>
-          <a:ln>
-            <a:solidFill>
-              <a:srgbClr val="1F3A5F"/>
-            </a:solidFill>
-          </a:ln>
-        </p:spPr>
-        <p:style>
-          <a:lnRef idx="1">
-            <a:schemeClr val="accent1"/>
-          </a:lnRef>
-          <a:fillRef idx="3">
-            <a:schemeClr val="accent1"/>
-          </a:fillRef>
-          <a:effectRef idx="2">
-            <a:schemeClr val="accent1"/>
-          </a:effectRef>
-          <a:fontRef idx="minor">
-            <a:schemeClr val="lt1"/>
-          </a:fontRef>
-        </p:style>
-        <p:txBody>
-          <a:bodyPr rtlCol="0" anchor="ctr" lIns="45720" rIns="45720"/>
-          <a:lstStyle/>
-          <a:p>
-            <a:pPr algn="ctr"/>
-            <a:r>
-              <a:rPr sz="900">
-                <a:solidFill>
-                  <a:srgbClr val="1F3A5F"/>
-                </a:solidFill>
-              </a:rPr>
-              <a:t>Gram 20: Millennium Falcon, Category 1, Bajor</a:t>
-            </a:r>
-          </a:p>
-        </p:txBody>
-      </p:sp>
-      <p:sp>
-        <p:nvSpPr>
-          <p:cNvPr id="6" name="TextBox 5"/>
-          <p:cNvSpPr txBox="1"/>
-          <p:nvPr/>
-        </p:nvSpPr>
-        <p:spPr>
-          <a:xfrm>
-            <a:off x="2657246" y="1115568"/>
-            <a:ext cx="2200046" cy="1447800"/>
-          </a:xfrm>
-          <a:prstGeom prst="rect">
-            <a:avLst/>
-          </a:prstGeom>
-          <a:noFill/>
-        </p:spPr>
-        <p:txBody>
-          <a:bodyPr wrap="square">
-            <a:spAutoFit/>
-          </a:bodyPr>
-          <a:lstStyle/>
-          <a:p>
-            <a:r>
-              <a:rPr sz="800">
-                <a:hlinkClick r:id="rId8"/>
-              </a:rPr>
-              <a:t>Lofar 1</a:t>
-            </a:r>
-          </a:p>
-          <a:p>
-            <a:r>
-              <a:rPr sz="800">
-                <a:hlinkClick r:id="rId9"/>
-              </a:rPr>
-              <a:t>Lofar 2</a:t>
-            </a:r>
-          </a:p>
-          <a:p>
-            <a:r>
-              <a:rPr sz="800">
-                <a:hlinkClick r:id="rId10"/>
-              </a:rPr>
-              <a:t>Lofar 3</a:t>
-            </a:r>
-          </a:p>
-          <a:p>
-            <a:r>
-              <a:rPr sz="800">
-                <a:hlinkClick r:id="rId11"/>
-              </a:rPr>
-              <a:t>Lofar 4</a:t>
-            </a:r>
-          </a:p>
-        </p:txBody>
-      </p:sp>
-      <p:sp>
-        <p:nvSpPr>
-          <p:cNvPr id="7" name="Rounded Rectangle 6"/>
-          <p:cNvSpPr/>
-          <p:nvPr>
-            <a:hlinkClick r:id="rId12"/>
-          </p:nvPr>
-        </p:nvSpPr>
-        <p:spPr>
-          <a:xfrm>
-            <a:off x="4948732" y="731520"/>
-            <a:ext cx="2200046" cy="365760"/>
-          </a:xfrm>
-          <a:prstGeom prst="roundRect">
-            <a:avLst/>
-          </a:prstGeom>
-          <a:solidFill>
-            <a:srgbClr val="E8EEF7"/>
-          </a:solidFill>
-          <a:ln>
-            <a:solidFill>
-              <a:srgbClr val="1F3A5F"/>
-            </a:solidFill>
-          </a:ln>
-        </p:spPr>
-        <p:style>
-          <a:lnRef idx="1">
-            <a:schemeClr val="accent1"/>
-          </a:lnRef>
-          <a:fillRef idx="3">
-            <a:schemeClr val="accent1"/>
-          </a:fillRef>
-          <a:effectRef idx="2">
-            <a:schemeClr val="accent1"/>
-          </a:effectRef>
-          <a:fontRef idx="minor">
-            <a:schemeClr val="lt1"/>
-          </a:fontRef>
-        </p:style>
-        <p:txBody>
-          <a:bodyPr rtlCol="0" anchor="ctr" lIns="45720" rIns="45720"/>
-          <a:lstStyle/>
-          <a:p>
-            <a:pPr algn="ctr"/>
-            <a:r>
-              <a:rPr sz="900">
-                <a:solidFill>
-                  <a:srgbClr val="1F3A5F"/>
-                </a:solidFill>
-              </a:rPr>
-              <a:t>Gram 21: Enterprise, Category 1, Betazed</a:t>
-            </a:r>
-          </a:p>
-        </p:txBody>
-      </p:sp>
-      <p:sp>
-        <p:nvSpPr>
-          <p:cNvPr id="8" name="TextBox 7"/>
-          <p:cNvSpPr txBox="1"/>
-          <p:nvPr/>
-        </p:nvSpPr>
-        <p:spPr>
-          <a:xfrm>
-            <a:off x="4948732" y="1115568"/>
-            <a:ext cx="2200046" cy="1447800"/>
-          </a:xfrm>
-          <a:prstGeom prst="rect">
-            <a:avLst/>
-          </a:prstGeom>
-          <a:noFill/>
-        </p:spPr>
-        <p:txBody>
-          <a:bodyPr wrap="square">
-            <a:spAutoFit/>
-          </a:bodyPr>
-          <a:lstStyle/>
-          <a:p>
-            <a:r>
-              <a:rPr sz="800">
-                <a:hlinkClick r:id="rId13"/>
-              </a:rPr>
-              <a:t>Lofar 1</a:t>
-            </a:r>
-          </a:p>
-        </p:txBody>
-      </p:sp>
-      <p:sp>
-        <p:nvSpPr>
-          <p:cNvPr id="9" name="Rounded Rectangle 8"/>
-          <p:cNvSpPr/>
-          <p:nvPr>
-            <a:hlinkClick r:id="rId14"/>
-          </p:nvPr>
-        </p:nvSpPr>
-        <p:spPr>
-          <a:xfrm>
-            <a:off x="7240219" y="731520"/>
-            <a:ext cx="2200046" cy="365760"/>
-          </a:xfrm>
-          <a:prstGeom prst="roundRect">
-            <a:avLst/>
-          </a:prstGeom>
-          <a:solidFill>
-            <a:srgbClr val="E8EEF7"/>
-          </a:solidFill>
-          <a:ln>
-            <a:solidFill>
-              <a:srgbClr val="1F3A5F"/>
-            </a:solidFill>
-          </a:ln>
-        </p:spPr>
-        <p:style>
-          <a:lnRef idx="1">
-            <a:schemeClr val="accent1"/>
-          </a:lnRef>
-          <a:fillRef idx="3">
-            <a:schemeClr val="accent1"/>
-          </a:fillRef>
-          <a:effectRef idx="2">
-            <a:schemeClr val="accent1"/>
-          </a:effectRef>
-          <a:fontRef idx="minor">
-            <a:schemeClr val="lt1"/>
-          </a:fontRef>
-        </p:style>
-        <p:txBody>
-          <a:bodyPr rtlCol="0" anchor="ctr" lIns="45720" rIns="45720"/>
-          <a:lstStyle/>
-          <a:p>
-            <a:pPr algn="ctr"/>
-            <a:r>
-              <a:rPr sz="900">
-                <a:solidFill>
-                  <a:srgbClr val="1F3A5F"/>
-                </a:solidFill>
-              </a:rPr>
-              <a:t>Gram 23: Akira-class, Category 4, Betazed</a:t>
-            </a:r>
-          </a:p>
-        </p:txBody>
-      </p:sp>
-      <p:sp>
-        <p:nvSpPr>
-          <p:cNvPr id="10" name="TextBox 9"/>
-          <p:cNvSpPr txBox="1"/>
-          <p:nvPr/>
-        </p:nvSpPr>
-        <p:spPr>
-          <a:xfrm>
-            <a:off x="7240219" y="1115568"/>
-            <a:ext cx="2200046" cy="1447800"/>
-          </a:xfrm>
-          <a:prstGeom prst="rect">
-            <a:avLst/>
-          </a:prstGeom>
-          <a:noFill/>
-        </p:spPr>
-        <p:txBody>
-          <a:bodyPr wrap="square">
-            <a:spAutoFit/>
-          </a:bodyPr>
-          <a:lstStyle/>
-          <a:p>
-            <a:r>
-              <a:rPr sz="800">
-                <a:hlinkClick r:id="rId15"/>
-              </a:rPr>
-              <a:t>Lofar 1</a:t>
-            </a:r>
-          </a:p>
-          <a:p>
-            <a:r>
-              <a:rPr sz="800">
-                <a:hlinkClick r:id="rId16"/>
-              </a:rPr>
-              <a:t>Lofar 2</a:t>
-            </a:r>
-          </a:p>
-          <a:p>
-            <a:r>
-              <a:rPr sz="800">
-                <a:hlinkClick r:id="rId17"/>
-              </a:rPr>
-              <a:t>Lofar 3</a:t>
-            </a:r>
-          </a:p>
-          <a:p>
-            <a:r>
-              <a:rPr sz="800">
-                <a:hlinkClick r:id="rId18"/>
-              </a:rPr>
-              <a:t>Lofar 4</a:t>
-            </a:r>
-          </a:p>
-        </p:txBody>
-      </p:sp>
-      <p:sp>
-        <p:nvSpPr>
-          <p:cNvPr id="11" name="Rounded Rectangle 10"/>
-          <p:cNvSpPr/>
-          <p:nvPr>
-            <a:hlinkClick r:id="rId19"/>
-          </p:nvPr>
-        </p:nvSpPr>
-        <p:spPr>
-          <a:xfrm>
-            <a:off x="9531705" y="731520"/>
-            <a:ext cx="2200046" cy="365760"/>
-          </a:xfrm>
-          <a:prstGeom prst="roundRect">
-            <a:avLst/>
-          </a:prstGeom>
-          <a:solidFill>
-            <a:srgbClr val="E8EEF7"/>
-          </a:solidFill>
-          <a:ln>
-            <a:solidFill>
-              <a:srgbClr val="1F3A5F"/>
-            </a:solidFill>
-          </a:ln>
-        </p:spPr>
-        <p:style>
-          <a:lnRef idx="1">
-            <a:schemeClr val="accent1"/>
-          </a:lnRef>
-          <a:fillRef idx="3">
-            <a:schemeClr val="accent1"/>
-          </a:fillRef>
-          <a:effectRef idx="2">
-            <a:schemeClr val="accent1"/>
-          </a:effectRef>
-          <a:fontRef idx="minor">
-            <a:schemeClr val="lt1"/>
-          </a:fontRef>
-        </p:style>
-        <p:txBody>
-          <a:bodyPr rtlCol="0" anchor="ctr" lIns="45720" rIns="45720"/>
-          <a:lstStyle/>
-          <a:p>
-            <a:pPr algn="ctr"/>
-            <a:r>
-              <a:rPr sz="900">
-                <a:solidFill>
-                  <a:srgbClr val="1F3A5F"/>
-                </a:solidFill>
-              </a:rPr>
-              <a:t>Gram 24: Galaxy-class, Category 3, Betazed</a:t>
-            </a:r>
-          </a:p>
-        </p:txBody>
-      </p:sp>
-      <p:sp>
-        <p:nvSpPr>
-          <p:cNvPr id="12" name="TextBox 11"/>
-          <p:cNvSpPr txBox="1"/>
-          <p:nvPr/>
-        </p:nvSpPr>
-        <p:spPr>
-          <a:xfrm>
-            <a:off x="9531705" y="1115568"/>
-            <a:ext cx="2200046" cy="1447800"/>
-          </a:xfrm>
-          <a:prstGeom prst="rect">
-            <a:avLst/>
-          </a:prstGeom>
-          <a:noFill/>
-        </p:spPr>
-        <p:txBody>
-          <a:bodyPr wrap="square">
-            <a:spAutoFit/>
-          </a:bodyPr>
-          <a:lstStyle/>
-          <a:p>
-            <a:r>
-              <a:rPr sz="800">
-                <a:hlinkClick r:id="rId20"/>
-              </a:rPr>
-              <a:t>Lofar 1</a:t>
-            </a:r>
-          </a:p>
-          <a:p>
-            <a:r>
-              <a:rPr sz="800">
-                <a:hlinkClick r:id="rId21"/>
-              </a:rPr>
-              <a:t>Lofar 2</a:t>
-            </a:r>
-          </a:p>
-        </p:txBody>
-      </p:sp>
-      <p:sp>
-        <p:nvSpPr>
-          <p:cNvPr id="13" name="Rounded Rectangle 12"/>
-          <p:cNvSpPr/>
-          <p:nvPr>
-            <a:hlinkClick r:id="rId22"/>
-          </p:nvPr>
-        </p:nvSpPr>
-        <p:spPr>
-          <a:xfrm>
-            <a:off x="365760" y="2682240"/>
-            <a:ext cx="2200046" cy="365760"/>
-          </a:xfrm>
-          <a:prstGeom prst="roundRect">
-            <a:avLst/>
-          </a:prstGeom>
-          <a:solidFill>
-            <a:srgbClr val="E8EEF7"/>
-          </a:solidFill>
-          <a:ln>
-            <a:solidFill>
-              <a:srgbClr val="1F3A5F"/>
-            </a:solidFill>
-          </a:ln>
-        </p:spPr>
-        <p:style>
-          <a:lnRef idx="1">
-            <a:schemeClr val="accent1"/>
-          </a:lnRef>
-          <a:fillRef idx="3">
-            <a:schemeClr val="accent1"/>
-          </a:fillRef>
-          <a:effectRef idx="2">
-            <a:schemeClr val="accent1"/>
-          </a:effectRef>
-          <a:fontRef idx="minor">
-            <a:schemeClr val="lt1"/>
-          </a:fontRef>
-        </p:style>
-        <p:txBody>
-          <a:bodyPr rtlCol="0" anchor="ctr" lIns="45720" rIns="45720"/>
-          <a:lstStyle/>
-          <a:p>
-            <a:pPr algn="ctr"/>
-            <a:r>
-              <a:rPr sz="900">
-                <a:solidFill>
-                  <a:srgbClr val="1F3A5F"/>
-                </a:solidFill>
-              </a:rPr>
-              <a:t>Gram 25: Corellian Corvette, Category 4, Dagobah</a:t>
-            </a:r>
-          </a:p>
-        </p:txBody>
-      </p:sp>
-      <p:sp>
-        <p:nvSpPr>
-          <p:cNvPr id="14" name="TextBox 13"/>
-          <p:cNvSpPr txBox="1"/>
-          <p:nvPr/>
-        </p:nvSpPr>
-        <p:spPr>
-          <a:xfrm>
-            <a:off x="365760" y="3066288"/>
-            <a:ext cx="2200046" cy="1447800"/>
-          </a:xfrm>
-          <a:prstGeom prst="rect">
-            <a:avLst/>
-          </a:prstGeom>
-          <a:noFill/>
-        </p:spPr>
-        <p:txBody>
-          <a:bodyPr wrap="square">
-            <a:spAutoFit/>
-          </a:bodyPr>
-          <a:lstStyle/>
-          <a:p>
-            <a:r>
-              <a:rPr sz="800">
-                <a:hlinkClick r:id="rId23"/>
-              </a:rPr>
-              <a:t>Lofar 1</a:t>
-            </a:r>
-          </a:p>
-        </p:txBody>
-      </p:sp>
-      <p:sp>
-        <p:nvSpPr>
-          <p:cNvPr id="15" name="Rounded Rectangle 14"/>
-          <p:cNvSpPr/>
-          <p:nvPr>
-            <a:hlinkClick r:id="rId24"/>
-          </p:nvPr>
-        </p:nvSpPr>
-        <p:spPr>
-          <a:xfrm>
-            <a:off x="2657246" y="2682240"/>
-            <a:ext cx="2200046" cy="365760"/>
-          </a:xfrm>
-          <a:prstGeom prst="roundRect">
-            <a:avLst/>
-          </a:prstGeom>
-          <a:solidFill>
-            <a:srgbClr val="E8EEF7"/>
-          </a:solidFill>
-          <a:ln>
-            <a:solidFill>
-              <a:srgbClr val="1F3A5F"/>
-            </a:solidFill>
-          </a:ln>
-        </p:spPr>
-        <p:style>
-          <a:lnRef idx="1">
-            <a:schemeClr val="accent1"/>
-          </a:lnRef>
-          <a:fillRef idx="3">
-            <a:schemeClr val="accent1"/>
-          </a:fillRef>
-          <a:effectRef idx="2">
-            <a:schemeClr val="accent1"/>
-          </a:effectRef>
-          <a:fontRef idx="minor">
-            <a:schemeClr val="lt1"/>
-          </a:fontRef>
-        </p:style>
-        <p:txBody>
-          <a:bodyPr rtlCol="0" anchor="ctr" lIns="45720" rIns="45720"/>
-          <a:lstStyle/>
-          <a:p>
-            <a:pPr algn="ctr"/>
-            <a:r>
-              <a:rPr sz="900">
-                <a:solidFill>
-                  <a:srgbClr val="1F3A5F"/>
-                </a:solidFill>
-              </a:rPr>
-              <a:t>Gram 26: Reliant, Category 4, Risa</a:t>
-            </a:r>
-          </a:p>
-        </p:txBody>
-      </p:sp>
-      <p:sp>
-        <p:nvSpPr>
-          <p:cNvPr id="16" name="TextBox 15"/>
-          <p:cNvSpPr txBox="1"/>
-          <p:nvPr/>
-        </p:nvSpPr>
-        <p:spPr>
-          <a:xfrm>
-            <a:off x="2657246" y="3066288"/>
-            <a:ext cx="2200046" cy="1447800"/>
-          </a:xfrm>
-          <a:prstGeom prst="rect">
-            <a:avLst/>
-          </a:prstGeom>
-          <a:noFill/>
-        </p:spPr>
-        <p:txBody>
-          <a:bodyPr wrap="square">
-            <a:spAutoFit/>
-          </a:bodyPr>
-          <a:lstStyle/>
-          <a:p>
-            <a:r>
-              <a:rPr sz="800">
-                <a:hlinkClick r:id="rId25"/>
-              </a:rPr>
-              <a:t>Lofar 1</a:t>
-            </a:r>
-          </a:p>
-          <a:p>
-            <a:r>
-              <a:rPr sz="800">
-                <a:hlinkClick r:id="rId26"/>
-              </a:rPr>
-              <a:t>Lofar 2</a:t>
-            </a:r>
-          </a:p>
-          <a:p>
-            <a:r>
-              <a:rPr sz="800">
-                <a:hlinkClick r:id="rId27"/>
-              </a:rPr>
-              <a:t>Lofar 3</a:t>
-            </a:r>
-          </a:p>
-          <a:p>
-            <a:r>
-              <a:rPr sz="800">
-                <a:hlinkClick r:id="rId28"/>
-              </a:rPr>
-              <a:t>Lofar 4</a:t>
-            </a:r>
-          </a:p>
-        </p:txBody>
-      </p:sp>
-      <p:sp>
-        <p:nvSpPr>
-          <p:cNvPr id="17" name="Rounded Rectangle 16"/>
-          <p:cNvSpPr/>
-          <p:nvPr>
-            <a:hlinkClick r:id="rId29"/>
-          </p:nvPr>
-        </p:nvSpPr>
-        <p:spPr>
-          <a:xfrm>
-            <a:off x="4948732" y="2682240"/>
-            <a:ext cx="2200046" cy="365760"/>
-          </a:xfrm>
-          <a:prstGeom prst="roundRect">
-            <a:avLst/>
-          </a:prstGeom>
-          <a:solidFill>
-            <a:srgbClr val="E8EEF7"/>
-          </a:solidFill>
-          <a:ln>
-            <a:solidFill>
-              <a:srgbClr val="1F3A5F"/>
-            </a:solidFill>
-          </a:ln>
-        </p:spPr>
-        <p:style>
-          <a:lnRef idx="1">
-            <a:schemeClr val="accent1"/>
-          </a:lnRef>
-          <a:fillRef idx="3">
-            <a:schemeClr val="accent1"/>
-          </a:fillRef>
-          <a:effectRef idx="2">
-            <a:schemeClr val="accent1"/>
-          </a:effectRef>
-          <a:fontRef idx="minor">
-            <a:schemeClr val="lt1"/>
-          </a:fontRef>
-        </p:style>
-        <p:txBody>
-          <a:bodyPr rtlCol="0" anchor="ctr" lIns="45720" rIns="45720"/>
-          <a:lstStyle/>
-          <a:p>
-            <a:pPr algn="ctr"/>
-            <a:r>
-              <a:rPr sz="900">
-                <a:solidFill>
-                  <a:srgbClr val="1F3A5F"/>
-                </a:solidFill>
-              </a:rPr>
-              <a:t>Gram 28: Intrepid-class contact bearing 279, codename Vulcan</a:t>
-            </a:r>
-          </a:p>
-        </p:txBody>
-      </p:sp>
-      <p:sp>
-        <p:nvSpPr>
-          <p:cNvPr id="18" name="TextBox 17"/>
-          <p:cNvSpPr txBox="1"/>
-          <p:nvPr/>
-        </p:nvSpPr>
-        <p:spPr>
-          <a:xfrm>
-            <a:off x="4948732" y="3066288"/>
-            <a:ext cx="2200046" cy="1447800"/>
-          </a:xfrm>
-          <a:prstGeom prst="rect">
-            <a:avLst/>
-          </a:prstGeom>
-          <a:noFill/>
-        </p:spPr>
-        <p:txBody>
-          <a:bodyPr wrap="square">
-            <a:spAutoFit/>
-          </a:bodyPr>
-          <a:lstStyle/>
-          <a:p>
-            <a:r>
-              <a:rPr sz="800">
-                <a:hlinkClick r:id="rId30"/>
-              </a:rPr>
-              <a:t>Lofar 1</a:t>
-            </a:r>
-          </a:p>
-          <a:p>
-            <a:r>
-              <a:rPr sz="800">
-                <a:hlinkClick r:id="rId31"/>
-              </a:rPr>
-              <a:t>Lofar 2</a:t>
-            </a:r>
-          </a:p>
-        </p:txBody>
-      </p:sp>
-      <p:sp>
-        <p:nvSpPr>
-          <p:cNvPr id="19" name="Rounded Rectangle 18"/>
-          <p:cNvSpPr/>
-          <p:nvPr>
-            <a:hlinkClick r:id="rId32"/>
-          </p:nvPr>
-        </p:nvSpPr>
-        <p:spPr>
-          <a:xfrm>
-            <a:off x="7240219" y="2682240"/>
-            <a:ext cx="2200046" cy="365760"/>
-          </a:xfrm>
-          <a:prstGeom prst="roundRect">
-            <a:avLst/>
-          </a:prstGeom>
-          <a:solidFill>
-            <a:srgbClr val="E8EEF7"/>
-          </a:solidFill>
-          <a:ln>
-            <a:solidFill>
-              <a:srgbClr val="1F3A5F"/>
-            </a:solidFill>
-          </a:ln>
-        </p:spPr>
-        <p:style>
-          <a:lnRef idx="1">
-            <a:schemeClr val="accent1"/>
-          </a:lnRef>
-          <a:fillRef idx="3">
-            <a:schemeClr val="accent1"/>
-          </a:fillRef>
-          <a:effectRef idx="2">
-            <a:schemeClr val="accent1"/>
-          </a:effectRef>
-          <a:fontRef idx="minor">
-            <a:schemeClr val="lt1"/>
-          </a:fontRef>
-        </p:style>
-        <p:txBody>
-          <a:bodyPr rtlCol="0" anchor="ctr" lIns="45720" rIns="45720"/>
-          <a:lstStyle/>
-          <a:p>
-            <a:pPr algn="ctr"/>
-            <a:r>
-              <a:rPr sz="900">
-                <a:solidFill>
-                  <a:srgbClr val="1F3A5F"/>
-                </a:solidFill>
-              </a:rPr>
-              <a:t>Gram 30: Voyager, Category 2, Bajor</a:t>
-            </a:r>
-          </a:p>
-        </p:txBody>
-      </p:sp>
-      <p:sp>
-        <p:nvSpPr>
-          <p:cNvPr id="20" name="TextBox 19"/>
-          <p:cNvSpPr txBox="1"/>
-          <p:nvPr/>
-        </p:nvSpPr>
-        <p:spPr>
-          <a:xfrm>
-            <a:off x="7240219" y="3066288"/>
-            <a:ext cx="2200046" cy="1447800"/>
-          </a:xfrm>
-          <a:prstGeom prst="rect">
-            <a:avLst/>
-          </a:prstGeom>
-          <a:noFill/>
-        </p:spPr>
-        <p:txBody>
-          <a:bodyPr wrap="square">
-            <a:spAutoFit/>
-          </a:bodyPr>
-          <a:lstStyle/>
-          <a:p>
-            <a:r>
-              <a:rPr sz="800">
-                <a:hlinkClick r:id="rId33"/>
-              </a:rPr>
-              <a:t>Lofar 1</a:t>
-            </a:r>
-          </a:p>
-          <a:p>
-            <a:r>
-              <a:rPr sz="800">
-                <a:hlinkClick r:id="rId34"/>
-              </a:rPr>
-              <a:t>Lofar 2</a:t>
-            </a:r>
-          </a:p>
-          <a:p>
-            <a:r>
-              <a:rPr sz="800">
-                <a:hlinkClick r:id="rId35"/>
-              </a:rPr>
-              <a:t>Lofar 3</a:t>
-            </a:r>
-          </a:p>
-        </p:txBody>
-      </p:sp>
-      <p:sp>
-        <p:nvSpPr>
-          <p:cNvPr id="21" name="Rounded Rectangle 20"/>
-          <p:cNvSpPr/>
-          <p:nvPr>
-            <a:hlinkClick r:id="rId36"/>
-          </p:nvPr>
-        </p:nvSpPr>
-        <p:spPr>
-          <a:xfrm>
-            <a:off x="9531705" y="2682240"/>
-            <a:ext cx="2200046" cy="365760"/>
-          </a:xfrm>
-          <a:prstGeom prst="roundRect">
-            <a:avLst/>
-          </a:prstGeom>
-          <a:solidFill>
-            <a:srgbClr val="E8EEF7"/>
-          </a:solidFill>
-          <a:ln>
-            <a:solidFill>
-              <a:srgbClr val="1F3A5F"/>
-            </a:solidFill>
-          </a:ln>
-        </p:spPr>
-        <p:style>
-          <a:lnRef idx="1">
-            <a:schemeClr val="accent1"/>
-          </a:lnRef>
-          <a:fillRef idx="3">
-            <a:schemeClr val="accent1"/>
-          </a:fillRef>
-          <a:effectRef idx="2">
-            <a:schemeClr val="accent1"/>
-          </a:effectRef>
-          <a:fontRef idx="minor">
-            <a:schemeClr val="lt1"/>
-          </a:fontRef>
-        </p:style>
-        <p:txBody>
-          <a:bodyPr rtlCol="0" anchor="ctr" lIns="45720" rIns="45720"/>
-          <a:lstStyle/>
-          <a:p>
-            <a:pPr algn="ctr"/>
-            <a:r>
-              <a:rPr sz="900">
-                <a:solidFill>
-                  <a:srgbClr val="1F3A5F"/>
-                </a:solidFill>
-              </a:rPr>
-              <a:t>Gram 31: Lambda Shuttle, Category 3, Bajor</a:t>
-            </a:r>
-          </a:p>
-        </p:txBody>
-      </p:sp>
-      <p:sp>
-        <p:nvSpPr>
-          <p:cNvPr id="22" name="TextBox 21"/>
-          <p:cNvSpPr txBox="1"/>
-          <p:nvPr/>
-        </p:nvSpPr>
-        <p:spPr>
-          <a:xfrm>
-            <a:off x="9531705" y="3066288"/>
-            <a:ext cx="2200046" cy="1447800"/>
-          </a:xfrm>
-          <a:prstGeom prst="rect">
-            <a:avLst/>
-          </a:prstGeom>
-          <a:noFill/>
-        </p:spPr>
-        <p:txBody>
-          <a:bodyPr wrap="square">
-            <a:spAutoFit/>
-          </a:bodyPr>
-          <a:lstStyle/>
-          <a:p>
-            <a:r>
-              <a:rPr sz="800">
-                <a:hlinkClick r:id="rId37"/>
-              </a:rPr>
-              <a:t>Lofar 1</a:t>
-            </a:r>
-          </a:p>
-        </p:txBody>
-      </p:sp>
-      <p:sp>
-        <p:nvSpPr>
-          <p:cNvPr id="23" name="Rounded Rectangle 22"/>
-          <p:cNvSpPr/>
-          <p:nvPr>
-            <a:hlinkClick r:id="rId38"/>
-          </p:nvPr>
-        </p:nvSpPr>
-        <p:spPr>
-          <a:xfrm>
-            <a:off x="365760" y="4632960"/>
-            <a:ext cx="2200046" cy="365760"/>
-          </a:xfrm>
-          <a:prstGeom prst="roundRect">
-            <a:avLst/>
-          </a:prstGeom>
-          <a:solidFill>
-            <a:srgbClr val="E8EEF7"/>
-          </a:solidFill>
-          <a:ln>
-            <a:solidFill>
-              <a:srgbClr val="1F3A5F"/>
-            </a:solidFill>
-          </a:ln>
-        </p:spPr>
-        <p:style>
-          <a:lnRef idx="1">
-            <a:schemeClr val="accent1"/>
-          </a:lnRef>
-          <a:fillRef idx="3">
-            <a:schemeClr val="accent1"/>
-          </a:fillRef>
-          <a:effectRef idx="2">
-            <a:schemeClr val="accent1"/>
-          </a:effectRef>
-          <a:fontRef idx="minor">
-            <a:schemeClr val="lt1"/>
-          </a:fontRef>
-        </p:style>
-        <p:txBody>
-          <a:bodyPr rtlCol="0" anchor="ctr" lIns="45720" rIns="45720"/>
-          <a:lstStyle/>
-          <a:p>
-            <a:pPr algn="ctr"/>
-            <a:r>
-              <a:rPr sz="900">
-                <a:solidFill>
-                  <a:srgbClr val="1F3A5F"/>
-                </a:solidFill>
-              </a:rPr>
-              <a:t>Gram 32: Nebulon-B, Category 4, Cardassia</a:t>
-            </a:r>
-          </a:p>
-        </p:txBody>
-      </p:sp>
-      <p:sp>
-        <p:nvSpPr>
-          <p:cNvPr id="24" name="TextBox 23"/>
-          <p:cNvSpPr txBox="1"/>
-          <p:nvPr/>
-        </p:nvSpPr>
-        <p:spPr>
-          <a:xfrm>
-            <a:off x="365760" y="5017008"/>
-            <a:ext cx="2200046" cy="1447800"/>
-          </a:xfrm>
-          <a:prstGeom prst="rect">
-            <a:avLst/>
-          </a:prstGeom>
-          <a:noFill/>
-        </p:spPr>
-        <p:txBody>
-          <a:bodyPr wrap="square">
-            <a:spAutoFit/>
-          </a:bodyPr>
-          <a:lstStyle/>
-          <a:p>
-            <a:r>
-              <a:rPr sz="800">
-                <a:hlinkClick r:id="rId39"/>
-              </a:rPr>
-              <a:t>Lofar 1</a:t>
-            </a:r>
-          </a:p>
-          <a:p>
-            <a:r>
-              <a:rPr sz="800">
-                <a:hlinkClick r:id="rId40"/>
-              </a:rPr>
-              <a:t>Lofar 2</a:t>
-            </a:r>
-          </a:p>
-          <a:p>
-            <a:r>
-              <a:rPr sz="800">
-                <a:hlinkClick r:id="rId41"/>
-              </a:rPr>
-              <a:t>Lofar 3</a:t>
-            </a:r>
-          </a:p>
-          <a:p>
-            <a:r>
-              <a:rPr sz="800">
-                <a:hlinkClick r:id="rId42"/>
-              </a:rPr>
-              <a:t>Lofar 4</a:t>
-            </a:r>
-          </a:p>
-        </p:txBody>
-      </p:sp>
-      <p:sp>
-        <p:nvSpPr>
-          <p:cNvPr id="25" name="Rounded Rectangle 24"/>
-          <p:cNvSpPr/>
-          <p:nvPr>
-            <a:hlinkClick r:id="rId43"/>
-          </p:nvPr>
-        </p:nvSpPr>
-        <p:spPr>
-          <a:xfrm>
-            <a:off x="2657246" y="4632960"/>
-            <a:ext cx="2200046" cy="365760"/>
-          </a:xfrm>
-          <a:prstGeom prst="roundRect">
-            <a:avLst/>
-          </a:prstGeom>
-          <a:solidFill>
-            <a:srgbClr val="E8EEF7"/>
-          </a:solidFill>
-          <a:ln>
-            <a:solidFill>
-              <a:srgbClr val="1F3A5F"/>
-            </a:solidFill>
-          </a:ln>
-        </p:spPr>
-        <p:style>
-          <a:lnRef idx="1">
-            <a:schemeClr val="accent1"/>
-          </a:lnRef>
-          <a:fillRef idx="3">
-            <a:schemeClr val="accent1"/>
-          </a:fillRef>
-          <a:effectRef idx="2">
-            <a:schemeClr val="accent1"/>
-          </a:effectRef>
-          <a:fontRef idx="minor">
-            <a:schemeClr val="lt1"/>
-          </a:fontRef>
-        </p:style>
-        <p:txBody>
-          <a:bodyPr rtlCol="0" anchor="ctr" lIns="45720" rIns="45720"/>
-          <a:lstStyle/>
-          <a:p>
-            <a:pPr algn="ctr"/>
-            <a:r>
-              <a:rPr sz="900">
-                <a:solidFill>
-                  <a:srgbClr val="1F3A5F"/>
-                </a:solidFill>
-              </a:rPr>
-              <a:t>Gram 33: Prometheus, Category 3, Romulus</a:t>
-            </a:r>
-          </a:p>
-        </p:txBody>
-      </p:sp>
-      <p:sp>
-        <p:nvSpPr>
-          <p:cNvPr id="26" name="TextBox 25"/>
-          <p:cNvSpPr txBox="1"/>
-          <p:nvPr/>
-        </p:nvSpPr>
-        <p:spPr>
-          <a:xfrm>
-            <a:off x="2657246" y="5017008"/>
-            <a:ext cx="2200046" cy="1447800"/>
-          </a:xfrm>
-          <a:prstGeom prst="rect">
-            <a:avLst/>
-          </a:prstGeom>
-          <a:noFill/>
-        </p:spPr>
-        <p:txBody>
-          <a:bodyPr wrap="square">
-            <a:spAutoFit/>
-          </a:bodyPr>
-          <a:lstStyle/>
-          <a:p>
-            <a:r>
-              <a:rPr sz="800">
-                <a:hlinkClick r:id="rId44"/>
-              </a:rPr>
-              <a:t>Lofar 1</a:t>
-            </a:r>
-          </a:p>
-        </p:txBody>
-      </p:sp>
-      <p:sp>
-        <p:nvSpPr>
-          <p:cNvPr id="27" name="Rounded Rectangle 26"/>
-          <p:cNvSpPr/>
-          <p:nvPr>
-            <a:hlinkClick r:id="rId45"/>
-          </p:nvPr>
-        </p:nvSpPr>
-        <p:spPr>
-          <a:xfrm>
-            <a:off x="4948732" y="4632960"/>
-            <a:ext cx="2200046" cy="365760"/>
-          </a:xfrm>
-          <a:prstGeom prst="roundRect">
-            <a:avLst/>
-          </a:prstGeom>
-          <a:solidFill>
-            <a:srgbClr val="E8EEF7"/>
-          </a:solidFill>
-          <a:ln>
-            <a:solidFill>
-              <a:srgbClr val="1F3A5F"/>
-            </a:solidFill>
-          </a:ln>
-        </p:spPr>
-        <p:style>
-          <a:lnRef idx="1">
-            <a:schemeClr val="accent1"/>
-          </a:lnRef>
-          <a:fillRef idx="3">
-            <a:schemeClr val="accent1"/>
-          </a:fillRef>
-          <a:effectRef idx="2">
-            <a:schemeClr val="accent1"/>
-          </a:effectRef>
-          <a:fontRef idx="minor">
-            <a:schemeClr val="lt1"/>
-          </a:fontRef>
-        </p:style>
-        <p:txBody>
-          <a:bodyPr rtlCol="0" anchor="ctr" lIns="45720" rIns="45720"/>
-          <a:lstStyle/>
-          <a:p>
-            <a:pPr algn="ctr"/>
-            <a:r>
-              <a:rPr sz="900">
-                <a:solidFill>
-                  <a:srgbClr val="1F3A5F"/>
-                </a:solidFill>
-              </a:rPr>
-              <a:t>Gram 34: Miranda-class, Category 2, Dagobah</a:t>
-            </a:r>
-          </a:p>
-        </p:txBody>
-      </p:sp>
-      <p:sp>
-        <p:nvSpPr>
-          <p:cNvPr id="28" name="TextBox 27"/>
-          <p:cNvSpPr txBox="1"/>
-          <p:nvPr/>
-        </p:nvSpPr>
-        <p:spPr>
-          <a:xfrm>
-            <a:off x="4948732" y="5017008"/>
-            <a:ext cx="2200046" cy="1447800"/>
-          </a:xfrm>
-          <a:prstGeom prst="rect">
-            <a:avLst/>
-          </a:prstGeom>
-          <a:noFill/>
-        </p:spPr>
-        <p:txBody>
-          <a:bodyPr wrap="square">
-            <a:spAutoFit/>
-          </a:bodyPr>
-          <a:lstStyle/>
-          <a:p>
-            <a:r>
-              <a:rPr sz="800">
-                <a:hlinkClick r:id="rId46"/>
-              </a:rPr>
-              <a:t>Lofar 1</a:t>
-            </a:r>
-          </a:p>
-          <a:p>
-            <a:r>
-              <a:rPr sz="800">
-                <a:hlinkClick r:id="rId47"/>
-              </a:rPr>
-              <a:t>Lofar 2</a:t>
-            </a:r>
-          </a:p>
-          <a:p>
-            <a:r>
-              <a:rPr sz="800">
-                <a:hlinkClick r:id="rId48"/>
-              </a:rPr>
-              <a:t>Lofar 3</a:t>
-            </a:r>
-          </a:p>
-        </p:txBody>
-      </p:sp>
-      <p:sp>
-        <p:nvSpPr>
-          <p:cNvPr id="29" name="Rounded Rectangle 28"/>
-          <p:cNvSpPr/>
-          <p:nvPr>
-            <a:hlinkClick r:id="rId49"/>
-          </p:nvPr>
-        </p:nvSpPr>
-        <p:spPr>
-          <a:xfrm>
-            <a:off x="7240219" y="4632960"/>
-            <a:ext cx="2200046" cy="365760"/>
-          </a:xfrm>
-          <a:prstGeom prst="roundRect">
-            <a:avLst/>
-          </a:prstGeom>
-          <a:solidFill>
-            <a:srgbClr val="E8EEF7"/>
-          </a:solidFill>
-          <a:ln>
-            <a:solidFill>
-              <a:srgbClr val="1F3A5F"/>
-            </a:solidFill>
-          </a:ln>
-        </p:spPr>
-        <p:style>
-          <a:lnRef idx="1">
-            <a:schemeClr val="accent1"/>
-          </a:lnRef>
-          <a:fillRef idx="3">
-            <a:schemeClr val="accent1"/>
-          </a:fillRef>
-          <a:effectRef idx="2">
-            <a:schemeClr val="accent1"/>
-          </a:effectRef>
-          <a:fontRef idx="minor">
-            <a:schemeClr val="lt1"/>
-          </a:fontRef>
-        </p:style>
-        <p:txBody>
-          <a:bodyPr rtlCol="0" anchor="ctr" lIns="45720" rIns="45720"/>
-          <a:lstStyle/>
-          <a:p>
-            <a:pPr algn="ctr"/>
-            <a:r>
-              <a:rPr sz="900">
-                <a:solidFill>
-                  <a:srgbClr val="1F3A5F"/>
-                </a:solidFill>
-              </a:rPr>
-              <a:t>Gram 35: Nebulon-B, Category 4, Gandalf</a:t>
-            </a:r>
-          </a:p>
-        </p:txBody>
-      </p:sp>
-      <p:sp>
-        <p:nvSpPr>
-          <p:cNvPr id="30" name="TextBox 29"/>
-          <p:cNvSpPr txBox="1"/>
-          <p:nvPr/>
-        </p:nvSpPr>
-        <p:spPr>
-          <a:xfrm>
-            <a:off x="7240219" y="5017008"/>
-            <a:ext cx="2200046" cy="1447800"/>
-          </a:xfrm>
-          <a:prstGeom prst="rect">
-            <a:avLst/>
-          </a:prstGeom>
-          <a:noFill/>
-        </p:spPr>
-        <p:txBody>
-          <a:bodyPr wrap="square">
-            <a:spAutoFit/>
-          </a:bodyPr>
-          <a:lstStyle/>
-          <a:p>
-            <a:r>
-              <a:rPr sz="800">
-                <a:hlinkClick r:id="rId50"/>
-              </a:rPr>
-              <a:t>Lofar 1</a:t>
-            </a:r>
-          </a:p>
-        </p:txBody>
-      </p:sp>
-      <p:sp>
-        <p:nvSpPr>
-          <p:cNvPr id="31" name="Rounded Rectangle 30"/>
-          <p:cNvSpPr/>
-          <p:nvPr>
-            <a:hlinkClick r:id="rId51"/>
-          </p:nvPr>
-        </p:nvSpPr>
-        <p:spPr>
-          <a:xfrm>
-            <a:off x="9531705" y="4632960"/>
-            <a:ext cx="2200046" cy="365760"/>
-          </a:xfrm>
-          <a:prstGeom prst="roundRect">
-            <a:avLst/>
-          </a:prstGeom>
-          <a:solidFill>
-            <a:srgbClr val="E8EEF7"/>
-          </a:solidFill>
-          <a:ln>
-            <a:solidFill>
-              <a:srgbClr val="1F3A5F"/>
-            </a:solidFill>
-          </a:ln>
-        </p:spPr>
-        <p:style>
-          <a:lnRef idx="1">
-            <a:schemeClr val="accent1"/>
-          </a:lnRef>
-          <a:fillRef idx="3">
-            <a:schemeClr val="accent1"/>
-          </a:fillRef>
-          <a:effectRef idx="2">
-            <a:schemeClr val="accent1"/>
-          </a:effectRef>
-          <a:fontRef idx="minor">
-            <a:schemeClr val="lt1"/>
-          </a:fontRef>
-        </p:style>
-        <p:txBody>
-          <a:bodyPr rtlCol="0" anchor="ctr" lIns="45720" rIns="45720"/>
-          <a:lstStyle/>
-          <a:p>
-            <a:pPr algn="ctr"/>
-            <a:r>
-              <a:rPr sz="900">
-                <a:solidFill>
-                  <a:srgbClr val="1F3A5F"/>
-                </a:solidFill>
-              </a:rPr>
-              <a:t>Gram 36: Tantive IV contact bearing 226, codename Romulus</a:t>
-            </a:r>
-          </a:p>
-        </p:txBody>
-      </p:sp>
-      <p:sp>
-        <p:nvSpPr>
-          <p:cNvPr id="32" name="TextBox 31"/>
-          <p:cNvSpPr txBox="1"/>
-          <p:nvPr/>
-        </p:nvSpPr>
-        <p:spPr>
-          <a:xfrm>
-            <a:off x="9531705" y="5017008"/>
-            <a:ext cx="2200046" cy="1447800"/>
-          </a:xfrm>
-          <a:prstGeom prst="rect">
-            <a:avLst/>
-          </a:prstGeom>
-          <a:noFill/>
-        </p:spPr>
-        <p:txBody>
-          <a:bodyPr wrap="square">
-            <a:spAutoFit/>
-          </a:bodyPr>
-          <a:lstStyle/>
-          <a:p>
-            <a:r>
-              <a:rPr sz="800">
-                <a:hlinkClick r:id="rId52"/>
-              </a:rPr>
-              <a:t>Lofar 1</a:t>
-            </a:r>
-          </a:p>
-          <a:p>
-            <a:r>
-              <a:rPr sz="800">
-                <a:hlinkClick r:id="rId53"/>
-              </a:rPr>
-              <a:t>Lofar 2</a:t>
-            </a:r>
-          </a:p>
-          <a:p>
-            <a:r>
-              <a:rPr sz="800">
-                <a:hlinkClick r:id="rId54"/>
-              </a:rPr>
-              <a:t>Lofar 3</a:t>
-            </a:r>
-          </a:p>
-          <a:p>
-            <a:r>
-              <a:rPr sz="800">
-                <a:hlinkClick r:id="rId55"/>
-              </a:rPr>
-              <a:t>Lofar 4</a:t>
-            </a:r>
-          </a:p>
-        </p:txBody>
-      </p:sp>
-    </p:spTree>
-  </p:cSld>
-  <p:clrMapOvr>
-    <a:masterClrMapping/>
-  </p:clrMapOvr>
-</p:sld>
-</file>
-
-<file path=ppt/slides/slide4.xml><?xml version="1.0" encoding="utf-8"?>
-<p:sld xmlns:a="http://schemas.openxmlformats.org/drawingml/2006/main" xmlns:p="http://schemas.openxmlformats.org/presentationml/2006/main" xmlns:r="http://schemas.openxmlformats.org/officeDocument/2006/relationships">
-  <p:cSld>
-    <p:spTree>
-      <p:nvGrpSpPr>
-        <p:cNvPr id="1" name=""/>
-        <p:cNvGrpSpPr/>
-        <p:nvPr/>
-      </p:nvGrpSpPr>
-      <p:grpSpPr/>
-      <p:sp>
-        <p:nvSpPr>
-          <p:cNvPr id="2" name="TextBox 1"/>
-          <p:cNvSpPr txBox="1"/>
-          <p:nvPr/>
-        </p:nvSpPr>
-        <p:spPr>
-          <a:xfrm>
-            <a:off x="914400" y="2377440"/>
-            <a:ext cx="10360152" cy="1280160"/>
-          </a:xfrm>
-          <a:prstGeom prst="rect">
-            <a:avLst/>
-          </a:prstGeom>
-          <a:noFill/>
-        </p:spPr>
-        <p:txBody>
-          <a:bodyPr wrap="square">
-            <a:spAutoFit/>
-          </a:bodyPr>
-          <a:lstStyle/>
-          <a:p>
-            <a:pPr algn="ctr"/>
-            <a:r>
-              <a:rPr sz="4000" b="1">
-                <a:solidFill>
-                  <a:srgbClr val="1F3A5F"/>
-                </a:solidFill>
-              </a:rPr>
-              <a:t>End of Instructor Progress Test 3 Grams No FR</a:t>
-            </a:r>
-          </a:p>
-        </p:txBody>
-      </p:sp>
-      <p:sp>
-        <p:nvSpPr>
-          <p:cNvPr id="3" name="TextBox 2"/>
-          <p:cNvSpPr txBox="1"/>
-          <p:nvPr/>
-        </p:nvSpPr>
-        <p:spPr>
-          <a:xfrm>
-            <a:off x="914400" y="3840480"/>
-            <a:ext cx="10360152" cy="731520"/>
-          </a:xfrm>
-          <a:prstGeom prst="rect">
-            <a:avLst/>
-          </a:prstGeom>
-          <a:noFill/>
-        </p:spPr>
-        <p:txBody>
-          <a:bodyPr wrap="none">
-            <a:spAutoFit/>
-          </a:bodyPr>
-          <a:lstStyle/>
-          <a:p>
-            <a:pPr algn="ctr"/>
-            <a:r>
-              <a:rPr sz="2400">
-                <a:solidFill>
-                  <a:srgbClr val="1F3A5F"/>
-                </a:solidFill>
-              </a:rPr>
-              <a:t>Instructor Version</a:t>
             </a:r>
           </a:p>
         </p:txBody>

--- a/source/Instructor Progress Test 3 Grams No FR/Instructor Progress Test 3 Grams No FR.pptx
+++ b/source/Instructor Progress Test 3 Grams No FR/Instructor Progress Test 3 Grams No FR.pptx
@@ -7,6 +7,8 @@
   <p:sldIdLst>
     <p:sldId id="256" r:id="rId7"/>
     <p:sldId id="257" r:id="rId8"/>
+    <p:sldId id="258" r:id="rId9"/>
+    <p:sldId id="259" r:id="rId10"/>
   </p:sldIdLst>
   <p:sldSz cx="12188952" cy="6858000" type="screen4x3"/>
   <p:notesSz cx="6858000" cy="9144000"/>
@@ -3091,120 +3093,48 @@
       <p:grpSpPr/>
       <p:sp>
         <p:nvSpPr>
-          <p:cNvPr id="2" name="Rectangle 1"/>
-          <p:cNvSpPr/>
+          <p:cNvPr id="2" name="TextBox 1"/>
+          <p:cNvSpPr txBox="1"/>
           <p:nvPr/>
         </p:nvSpPr>
         <p:spPr>
           <a:xfrm>
-            <a:off x="0" y="0"/>
-            <a:ext cx="12188952" cy="548640"/>
+            <a:off x="914400" y="2377440"/>
+            <a:ext cx="10360152" cy="1280160"/>
           </a:xfrm>
           <a:prstGeom prst="rect">
             <a:avLst/>
           </a:prstGeom>
-          <a:solidFill>
-            <a:srgbClr val="1F3A5F"/>
-          </a:solidFill>
-          <a:ln>
-            <a:noFill/>
-          </a:ln>
-        </p:spPr>
-        <p:style>
-          <a:lnRef idx="1">
-            <a:schemeClr val="accent1"/>
-          </a:lnRef>
-          <a:fillRef idx="3">
-            <a:schemeClr val="accent1"/>
-          </a:fillRef>
-          <a:effectRef idx="2">
-            <a:schemeClr val="accent1"/>
-          </a:effectRef>
-          <a:fontRef idx="minor">
-            <a:schemeClr val="lt1"/>
-          </a:fontRef>
-        </p:style>
-        <p:txBody>
-          <a:bodyPr rtlCol="0" anchor="ctr" lIns="182880" rIns="182880"/>
+          <a:noFill/>
+        </p:spPr>
+        <p:txBody>
+          <a:bodyPr wrap="square">
+            <a:spAutoFit/>
+          </a:bodyPr>
           <a:lstStyle/>
           <a:p>
             <a:pPr algn="ctr"/>
             <a:r>
-              <a:rPr sz="2000" b="1">
-                <a:solidFill>
-                  <a:srgbClr val="FFFFFF"/>
-                </a:solidFill>
-              </a:rPr>
-              <a:t>Instructor Progress Test 3 Grams No FR — Page 1 of 2</a:t>
-            </a:r>
-          </a:p>
-        </p:txBody>
-      </p:sp>
-      <p:sp>
-        <p:nvSpPr>
-          <p:cNvPr id="3" name="Rounded Rectangle 2">
-            <a:hlinkClick r:id="rId2"/>
-          </p:cNvPr>
-          <p:cNvSpPr/>
-          <p:nvPr/>
-        </p:nvSpPr>
-        <p:spPr>
-          <a:xfrm>
-            <a:off x="365760" y="731520"/>
-            <a:ext cx="2200046" cy="365760"/>
-          </a:xfrm>
-          <a:prstGeom prst="roundRect">
-            <a:avLst/>
-          </a:prstGeom>
-          <a:solidFill>
-            <a:srgbClr val="E8EEF7"/>
-          </a:solidFill>
-          <a:ln>
-            <a:solidFill>
-              <a:srgbClr val="1F3A5F"/>
-            </a:solidFill>
-          </a:ln>
-        </p:spPr>
-        <p:style>
-          <a:lnRef idx="1">
-            <a:schemeClr val="accent1"/>
-          </a:lnRef>
-          <a:fillRef idx="3">
-            <a:schemeClr val="accent1"/>
-          </a:fillRef>
-          <a:effectRef idx="2">
-            <a:schemeClr val="accent1"/>
-          </a:effectRef>
-          <a:fontRef idx="minor">
-            <a:schemeClr val="lt1"/>
-          </a:fontRef>
-        </p:style>
-        <p:txBody>
-          <a:bodyPr rtlCol="0" anchor="ctr" lIns="45720" rIns="45720"/>
-          <a:lstStyle/>
-          <a:p>
-            <a:pPr algn="ctr"/>
-            <a:r>
-              <a:rPr sz="900">
+              <a:rPr sz="4000" b="1">
                 <a:solidFill>
                   <a:srgbClr val="1F3A5F"/>
                 </a:solidFill>
               </a:rPr>
-              <a:t>Gram 1: Imperial-class, Category 1, Coruscant</a:t>
-            </a:r>
-          </a:p>
-        </p:txBody>
-      </p:sp>
-      <p:sp>
-        <p:nvSpPr>
-          <p:cNvPr id="4" name="TextBox 3"/>
+              <a:t>Welcome to Instructor Progress Test 3 Grams No FR</a:t>
+            </a:r>
+          </a:p>
+        </p:txBody>
+      </p:sp>
+      <p:sp>
+        <p:nvSpPr>
+          <p:cNvPr id="3" name="TextBox 2"/>
           <p:cNvSpPr txBox="1"/>
           <p:nvPr/>
         </p:nvSpPr>
         <p:spPr>
           <a:xfrm>
-            <a:off x="365760" y="1115568"/>
-            <a:ext cx="2200046" cy="1447800"/>
+            <a:off x="914400" y="3840480"/>
+            <a:ext cx="10360152" cy="731520"/>
           </a:xfrm>
           <a:prstGeom prst="rect">
             <a:avLst/>
@@ -3212,1420 +3142,19 @@
           <a:noFill/>
         </p:spPr>
         <p:txBody>
-          <a:bodyPr wrap="square">
+          <a:bodyPr wrap="none">
             <a:spAutoFit/>
           </a:bodyPr>
           <a:lstStyle/>
           <a:p>
-            <a:r>
-              <a:rPr sz="800">
-                <a:hlinkClick r:id="rId3"/>
-              </a:rPr>
-              <a:t>Lofar 1</a:t>
-            </a:r>
-          </a:p>
-          <a:p>
-            <a:r>
-              <a:rPr sz="800">
-                <a:hlinkClick r:id="rId4"/>
-              </a:rPr>
-              <a:t>Lofar 2</a:t>
-            </a:r>
-          </a:p>
-        </p:txBody>
-      </p:sp>
-      <p:sp>
-        <p:nvSpPr>
-          <p:cNvPr id="5" name="Rounded Rectangle 4">
-            <a:hlinkClick r:id="rId5"/>
-          </p:cNvPr>
-          <p:cNvSpPr/>
-          <p:nvPr/>
-        </p:nvSpPr>
-        <p:spPr>
-          <a:xfrm>
-            <a:off x="2657246" y="731520"/>
-            <a:ext cx="2200046" cy="365760"/>
-          </a:xfrm>
-          <a:prstGeom prst="roundRect">
-            <a:avLst/>
-          </a:prstGeom>
-          <a:solidFill>
-            <a:srgbClr val="E8EEF7"/>
-          </a:solidFill>
-          <a:ln>
-            <a:solidFill>
-              <a:srgbClr val="1F3A5F"/>
-            </a:solidFill>
-          </a:ln>
-        </p:spPr>
-        <p:style>
-          <a:lnRef idx="1">
-            <a:schemeClr val="accent1"/>
-          </a:lnRef>
-          <a:fillRef idx="3">
-            <a:schemeClr val="accent1"/>
-          </a:fillRef>
-          <a:effectRef idx="2">
-            <a:schemeClr val="accent1"/>
-          </a:effectRef>
-          <a:fontRef idx="minor">
-            <a:schemeClr val="lt1"/>
-          </a:fontRef>
-        </p:style>
-        <p:txBody>
-          <a:bodyPr rtlCol="0" anchor="ctr" lIns="45720" rIns="45720"/>
-          <a:lstStyle/>
-          <a:p>
             <a:pPr algn="ctr"/>
             <a:r>
-              <a:rPr sz="900">
+              <a:rPr sz="2400">
                 <a:solidFill>
                   <a:srgbClr val="1F3A5F"/>
                 </a:solidFill>
               </a:rPr>
-              <a:t>Gram 2: Acclamator-class, Category 3, Bespin</a:t>
-            </a:r>
-          </a:p>
-        </p:txBody>
-      </p:sp>
-      <p:sp>
-        <p:nvSpPr>
-          <p:cNvPr id="6" name="TextBox 5"/>
-          <p:cNvSpPr txBox="1"/>
-          <p:nvPr/>
-        </p:nvSpPr>
-        <p:spPr>
-          <a:xfrm>
-            <a:off x="2657246" y="1115568"/>
-            <a:ext cx="2200046" cy="1447800"/>
-          </a:xfrm>
-          <a:prstGeom prst="rect">
-            <a:avLst/>
-          </a:prstGeom>
-          <a:noFill/>
-        </p:spPr>
-        <p:txBody>
-          <a:bodyPr wrap="square">
-            <a:spAutoFit/>
-          </a:bodyPr>
-          <a:lstStyle/>
-          <a:p>
-            <a:r>
-              <a:rPr sz="800">
-                <a:hlinkClick r:id="rId6"/>
-              </a:rPr>
-              <a:t>Lofar 1</a:t>
-            </a:r>
-          </a:p>
-          <a:p>
-            <a:r>
-              <a:rPr sz="800">
-                <a:hlinkClick r:id="rId7"/>
-              </a:rPr>
-              <a:t>Lofar 2</a:t>
-            </a:r>
-          </a:p>
-          <a:p>
-            <a:r>
-              <a:rPr sz="800">
-                <a:hlinkClick r:id="rId8"/>
-              </a:rPr>
-              <a:t>Lofar 3</a:t>
-            </a:r>
-          </a:p>
-          <a:p>
-            <a:r>
-              <a:rPr sz="800">
-                <a:hlinkClick r:id="rId9"/>
-              </a:rPr>
-              <a:t>Lofar 4</a:t>
-            </a:r>
-          </a:p>
-        </p:txBody>
-      </p:sp>
-      <p:sp>
-        <p:nvSpPr>
-          <p:cNvPr id="7" name="Rounded Rectangle 6">
-            <a:hlinkClick r:id="rId10"/>
-          </p:cNvPr>
-          <p:cNvSpPr/>
-          <p:nvPr/>
-        </p:nvSpPr>
-        <p:spPr>
-          <a:xfrm>
-            <a:off x="4948732" y="731520"/>
-            <a:ext cx="2200046" cy="365760"/>
-          </a:xfrm>
-          <a:prstGeom prst="roundRect">
-            <a:avLst/>
-          </a:prstGeom>
-          <a:solidFill>
-            <a:srgbClr val="E8EEF7"/>
-          </a:solidFill>
-          <a:ln>
-            <a:solidFill>
-              <a:srgbClr val="1F3A5F"/>
-            </a:solidFill>
-          </a:ln>
-        </p:spPr>
-        <p:style>
-          <a:lnRef idx="1">
-            <a:schemeClr val="accent1"/>
-          </a:lnRef>
-          <a:fillRef idx="3">
-            <a:schemeClr val="accent1"/>
-          </a:fillRef>
-          <a:effectRef idx="2">
-            <a:schemeClr val="accent1"/>
-          </a:effectRef>
-          <a:fontRef idx="minor">
-            <a:schemeClr val="lt1"/>
-          </a:fontRef>
-        </p:style>
-        <p:txBody>
-          <a:bodyPr rtlCol="0" anchor="ctr" lIns="45720" rIns="45720"/>
-          <a:lstStyle/>
-          <a:p>
-            <a:pPr algn="ctr"/>
-            <a:r>
-              <a:rPr sz="900">
-                <a:solidFill>
-                  <a:srgbClr val="1F3A5F"/>
-                </a:solidFill>
-              </a:rPr>
-              <a:t>Gram 3: Voyager, Category 4, Hoth</a:t>
-            </a:r>
-          </a:p>
-        </p:txBody>
-      </p:sp>
-      <p:sp>
-        <p:nvSpPr>
-          <p:cNvPr id="8" name="TextBox 7"/>
-          <p:cNvSpPr txBox="1"/>
-          <p:nvPr/>
-        </p:nvSpPr>
-        <p:spPr>
-          <a:xfrm>
-            <a:off x="4948732" y="1115568"/>
-            <a:ext cx="2200046" cy="1447800"/>
-          </a:xfrm>
-          <a:prstGeom prst="rect">
-            <a:avLst/>
-          </a:prstGeom>
-          <a:noFill/>
-        </p:spPr>
-        <p:txBody>
-          <a:bodyPr wrap="square">
-            <a:spAutoFit/>
-          </a:bodyPr>
-          <a:lstStyle/>
-          <a:p>
-            <a:r>
-              <a:rPr sz="800">
-                <a:hlinkClick r:id="rId11"/>
-              </a:rPr>
-              <a:t>Lofar 1</a:t>
-            </a:r>
-          </a:p>
-          <a:p>
-            <a:r>
-              <a:rPr sz="800">
-                <a:hlinkClick r:id="rId12"/>
-              </a:rPr>
-              <a:t>Lofar 2</a:t>
-            </a:r>
-          </a:p>
-          <a:p>
-            <a:r>
-              <a:rPr sz="800">
-                <a:hlinkClick r:id="rId13"/>
-              </a:rPr>
-              <a:t>Lofar 3</a:t>
-            </a:r>
-          </a:p>
-          <a:p>
-            <a:r>
-              <a:rPr sz="800">
-                <a:hlinkClick r:id="rId14"/>
-              </a:rPr>
-              <a:t>Lofar 4</a:t>
-            </a:r>
-          </a:p>
-        </p:txBody>
-      </p:sp>
-      <p:sp>
-        <p:nvSpPr>
-          <p:cNvPr id="9" name="Rounded Rectangle 8">
-            <a:hlinkClick r:id="rId15"/>
-          </p:cNvPr>
-          <p:cNvSpPr/>
-          <p:nvPr/>
-        </p:nvSpPr>
-        <p:spPr>
-          <a:xfrm>
-            <a:off x="7240219" y="731520"/>
-            <a:ext cx="2200046" cy="365760"/>
-          </a:xfrm>
-          <a:prstGeom prst="roundRect">
-            <a:avLst/>
-          </a:prstGeom>
-          <a:solidFill>
-            <a:srgbClr val="E8EEF7"/>
-          </a:solidFill>
-          <a:ln>
-            <a:solidFill>
-              <a:srgbClr val="1F3A5F"/>
-            </a:solidFill>
-          </a:ln>
-        </p:spPr>
-        <p:style>
-          <a:lnRef idx="1">
-            <a:schemeClr val="accent1"/>
-          </a:lnRef>
-          <a:fillRef idx="3">
-            <a:schemeClr val="accent1"/>
-          </a:fillRef>
-          <a:effectRef idx="2">
-            <a:schemeClr val="accent1"/>
-          </a:effectRef>
-          <a:fontRef idx="minor">
-            <a:schemeClr val="lt1"/>
-          </a:fontRef>
-        </p:style>
-        <p:txBody>
-          <a:bodyPr rtlCol="0" anchor="ctr" lIns="45720" rIns="45720"/>
-          <a:lstStyle/>
-          <a:p>
-            <a:pPr algn="ctr"/>
-            <a:r>
-              <a:rPr sz="900">
-                <a:solidFill>
-                  <a:srgbClr val="1F3A5F"/>
-                </a:solidFill>
-              </a:rPr>
-              <a:t>Gram 4: Venator-class contact bearing 274, codename Betazed</a:t>
-            </a:r>
-          </a:p>
-        </p:txBody>
-      </p:sp>
-      <p:sp>
-        <p:nvSpPr>
-          <p:cNvPr id="10" name="TextBox 9"/>
-          <p:cNvSpPr txBox="1"/>
-          <p:nvPr/>
-        </p:nvSpPr>
-        <p:spPr>
-          <a:xfrm>
-            <a:off x="7240219" y="1115568"/>
-            <a:ext cx="2200046" cy="1447800"/>
-          </a:xfrm>
-          <a:prstGeom prst="rect">
-            <a:avLst/>
-          </a:prstGeom>
-          <a:noFill/>
-        </p:spPr>
-        <p:txBody>
-          <a:bodyPr wrap="square">
-            <a:spAutoFit/>
-          </a:bodyPr>
-          <a:lstStyle/>
-          <a:p>
-            <a:r>
-              <a:rPr sz="800">
-                <a:hlinkClick r:id="rId16"/>
-              </a:rPr>
-              <a:t>Lofar 1</a:t>
-            </a:r>
-          </a:p>
-          <a:p>
-            <a:r>
-              <a:rPr sz="800">
-                <a:hlinkClick r:id="rId17"/>
-              </a:rPr>
-              <a:t>Lofar 2</a:t>
-            </a:r>
-          </a:p>
-          <a:p>
-            <a:r>
-              <a:rPr sz="800">
-                <a:hlinkClick r:id="rId18"/>
-              </a:rPr>
-              <a:t>Lofar 3</a:t>
-            </a:r>
-          </a:p>
-          <a:p>
-            <a:r>
-              <a:rPr sz="800">
-                <a:hlinkClick r:id="rId19"/>
-              </a:rPr>
-              <a:t>Lofar 4</a:t>
-            </a:r>
-          </a:p>
-        </p:txBody>
-      </p:sp>
-      <p:sp>
-        <p:nvSpPr>
-          <p:cNvPr id="11" name="Rounded Rectangle 10">
-            <a:hlinkClick r:id="rId20"/>
-          </p:cNvPr>
-          <p:cNvSpPr/>
-          <p:nvPr/>
-        </p:nvSpPr>
-        <p:spPr>
-          <a:xfrm>
-            <a:off x="9531705" y="731520"/>
-            <a:ext cx="2200046" cy="365760"/>
-          </a:xfrm>
-          <a:prstGeom prst="roundRect">
-            <a:avLst/>
-          </a:prstGeom>
-          <a:solidFill>
-            <a:srgbClr val="E8EEF7"/>
-          </a:solidFill>
-          <a:ln>
-            <a:solidFill>
-              <a:srgbClr val="1F3A5F"/>
-            </a:solidFill>
-          </a:ln>
-        </p:spPr>
-        <p:style>
-          <a:lnRef idx="1">
-            <a:schemeClr val="accent1"/>
-          </a:lnRef>
-          <a:fillRef idx="3">
-            <a:schemeClr val="accent1"/>
-          </a:fillRef>
-          <a:effectRef idx="2">
-            <a:schemeClr val="accent1"/>
-          </a:effectRef>
-          <a:fontRef idx="minor">
-            <a:schemeClr val="lt1"/>
-          </a:fontRef>
-        </p:style>
-        <p:txBody>
-          <a:bodyPr rtlCol="0" anchor="ctr" lIns="45720" rIns="45720"/>
-          <a:lstStyle/>
-          <a:p>
-            <a:pPr algn="ctr"/>
-            <a:r>
-              <a:rPr sz="900">
-                <a:solidFill>
-                  <a:srgbClr val="1F3A5F"/>
-                </a:solidFill>
-              </a:rPr>
-              <a:t>Gram 5: Defiant contact bearing 256, codename Tatooine</a:t>
-            </a:r>
-          </a:p>
-        </p:txBody>
-      </p:sp>
-      <p:sp>
-        <p:nvSpPr>
-          <p:cNvPr id="12" name="TextBox 11"/>
-          <p:cNvSpPr txBox="1"/>
-          <p:nvPr/>
-        </p:nvSpPr>
-        <p:spPr>
-          <a:xfrm>
-            <a:off x="9531705" y="1115568"/>
-            <a:ext cx="2200046" cy="1447800"/>
-          </a:xfrm>
-          <a:prstGeom prst="rect">
-            <a:avLst/>
-          </a:prstGeom>
-          <a:noFill/>
-        </p:spPr>
-        <p:txBody>
-          <a:bodyPr wrap="square">
-            <a:spAutoFit/>
-          </a:bodyPr>
-          <a:lstStyle/>
-          <a:p>
-            <a:r>
-              <a:rPr sz="800">
-                <a:hlinkClick r:id="rId21"/>
-              </a:rPr>
-              <a:t>Lofar 1</a:t>
-            </a:r>
-          </a:p>
-        </p:txBody>
-      </p:sp>
-      <p:sp>
-        <p:nvSpPr>
-          <p:cNvPr id="13" name="Rounded Rectangle 12">
-            <a:hlinkClick r:id="rId22"/>
-          </p:cNvPr>
-          <p:cNvSpPr/>
-          <p:nvPr/>
-        </p:nvSpPr>
-        <p:spPr>
-          <a:xfrm>
-            <a:off x="365760" y="2682240"/>
-            <a:ext cx="2200046" cy="365760"/>
-          </a:xfrm>
-          <a:prstGeom prst="roundRect">
-            <a:avLst/>
-          </a:prstGeom>
-          <a:solidFill>
-            <a:srgbClr val="E8EEF7"/>
-          </a:solidFill>
-          <a:ln>
-            <a:solidFill>
-              <a:srgbClr val="1F3A5F"/>
-            </a:solidFill>
-          </a:ln>
-        </p:spPr>
-        <p:style>
-          <a:lnRef idx="1">
-            <a:schemeClr val="accent1"/>
-          </a:lnRef>
-          <a:fillRef idx="3">
-            <a:schemeClr val="accent1"/>
-          </a:fillRef>
-          <a:effectRef idx="2">
-            <a:schemeClr val="accent1"/>
-          </a:effectRef>
-          <a:fontRef idx="minor">
-            <a:schemeClr val="lt1"/>
-          </a:fontRef>
-        </p:style>
-        <p:txBody>
-          <a:bodyPr rtlCol="0" anchor="ctr" lIns="45720" rIns="45720"/>
-          <a:lstStyle/>
-          <a:p>
-            <a:pPr algn="ctr"/>
-            <a:r>
-              <a:rPr sz="900">
-                <a:solidFill>
-                  <a:srgbClr val="1F3A5F"/>
-                </a:solidFill>
-              </a:rPr>
-              <a:t>Gram 6: Slave I contact bearing 174, codename Cardassia</a:t>
-            </a:r>
-          </a:p>
-        </p:txBody>
-      </p:sp>
-      <p:sp>
-        <p:nvSpPr>
-          <p:cNvPr id="14" name="TextBox 13"/>
-          <p:cNvSpPr txBox="1"/>
-          <p:nvPr/>
-        </p:nvSpPr>
-        <p:spPr>
-          <a:xfrm>
-            <a:off x="365760" y="3066288"/>
-            <a:ext cx="2200046" cy="1447800"/>
-          </a:xfrm>
-          <a:prstGeom prst="rect">
-            <a:avLst/>
-          </a:prstGeom>
-          <a:noFill/>
-        </p:spPr>
-        <p:txBody>
-          <a:bodyPr wrap="square">
-            <a:spAutoFit/>
-          </a:bodyPr>
-          <a:lstStyle/>
-          <a:p>
-            <a:r>
-              <a:rPr sz="800">
-                <a:hlinkClick r:id="rId23"/>
-              </a:rPr>
-              <a:t>Lofar 1</a:t>
-            </a:r>
-          </a:p>
-        </p:txBody>
-      </p:sp>
-      <p:sp>
-        <p:nvSpPr>
-          <p:cNvPr id="15" name="Rounded Rectangle 14">
-            <a:hlinkClick r:id="rId24"/>
-          </p:cNvPr>
-          <p:cNvSpPr/>
-          <p:nvPr/>
-        </p:nvSpPr>
-        <p:spPr>
-          <a:xfrm>
-            <a:off x="2657246" y="2682240"/>
-            <a:ext cx="2200046" cy="365760"/>
-          </a:xfrm>
-          <a:prstGeom prst="roundRect">
-            <a:avLst/>
-          </a:prstGeom>
-          <a:solidFill>
-            <a:srgbClr val="E8EEF7"/>
-          </a:solidFill>
-          <a:ln>
-            <a:solidFill>
-              <a:srgbClr val="1F3A5F"/>
-            </a:solidFill>
-          </a:ln>
-        </p:spPr>
-        <p:style>
-          <a:lnRef idx="1">
-            <a:schemeClr val="accent1"/>
-          </a:lnRef>
-          <a:fillRef idx="3">
-            <a:schemeClr val="accent1"/>
-          </a:fillRef>
-          <a:effectRef idx="2">
-            <a:schemeClr val="accent1"/>
-          </a:effectRef>
-          <a:fontRef idx="minor">
-            <a:schemeClr val="lt1"/>
-          </a:fontRef>
-        </p:style>
-        <p:txBody>
-          <a:bodyPr rtlCol="0" anchor="ctr" lIns="45720" rIns="45720"/>
-          <a:lstStyle/>
-          <a:p>
-            <a:pPr algn="ctr"/>
-            <a:r>
-              <a:rPr sz="900">
-                <a:solidFill>
-                  <a:srgbClr val="1F3A5F"/>
-                </a:solidFill>
-              </a:rPr>
-              <a:t>Gram 7: Ghost, Category 1, Trill</a:t>
-            </a:r>
-          </a:p>
-        </p:txBody>
-      </p:sp>
-      <p:sp>
-        <p:nvSpPr>
-          <p:cNvPr id="16" name="TextBox 15"/>
-          <p:cNvSpPr txBox="1"/>
-          <p:nvPr/>
-        </p:nvSpPr>
-        <p:spPr>
-          <a:xfrm>
-            <a:off x="2657246" y="3066288"/>
-            <a:ext cx="2200046" cy="1447800"/>
-          </a:xfrm>
-          <a:prstGeom prst="rect">
-            <a:avLst/>
-          </a:prstGeom>
-          <a:noFill/>
-        </p:spPr>
-        <p:txBody>
-          <a:bodyPr wrap="square">
-            <a:spAutoFit/>
-          </a:bodyPr>
-          <a:lstStyle/>
-          <a:p>
-            <a:r>
-              <a:rPr sz="800">
-                <a:hlinkClick r:id="rId25"/>
-              </a:rPr>
-              <a:t>Lofar 1</a:t>
-            </a:r>
-          </a:p>
-          <a:p>
-            <a:r>
-              <a:rPr sz="800">
-                <a:hlinkClick r:id="rId26"/>
-              </a:rPr>
-              <a:t>Lofar 2</a:t>
-            </a:r>
-          </a:p>
-          <a:p>
-            <a:r>
-              <a:rPr sz="800">
-                <a:hlinkClick r:id="rId27"/>
-              </a:rPr>
-              <a:t>Lofar 3</a:t>
-            </a:r>
-          </a:p>
-          <a:p>
-            <a:r>
-              <a:rPr sz="800">
-                <a:hlinkClick r:id="rId28"/>
-              </a:rPr>
-              <a:t>Lofar 4</a:t>
-            </a:r>
-          </a:p>
-        </p:txBody>
-      </p:sp>
-      <p:sp>
-        <p:nvSpPr>
-          <p:cNvPr id="17" name="Rounded Rectangle 16">
-            <a:hlinkClick r:id="rId29"/>
-          </p:cNvPr>
-          <p:cNvSpPr/>
-          <p:nvPr/>
-        </p:nvSpPr>
-        <p:spPr>
-          <a:xfrm>
-            <a:off x="4948732" y="2682240"/>
-            <a:ext cx="2200046" cy="365760"/>
-          </a:xfrm>
-          <a:prstGeom prst="roundRect">
-            <a:avLst/>
-          </a:prstGeom>
-          <a:solidFill>
-            <a:srgbClr val="E8EEF7"/>
-          </a:solidFill>
-          <a:ln>
-            <a:solidFill>
-              <a:srgbClr val="1F3A5F"/>
-            </a:solidFill>
-          </a:ln>
-        </p:spPr>
-        <p:style>
-          <a:lnRef idx="1">
-            <a:schemeClr val="accent1"/>
-          </a:lnRef>
-          <a:fillRef idx="3">
-            <a:schemeClr val="accent1"/>
-          </a:fillRef>
-          <a:effectRef idx="2">
-            <a:schemeClr val="accent1"/>
-          </a:effectRef>
-          <a:fontRef idx="minor">
-            <a:schemeClr val="lt1"/>
-          </a:fontRef>
-        </p:style>
-        <p:txBody>
-          <a:bodyPr rtlCol="0" anchor="ctr" lIns="45720" rIns="45720"/>
-          <a:lstStyle/>
-          <a:p>
-            <a:pPr algn="ctr"/>
-            <a:r>
-              <a:rPr sz="900">
-                <a:solidFill>
-                  <a:srgbClr val="1F3A5F"/>
-                </a:solidFill>
-              </a:rPr>
-              <a:t>Gram 8: A-wing contact bearing 061, codename Romulus</a:t>
-            </a:r>
-          </a:p>
-        </p:txBody>
-      </p:sp>
-      <p:sp>
-        <p:nvSpPr>
-          <p:cNvPr id="18" name="TextBox 17"/>
-          <p:cNvSpPr txBox="1"/>
-          <p:nvPr/>
-        </p:nvSpPr>
-        <p:spPr>
-          <a:xfrm>
-            <a:off x="4948732" y="3066288"/>
-            <a:ext cx="2200046" cy="1447800"/>
-          </a:xfrm>
-          <a:prstGeom prst="rect">
-            <a:avLst/>
-          </a:prstGeom>
-          <a:noFill/>
-        </p:spPr>
-        <p:txBody>
-          <a:bodyPr wrap="square">
-            <a:spAutoFit/>
-          </a:bodyPr>
-          <a:lstStyle/>
-          <a:p>
-            <a:r>
-              <a:rPr sz="800">
-                <a:hlinkClick r:id="rId30"/>
-              </a:rPr>
-              <a:t>Lofar 1</a:t>
-            </a:r>
-          </a:p>
-          <a:p>
-            <a:r>
-              <a:rPr sz="800">
-                <a:hlinkClick r:id="rId31"/>
-              </a:rPr>
-              <a:t>Lofar 2</a:t>
-            </a:r>
-          </a:p>
-          <a:p>
-            <a:r>
-              <a:rPr sz="800">
-                <a:hlinkClick r:id="rId32"/>
-              </a:rPr>
-              <a:t>Lofar 3</a:t>
-            </a:r>
-          </a:p>
-        </p:txBody>
-      </p:sp>
-      <p:sp>
-        <p:nvSpPr>
-          <p:cNvPr id="19" name="Rounded Rectangle 18">
-            <a:hlinkClick r:id="rId33"/>
-          </p:cNvPr>
-          <p:cNvSpPr/>
-          <p:nvPr/>
-        </p:nvSpPr>
-        <p:spPr>
-          <a:xfrm>
-            <a:off x="7240219" y="2682240"/>
-            <a:ext cx="2200046" cy="365760"/>
-          </a:xfrm>
-          <a:prstGeom prst="roundRect">
-            <a:avLst/>
-          </a:prstGeom>
-          <a:solidFill>
-            <a:srgbClr val="E8EEF7"/>
-          </a:solidFill>
-          <a:ln>
-            <a:solidFill>
-              <a:srgbClr val="1F3A5F"/>
-            </a:solidFill>
-          </a:ln>
-        </p:spPr>
-        <p:style>
-          <a:lnRef idx="1">
-            <a:schemeClr val="accent1"/>
-          </a:lnRef>
-          <a:fillRef idx="3">
-            <a:schemeClr val="accent1"/>
-          </a:fillRef>
-          <a:effectRef idx="2">
-            <a:schemeClr val="accent1"/>
-          </a:effectRef>
-          <a:fontRef idx="minor">
-            <a:schemeClr val="lt1"/>
-          </a:fontRef>
-        </p:style>
-        <p:txBody>
-          <a:bodyPr rtlCol="0" anchor="ctr" lIns="45720" rIns="45720"/>
-          <a:lstStyle/>
-          <a:p>
-            <a:pPr algn="ctr"/>
-            <a:r>
-              <a:rPr sz="900">
-                <a:solidFill>
-                  <a:srgbClr val="1F3A5F"/>
-                </a:solidFill>
-              </a:rPr>
-              <a:t>Gram 10: Razor Crest, Category 4, Kobol</a:t>
-            </a:r>
-          </a:p>
-        </p:txBody>
-      </p:sp>
-      <p:sp>
-        <p:nvSpPr>
-          <p:cNvPr id="20" name="TextBox 19"/>
-          <p:cNvSpPr txBox="1"/>
-          <p:nvPr/>
-        </p:nvSpPr>
-        <p:spPr>
-          <a:xfrm>
-            <a:off x="7240219" y="3066288"/>
-            <a:ext cx="2200046" cy="1447800"/>
-          </a:xfrm>
-          <a:prstGeom prst="rect">
-            <a:avLst/>
-          </a:prstGeom>
-          <a:noFill/>
-        </p:spPr>
-        <p:txBody>
-          <a:bodyPr wrap="square">
-            <a:spAutoFit/>
-          </a:bodyPr>
-          <a:lstStyle/>
-          <a:p>
-            <a:r>
-              <a:rPr sz="800">
-                <a:hlinkClick r:id="rId34"/>
-              </a:rPr>
-              <a:t>Lofar 1</a:t>
-            </a:r>
-          </a:p>
-          <a:p>
-            <a:r>
-              <a:rPr sz="800">
-                <a:hlinkClick r:id="rId35"/>
-              </a:rPr>
-              <a:t>Lofar 2</a:t>
-            </a:r>
-          </a:p>
-          <a:p>
-            <a:r>
-              <a:rPr sz="800">
-                <a:hlinkClick r:id="rId36"/>
-              </a:rPr>
-              <a:t>Lofar 3</a:t>
-            </a:r>
-          </a:p>
-        </p:txBody>
-      </p:sp>
-      <p:sp>
-        <p:nvSpPr>
-          <p:cNvPr id="21" name="Rounded Rectangle 20">
-            <a:hlinkClick r:id="rId37"/>
-          </p:cNvPr>
-          <p:cNvSpPr/>
-          <p:nvPr/>
-        </p:nvSpPr>
-        <p:spPr>
-          <a:xfrm>
-            <a:off x="9531705" y="2682240"/>
-            <a:ext cx="2200046" cy="365760"/>
-          </a:xfrm>
-          <a:prstGeom prst="roundRect">
-            <a:avLst/>
-          </a:prstGeom>
-          <a:solidFill>
-            <a:srgbClr val="E8EEF7"/>
-          </a:solidFill>
-          <a:ln>
-            <a:solidFill>
-              <a:srgbClr val="1F3A5F"/>
-            </a:solidFill>
-          </a:ln>
-        </p:spPr>
-        <p:style>
-          <a:lnRef idx="1">
-            <a:schemeClr val="accent1"/>
-          </a:lnRef>
-          <a:fillRef idx="3">
-            <a:schemeClr val="accent1"/>
-          </a:fillRef>
-          <a:effectRef idx="2">
-            <a:schemeClr val="accent1"/>
-          </a:effectRef>
-          <a:fontRef idx="minor">
-            <a:schemeClr val="lt1"/>
-          </a:fontRef>
-        </p:style>
-        <p:txBody>
-          <a:bodyPr rtlCol="0" anchor="ctr" lIns="45720" rIns="45720"/>
-          <a:lstStyle/>
-          <a:p>
-            <a:pPr algn="ctr"/>
-            <a:r>
-              <a:rPr sz="900">
-                <a:solidFill>
-                  <a:srgbClr val="1F3A5F"/>
-                </a:solidFill>
-              </a:rPr>
-              <a:t>Gram 11: Lambda Shuttle, Category 4, Cardassia</a:t>
-            </a:r>
-          </a:p>
-        </p:txBody>
-      </p:sp>
-      <p:sp>
-        <p:nvSpPr>
-          <p:cNvPr id="22" name="TextBox 21"/>
-          <p:cNvSpPr txBox="1"/>
-          <p:nvPr/>
-        </p:nvSpPr>
-        <p:spPr>
-          <a:xfrm>
-            <a:off x="9531705" y="3066288"/>
-            <a:ext cx="2200046" cy="1447800"/>
-          </a:xfrm>
-          <a:prstGeom prst="rect">
-            <a:avLst/>
-          </a:prstGeom>
-          <a:noFill/>
-        </p:spPr>
-        <p:txBody>
-          <a:bodyPr wrap="square">
-            <a:spAutoFit/>
-          </a:bodyPr>
-          <a:lstStyle/>
-          <a:p>
-            <a:r>
-              <a:rPr sz="800">
-                <a:hlinkClick r:id="rId38"/>
-              </a:rPr>
-              <a:t>Lofar 1</a:t>
-            </a:r>
-          </a:p>
-          <a:p>
-            <a:r>
-              <a:rPr sz="800">
-                <a:hlinkClick r:id="rId39"/>
-              </a:rPr>
-              <a:t>Lofar 2</a:t>
-            </a:r>
-          </a:p>
-        </p:txBody>
-      </p:sp>
-      <p:sp>
-        <p:nvSpPr>
-          <p:cNvPr id="23" name="Rounded Rectangle 22">
-            <a:hlinkClick r:id="rId40"/>
-          </p:cNvPr>
-          <p:cNvSpPr/>
-          <p:nvPr/>
-        </p:nvSpPr>
-        <p:spPr>
-          <a:xfrm>
-            <a:off x="365760" y="4632960"/>
-            <a:ext cx="2200046" cy="365760"/>
-          </a:xfrm>
-          <a:prstGeom prst="roundRect">
-            <a:avLst/>
-          </a:prstGeom>
-          <a:solidFill>
-            <a:srgbClr val="E8EEF7"/>
-          </a:solidFill>
-          <a:ln>
-            <a:solidFill>
-              <a:srgbClr val="1F3A5F"/>
-            </a:solidFill>
-          </a:ln>
-        </p:spPr>
-        <p:style>
-          <a:lnRef idx="1">
-            <a:schemeClr val="accent1"/>
-          </a:lnRef>
-          <a:fillRef idx="3">
-            <a:schemeClr val="accent1"/>
-          </a:fillRef>
-          <a:effectRef idx="2">
-            <a:schemeClr val="accent1"/>
-          </a:effectRef>
-          <a:fontRef idx="minor">
-            <a:schemeClr val="lt1"/>
-          </a:fontRef>
-        </p:style>
-        <p:txBody>
-          <a:bodyPr rtlCol="0" anchor="ctr" lIns="45720" rIns="45720"/>
-          <a:lstStyle/>
-          <a:p>
-            <a:pPr algn="ctr"/>
-            <a:r>
-              <a:rPr sz="900">
-                <a:solidFill>
-                  <a:srgbClr val="1F3A5F"/>
-                </a:solidFill>
-              </a:rPr>
-              <a:t>Gram 12: Constitution-class contact bearing 225, codename Tatooine</a:t>
-            </a:r>
-          </a:p>
-        </p:txBody>
-      </p:sp>
-      <p:sp>
-        <p:nvSpPr>
-          <p:cNvPr id="24" name="TextBox 23"/>
-          <p:cNvSpPr txBox="1"/>
-          <p:nvPr/>
-        </p:nvSpPr>
-        <p:spPr>
-          <a:xfrm>
-            <a:off x="365760" y="5017008"/>
-            <a:ext cx="2200046" cy="1447800"/>
-          </a:xfrm>
-          <a:prstGeom prst="rect">
-            <a:avLst/>
-          </a:prstGeom>
-          <a:noFill/>
-        </p:spPr>
-        <p:txBody>
-          <a:bodyPr wrap="square">
-            <a:spAutoFit/>
-          </a:bodyPr>
-          <a:lstStyle/>
-          <a:p>
-            <a:r>
-              <a:rPr sz="800">
-                <a:hlinkClick r:id="rId41"/>
-              </a:rPr>
-              <a:t>Lofar 1</a:t>
-            </a:r>
-          </a:p>
-          <a:p>
-            <a:r>
-              <a:rPr sz="800">
-                <a:hlinkClick r:id="rId42"/>
-              </a:rPr>
-              <a:t>Lofar 2</a:t>
-            </a:r>
-          </a:p>
-          <a:p>
-            <a:r>
-              <a:rPr sz="800">
-                <a:hlinkClick r:id="rId43"/>
-              </a:rPr>
-              <a:t>Lofar 3</a:t>
-            </a:r>
-          </a:p>
-        </p:txBody>
-      </p:sp>
-      <p:sp>
-        <p:nvSpPr>
-          <p:cNvPr id="25" name="Rounded Rectangle 24">
-            <a:hlinkClick r:id="rId44"/>
-          </p:cNvPr>
-          <p:cNvSpPr/>
-          <p:nvPr/>
-        </p:nvSpPr>
-        <p:spPr>
-          <a:xfrm>
-            <a:off x="2657246" y="4632960"/>
-            <a:ext cx="2200046" cy="365760"/>
-          </a:xfrm>
-          <a:prstGeom prst="roundRect">
-            <a:avLst/>
-          </a:prstGeom>
-          <a:solidFill>
-            <a:srgbClr val="E8EEF7"/>
-          </a:solidFill>
-          <a:ln>
-            <a:solidFill>
-              <a:srgbClr val="1F3A5F"/>
-            </a:solidFill>
-          </a:ln>
-        </p:spPr>
-        <p:style>
-          <a:lnRef idx="1">
-            <a:schemeClr val="accent1"/>
-          </a:lnRef>
-          <a:fillRef idx="3">
-            <a:schemeClr val="accent1"/>
-          </a:fillRef>
-          <a:effectRef idx="2">
-            <a:schemeClr val="accent1"/>
-          </a:effectRef>
-          <a:fontRef idx="minor">
-            <a:schemeClr val="lt1"/>
-          </a:fontRef>
-        </p:style>
-        <p:txBody>
-          <a:bodyPr rtlCol="0" anchor="ctr" lIns="45720" rIns="45720"/>
-          <a:lstStyle/>
-          <a:p>
-            <a:pPr algn="ctr"/>
-            <a:r>
-              <a:rPr sz="900">
-                <a:solidFill>
-                  <a:srgbClr val="1F3A5F"/>
-                </a:solidFill>
-              </a:rPr>
-              <a:t>Gram 13: Slave I contact bearing 078, codename Kobol</a:t>
-            </a:r>
-          </a:p>
-        </p:txBody>
-      </p:sp>
-      <p:sp>
-        <p:nvSpPr>
-          <p:cNvPr id="26" name="TextBox 25"/>
-          <p:cNvSpPr txBox="1"/>
-          <p:nvPr/>
-        </p:nvSpPr>
-        <p:spPr>
-          <a:xfrm>
-            <a:off x="2657246" y="5017008"/>
-            <a:ext cx="2200046" cy="1447800"/>
-          </a:xfrm>
-          <a:prstGeom prst="rect">
-            <a:avLst/>
-          </a:prstGeom>
-          <a:noFill/>
-        </p:spPr>
-        <p:txBody>
-          <a:bodyPr wrap="square">
-            <a:spAutoFit/>
-          </a:bodyPr>
-          <a:lstStyle/>
-          <a:p>
-            <a:r>
-              <a:rPr sz="800">
-                <a:hlinkClick r:id="rId45"/>
-              </a:rPr>
-              <a:t>Lofar 1</a:t>
-            </a:r>
-          </a:p>
-        </p:txBody>
-      </p:sp>
-      <p:sp>
-        <p:nvSpPr>
-          <p:cNvPr id="27" name="Rounded Rectangle 26">
-            <a:hlinkClick r:id="rId46"/>
-          </p:cNvPr>
-          <p:cNvSpPr/>
-          <p:nvPr/>
-        </p:nvSpPr>
-        <p:spPr>
-          <a:xfrm>
-            <a:off x="4948732" y="4632960"/>
-            <a:ext cx="2200046" cy="365760"/>
-          </a:xfrm>
-          <a:prstGeom prst="roundRect">
-            <a:avLst/>
-          </a:prstGeom>
-          <a:solidFill>
-            <a:srgbClr val="E8EEF7"/>
-          </a:solidFill>
-          <a:ln>
-            <a:solidFill>
-              <a:srgbClr val="1F3A5F"/>
-            </a:solidFill>
-          </a:ln>
-        </p:spPr>
-        <p:style>
-          <a:lnRef idx="1">
-            <a:schemeClr val="accent1"/>
-          </a:lnRef>
-          <a:fillRef idx="3">
-            <a:schemeClr val="accent1"/>
-          </a:fillRef>
-          <a:effectRef idx="2">
-            <a:schemeClr val="accent1"/>
-          </a:effectRef>
-          <a:fontRef idx="minor">
-            <a:schemeClr val="lt1"/>
-          </a:fontRef>
-        </p:style>
-        <p:txBody>
-          <a:bodyPr rtlCol="0" anchor="ctr" lIns="45720" rIns="45720"/>
-          <a:lstStyle/>
-          <a:p>
-            <a:pPr algn="ctr"/>
-            <a:r>
-              <a:rPr sz="900">
-                <a:solidFill>
-                  <a:srgbClr val="1F3A5F"/>
-                </a:solidFill>
-              </a:rPr>
-              <a:t>Gram 14: Y-wing, Category 1, Tantive</a:t>
-            </a:r>
-          </a:p>
-        </p:txBody>
-      </p:sp>
-      <p:sp>
-        <p:nvSpPr>
-          <p:cNvPr id="28" name="TextBox 27"/>
-          <p:cNvSpPr txBox="1"/>
-          <p:nvPr/>
-        </p:nvSpPr>
-        <p:spPr>
-          <a:xfrm>
-            <a:off x="4948732" y="5017008"/>
-            <a:ext cx="2200046" cy="1447800"/>
-          </a:xfrm>
-          <a:prstGeom prst="rect">
-            <a:avLst/>
-          </a:prstGeom>
-          <a:noFill/>
-        </p:spPr>
-        <p:txBody>
-          <a:bodyPr wrap="square">
-            <a:spAutoFit/>
-          </a:bodyPr>
-          <a:lstStyle/>
-          <a:p>
-            <a:r>
-              <a:rPr sz="800">
-                <a:hlinkClick r:id="rId47"/>
-              </a:rPr>
-              <a:t>Lofar 1</a:t>
-            </a:r>
-          </a:p>
-          <a:p>
-            <a:r>
-              <a:rPr sz="800">
-                <a:hlinkClick r:id="rId48"/>
-              </a:rPr>
-              <a:t>Lofar 2</a:t>
-            </a:r>
-          </a:p>
-        </p:txBody>
-      </p:sp>
-      <p:sp>
-        <p:nvSpPr>
-          <p:cNvPr id="29" name="Rounded Rectangle 28">
-            <a:hlinkClick r:id="rId49"/>
-          </p:cNvPr>
-          <p:cNvSpPr/>
-          <p:nvPr/>
-        </p:nvSpPr>
-        <p:spPr>
-          <a:xfrm>
-            <a:off x="7240219" y="4632960"/>
-            <a:ext cx="2200046" cy="365760"/>
-          </a:xfrm>
-          <a:prstGeom prst="roundRect">
-            <a:avLst/>
-          </a:prstGeom>
-          <a:solidFill>
-            <a:srgbClr val="E8EEF7"/>
-          </a:solidFill>
-          <a:ln>
-            <a:solidFill>
-              <a:srgbClr val="1F3A5F"/>
-            </a:solidFill>
-          </a:ln>
-        </p:spPr>
-        <p:style>
-          <a:lnRef idx="1">
-            <a:schemeClr val="accent1"/>
-          </a:lnRef>
-          <a:fillRef idx="3">
-            <a:schemeClr val="accent1"/>
-          </a:fillRef>
-          <a:effectRef idx="2">
-            <a:schemeClr val="accent1"/>
-          </a:effectRef>
-          <a:fontRef idx="minor">
-            <a:schemeClr val="lt1"/>
-          </a:fontRef>
-        </p:style>
-        <p:txBody>
-          <a:bodyPr rtlCol="0" anchor="ctr" lIns="45720" rIns="45720"/>
-          <a:lstStyle/>
-          <a:p>
-            <a:pPr algn="ctr"/>
-            <a:r>
-              <a:rPr sz="900">
-                <a:solidFill>
-                  <a:srgbClr val="1F3A5F"/>
-                </a:solidFill>
-              </a:rPr>
-              <a:t>Gram 16: Reliant, Category 1, Betazed</a:t>
-            </a:r>
-          </a:p>
-        </p:txBody>
-      </p:sp>
-      <p:sp>
-        <p:nvSpPr>
-          <p:cNvPr id="30" name="TextBox 29"/>
-          <p:cNvSpPr txBox="1"/>
-          <p:nvPr/>
-        </p:nvSpPr>
-        <p:spPr>
-          <a:xfrm>
-            <a:off x="7240219" y="5017008"/>
-            <a:ext cx="2200046" cy="1447800"/>
-          </a:xfrm>
-          <a:prstGeom prst="rect">
-            <a:avLst/>
-          </a:prstGeom>
-          <a:noFill/>
-        </p:spPr>
-        <p:txBody>
-          <a:bodyPr wrap="square">
-            <a:spAutoFit/>
-          </a:bodyPr>
-          <a:lstStyle/>
-          <a:p>
-            <a:r>
-              <a:rPr sz="800">
-                <a:hlinkClick r:id="rId50"/>
-              </a:rPr>
-              <a:t>Lofar 1</a:t>
-            </a:r>
-          </a:p>
-          <a:p>
-            <a:r>
-              <a:rPr sz="800">
-                <a:hlinkClick r:id="rId51"/>
-              </a:rPr>
-              <a:t>Lofar 2</a:t>
-            </a:r>
-          </a:p>
-          <a:p>
-            <a:r>
-              <a:rPr sz="800">
-                <a:hlinkClick r:id="rId52"/>
-              </a:rPr>
-              <a:t>Lofar 3</a:t>
-            </a:r>
-          </a:p>
-        </p:txBody>
-      </p:sp>
-      <p:sp>
-        <p:nvSpPr>
-          <p:cNvPr id="31" name="Rounded Rectangle 30">
-            <a:hlinkClick r:id="rId53"/>
-          </p:cNvPr>
-          <p:cNvSpPr/>
-          <p:nvPr/>
-        </p:nvSpPr>
-        <p:spPr>
-          <a:xfrm>
-            <a:off x="9531705" y="4632960"/>
-            <a:ext cx="2200046" cy="365760"/>
-          </a:xfrm>
-          <a:prstGeom prst="roundRect">
-            <a:avLst/>
-          </a:prstGeom>
-          <a:solidFill>
-            <a:srgbClr val="E8EEF7"/>
-          </a:solidFill>
-          <a:ln>
-            <a:solidFill>
-              <a:srgbClr val="1F3A5F"/>
-            </a:solidFill>
-          </a:ln>
-        </p:spPr>
-        <p:style>
-          <a:lnRef idx="1">
-            <a:schemeClr val="accent1"/>
-          </a:lnRef>
-          <a:fillRef idx="3">
-            <a:schemeClr val="accent1"/>
-          </a:fillRef>
-          <a:effectRef idx="2">
-            <a:schemeClr val="accent1"/>
-          </a:effectRef>
-          <a:fontRef idx="minor">
-            <a:schemeClr val="lt1"/>
-          </a:fontRef>
-        </p:style>
-        <p:txBody>
-          <a:bodyPr rtlCol="0" anchor="ctr" lIns="45720" rIns="45720"/>
-          <a:lstStyle/>
-          <a:p>
-            <a:pPr algn="ctr"/>
-            <a:r>
-              <a:rPr sz="900">
-                <a:solidFill>
-                  <a:srgbClr val="1F3A5F"/>
-                </a:solidFill>
-              </a:rPr>
-              <a:t>Gram 18: Devastator, Category 4, Vulcan</a:t>
-            </a:r>
-          </a:p>
-        </p:txBody>
-      </p:sp>
-      <p:sp>
-        <p:nvSpPr>
-          <p:cNvPr id="32" name="TextBox 31"/>
-          <p:cNvSpPr txBox="1"/>
-          <p:nvPr/>
-        </p:nvSpPr>
-        <p:spPr>
-          <a:xfrm>
-            <a:off x="9531705" y="5017008"/>
-            <a:ext cx="2200046" cy="1447800"/>
-          </a:xfrm>
-          <a:prstGeom prst="rect">
-            <a:avLst/>
-          </a:prstGeom>
-          <a:noFill/>
-        </p:spPr>
-        <p:txBody>
-          <a:bodyPr wrap="square">
-            <a:spAutoFit/>
-          </a:bodyPr>
-          <a:lstStyle/>
-          <a:p>
-            <a:r>
-              <a:rPr sz="800">
-                <a:hlinkClick r:id="rId54"/>
-              </a:rPr>
-              <a:t>Lofar 1</a:t>
-            </a:r>
-          </a:p>
-          <a:p>
-            <a:r>
-              <a:rPr sz="800">
-                <a:hlinkClick r:id="rId55"/>
-              </a:rPr>
-              <a:t>Lofar 2</a:t>
-            </a:r>
-          </a:p>
-          <a:p>
-            <a:r>
-              <a:rPr sz="800">
-                <a:hlinkClick r:id="rId56"/>
-              </a:rPr>
-              <a:t>Lofar 3</a:t>
+              <a:t>Instructor Version</a:t>
             </a:r>
           </a:p>
         </p:txBody>
@@ -4694,7 +3223,7 @@
                   <a:srgbClr val="FFFFFF"/>
                 </a:solidFill>
               </a:rPr>
-              <a:t>Instructor Progress Test 3 Grams No FR — Page 2 of 2</a:t>
+              <a:t>Instructor Progress Test 3 Grams No FR — Page 1 of 2</a:t>
             </a:r>
           </a:p>
         </p:txBody>
@@ -4749,7 +3278,7 @@
                   <a:srgbClr val="1F3A5F"/>
                 </a:solidFill>
               </a:rPr>
-              <a:t>Gram 19: Intrepid-class contact bearing 256, codename Caprica</a:t>
+              <a:t>Gram 1: Imperial-class, Category 1, Coruscant</a:t>
             </a:r>
           </a:p>
         </p:txBody>
@@ -4791,28 +3320,12 @@
               <a:t>Lofar 2</a:t>
             </a:r>
           </a:p>
-          <a:p>
-            <a:r>
-              <a:rPr sz="800">
-                <a:hlinkClick r:id="rId5"/>
-              </a:rPr>
-              <a:t>Lofar 3</a:t>
-            </a:r>
-          </a:p>
-          <a:p>
-            <a:r>
-              <a:rPr sz="800">
-                <a:hlinkClick r:id="rId6"/>
-              </a:rPr>
-              <a:t>Lofar 4</a:t>
-            </a:r>
-          </a:p>
         </p:txBody>
       </p:sp>
       <p:sp>
         <p:nvSpPr>
           <p:cNvPr id="5" name="Rounded Rectangle 4">
-            <a:hlinkClick r:id="rId7"/>
+            <a:hlinkClick r:id="rId5"/>
           </p:cNvPr>
           <p:cNvSpPr/>
           <p:nvPr/>
@@ -4859,7 +3372,7 @@
                   <a:srgbClr val="1F3A5F"/>
                 </a:solidFill>
               </a:rPr>
-              <a:t>Gram 20: Millennium Falcon, Category 1, Bajor</a:t>
+              <a:t>Gram 2: Acclamator-class, Category 3, Bespin</a:t>
             </a:r>
           </a:p>
         </p:txBody>
@@ -4888,9 +3401,25 @@
           <a:p>
             <a:r>
               <a:rPr sz="800">
+                <a:hlinkClick r:id="rId6"/>
+              </a:rPr>
+              <a:t>Lofar 1</a:t>
+            </a:r>
+          </a:p>
+          <a:p>
+            <a:r>
+              <a:rPr sz="800">
+                <a:hlinkClick r:id="rId7"/>
+              </a:rPr>
+              <a:t>Lofar 2</a:t>
+            </a:r>
+          </a:p>
+          <a:p>
+            <a:r>
+              <a:rPr sz="800">
                 <a:hlinkClick r:id="rId8"/>
               </a:rPr>
-              <a:t>Lofar 1</a:t>
+              <a:t>Lofar 3</a:t>
             </a:r>
           </a:p>
           <a:p>
@@ -4898,22 +3427,6 @@
               <a:rPr sz="800">
                 <a:hlinkClick r:id="rId9"/>
               </a:rPr>
-              <a:t>Lofar 2</a:t>
-            </a:r>
-          </a:p>
-          <a:p>
-            <a:r>
-              <a:rPr sz="800">
-                <a:hlinkClick r:id="rId10"/>
-              </a:rPr>
-              <a:t>Lofar 3</a:t>
-            </a:r>
-          </a:p>
-          <a:p>
-            <a:r>
-              <a:rPr sz="800">
-                <a:hlinkClick r:id="rId11"/>
-              </a:rPr>
               <a:t>Lofar 4</a:t>
             </a:r>
           </a:p>
@@ -4922,7 +3435,7 @@
       <p:sp>
         <p:nvSpPr>
           <p:cNvPr id="7" name="Rounded Rectangle 6">
-            <a:hlinkClick r:id="rId12"/>
+            <a:hlinkClick r:id="rId10"/>
           </p:cNvPr>
           <p:cNvSpPr/>
           <p:nvPr/>
@@ -4969,7 +3482,7 @@
                   <a:srgbClr val="1F3A5F"/>
                 </a:solidFill>
               </a:rPr>
-              <a:t>Gram 21: Enterprise, Category 1, Betazed</a:t>
+              <a:t>Gram 3: Voyager, Category 4, Hoth</a:t>
             </a:r>
           </a:p>
         </p:txBody>
@@ -4998,9 +3511,33 @@
           <a:p>
             <a:r>
               <a:rPr sz="800">
+                <a:hlinkClick r:id="rId11"/>
+              </a:rPr>
+              <a:t>Lofar 1</a:t>
+            </a:r>
+          </a:p>
+          <a:p>
+            <a:r>
+              <a:rPr sz="800">
+                <a:hlinkClick r:id="rId12"/>
+              </a:rPr>
+              <a:t>Lofar 2</a:t>
+            </a:r>
+          </a:p>
+          <a:p>
+            <a:r>
+              <a:rPr sz="800">
                 <a:hlinkClick r:id="rId13"/>
               </a:rPr>
-              <a:t>Lofar 1</a:t>
+              <a:t>Lofar 3</a:t>
+            </a:r>
+          </a:p>
+          <a:p>
+            <a:r>
+              <a:rPr sz="800">
+                <a:hlinkClick r:id="rId14"/>
+              </a:rPr>
+              <a:t>Lofar 4</a:t>
             </a:r>
           </a:p>
         </p:txBody>
@@ -5008,7 +3545,7 @@
       <p:sp>
         <p:nvSpPr>
           <p:cNvPr id="9" name="Rounded Rectangle 8">
-            <a:hlinkClick r:id="rId14"/>
+            <a:hlinkClick r:id="rId15"/>
           </p:cNvPr>
           <p:cNvSpPr/>
           <p:nvPr/>
@@ -5055,7 +3592,7 @@
                   <a:srgbClr val="1F3A5F"/>
                 </a:solidFill>
               </a:rPr>
-              <a:t>Gram 23: Akira-class, Category 4, Betazed</a:t>
+              <a:t>Gram 4: Venator-class contact bearing 274, codename Betazed</a:t>
             </a:r>
           </a:p>
         </p:txBody>
@@ -5084,7 +3621,7 @@
           <a:p>
             <a:r>
               <a:rPr sz="800">
-                <a:hlinkClick r:id="rId15"/>
+                <a:hlinkClick r:id="rId16"/>
               </a:rPr>
               <a:t>Lofar 1</a:t>
             </a:r>
@@ -5092,7 +3629,7 @@
           <a:p>
             <a:r>
               <a:rPr sz="800">
-                <a:hlinkClick r:id="rId16"/>
+                <a:hlinkClick r:id="rId17"/>
               </a:rPr>
               <a:t>Lofar 2</a:t>
             </a:r>
@@ -5100,7 +3637,7 @@
           <a:p>
             <a:r>
               <a:rPr sz="800">
-                <a:hlinkClick r:id="rId17"/>
+                <a:hlinkClick r:id="rId18"/>
               </a:rPr>
               <a:t>Lofar 3</a:t>
             </a:r>
@@ -5108,7 +3645,7 @@
           <a:p>
             <a:r>
               <a:rPr sz="800">
-                <a:hlinkClick r:id="rId18"/>
+                <a:hlinkClick r:id="rId19"/>
               </a:rPr>
               <a:t>Lofar 4</a:t>
             </a:r>
@@ -5118,7 +3655,7 @@
       <p:sp>
         <p:nvSpPr>
           <p:cNvPr id="11" name="Rounded Rectangle 10">
-            <a:hlinkClick r:id="rId19"/>
+            <a:hlinkClick r:id="rId20"/>
           </p:cNvPr>
           <p:cNvSpPr/>
           <p:nvPr/>
@@ -5165,7 +3702,7 @@
                   <a:srgbClr val="1F3A5F"/>
                 </a:solidFill>
               </a:rPr>
-              <a:t>Gram 24: Galaxy-class, Category 3, Betazed</a:t>
+              <a:t>Gram 5: Defiant contact bearing 256, codename Tatooine</a:t>
             </a:r>
           </a:p>
         </p:txBody>
@@ -5194,17 +3731,9 @@
           <a:p>
             <a:r>
               <a:rPr sz="800">
-                <a:hlinkClick r:id="rId20"/>
+                <a:hlinkClick r:id="rId21"/>
               </a:rPr>
               <a:t>Lofar 1</a:t>
-            </a:r>
-          </a:p>
-          <a:p>
-            <a:r>
-              <a:rPr sz="800">
-                <a:hlinkClick r:id="rId21"/>
-              </a:rPr>
-              <a:t>Lofar 2</a:t>
             </a:r>
           </a:p>
         </p:txBody>
@@ -5259,7 +3788,7 @@
                   <a:srgbClr val="1F3A5F"/>
                 </a:solidFill>
               </a:rPr>
-              <a:t>Gram 25: Corellian Corvette, Category 4, Dagobah</a:t>
+              <a:t>Gram 6: Slave I contact bearing 174, codename Cardassia</a:t>
             </a:r>
           </a:p>
         </p:txBody>
@@ -5345,7 +3874,7 @@
                   <a:srgbClr val="1F3A5F"/>
                 </a:solidFill>
               </a:rPr>
-              <a:t>Gram 26: Reliant, Category 4, Risa</a:t>
+              <a:t>Gram 7: Ghost, Category 1, Trill</a:t>
             </a:r>
           </a:p>
         </p:txBody>
@@ -5455,7 +3984,7 @@
                   <a:srgbClr val="1F3A5F"/>
                 </a:solidFill>
               </a:rPr>
-              <a:t>Gram 28: Intrepid-class contact bearing 279, codename Vulcan</a:t>
+              <a:t>Gram 8: A-wing contact bearing 061, codename Romulus</a:t>
             </a:r>
           </a:p>
         </p:txBody>
@@ -5497,12 +4026,20 @@
               <a:t>Lofar 2</a:t>
             </a:r>
           </a:p>
+          <a:p>
+            <a:r>
+              <a:rPr sz="800">
+                <a:hlinkClick r:id="rId32"/>
+              </a:rPr>
+              <a:t>Lofar 3</a:t>
+            </a:r>
+          </a:p>
         </p:txBody>
       </p:sp>
       <p:sp>
         <p:nvSpPr>
           <p:cNvPr id="19" name="Rounded Rectangle 18">
-            <a:hlinkClick r:id="rId32"/>
+            <a:hlinkClick r:id="rId33"/>
           </p:cNvPr>
           <p:cNvSpPr/>
           <p:nvPr/>
@@ -5549,7 +4086,7 @@
                   <a:srgbClr val="1F3A5F"/>
                 </a:solidFill>
               </a:rPr>
-              <a:t>Gram 30: Voyager, Category 2, Bajor</a:t>
+              <a:t>Gram 10: Razor Crest, Category 4, Kobol</a:t>
             </a:r>
           </a:p>
         </p:txBody>
@@ -5578,7 +4115,7 @@
           <a:p>
             <a:r>
               <a:rPr sz="800">
-                <a:hlinkClick r:id="rId33"/>
+                <a:hlinkClick r:id="rId34"/>
               </a:rPr>
               <a:t>Lofar 1</a:t>
             </a:r>
@@ -5586,7 +4123,7 @@
           <a:p>
             <a:r>
               <a:rPr sz="800">
-                <a:hlinkClick r:id="rId34"/>
+                <a:hlinkClick r:id="rId35"/>
               </a:rPr>
               <a:t>Lofar 2</a:t>
             </a:r>
@@ -5594,7 +4131,7 @@
           <a:p>
             <a:r>
               <a:rPr sz="800">
-                <a:hlinkClick r:id="rId35"/>
+                <a:hlinkClick r:id="rId36"/>
               </a:rPr>
               <a:t>Lofar 3</a:t>
             </a:r>
@@ -5604,7 +4141,7 @@
       <p:sp>
         <p:nvSpPr>
           <p:cNvPr id="21" name="Rounded Rectangle 20">
-            <a:hlinkClick r:id="rId36"/>
+            <a:hlinkClick r:id="rId37"/>
           </p:cNvPr>
           <p:cNvSpPr/>
           <p:nvPr/>
@@ -5651,7 +4188,7 @@
                   <a:srgbClr val="1F3A5F"/>
                 </a:solidFill>
               </a:rPr>
-              <a:t>Gram 31: Lambda Shuttle, Category 3, Bajor</a:t>
+              <a:t>Gram 11: Lambda Shuttle, Category 4, Cardassia</a:t>
             </a:r>
           </a:p>
         </p:txBody>
@@ -5680,17 +4217,25 @@
           <a:p>
             <a:r>
               <a:rPr sz="800">
-                <a:hlinkClick r:id="rId37"/>
+                <a:hlinkClick r:id="rId38"/>
               </a:rPr>
               <a:t>Lofar 1</a:t>
             </a:r>
           </a:p>
+          <a:p>
+            <a:r>
+              <a:rPr sz="800">
+                <a:hlinkClick r:id="rId39"/>
+              </a:rPr>
+              <a:t>Lofar 2</a:t>
+            </a:r>
+          </a:p>
         </p:txBody>
       </p:sp>
       <p:sp>
         <p:nvSpPr>
           <p:cNvPr id="23" name="Rounded Rectangle 22">
-            <a:hlinkClick r:id="rId38"/>
+            <a:hlinkClick r:id="rId40"/>
           </p:cNvPr>
           <p:cNvSpPr/>
           <p:nvPr/>
@@ -5737,7 +4282,7 @@
                   <a:srgbClr val="1F3A5F"/>
                 </a:solidFill>
               </a:rPr>
-              <a:t>Gram 32: Nebulon-B, Category 4, Cardassia</a:t>
+              <a:t>Gram 12: Constitution-class contact bearing 225, codename Tatooine</a:t>
             </a:r>
           </a:p>
         </p:txBody>
@@ -5766,7 +4311,7 @@
           <a:p>
             <a:r>
               <a:rPr sz="800">
-                <a:hlinkClick r:id="rId39"/>
+                <a:hlinkClick r:id="rId41"/>
               </a:rPr>
               <a:t>Lofar 1</a:t>
             </a:r>
@@ -5774,7 +4319,7 @@
           <a:p>
             <a:r>
               <a:rPr sz="800">
-                <a:hlinkClick r:id="rId40"/>
+                <a:hlinkClick r:id="rId42"/>
               </a:rPr>
               <a:t>Lofar 2</a:t>
             </a:r>
@@ -5782,25 +4327,17 @@
           <a:p>
             <a:r>
               <a:rPr sz="800">
-                <a:hlinkClick r:id="rId41"/>
+                <a:hlinkClick r:id="rId43"/>
               </a:rPr>
               <a:t>Lofar 3</a:t>
             </a:r>
           </a:p>
-          <a:p>
-            <a:r>
-              <a:rPr sz="800">
-                <a:hlinkClick r:id="rId42"/>
-              </a:rPr>
-              <a:t>Lofar 4</a:t>
-            </a:r>
-          </a:p>
         </p:txBody>
       </p:sp>
       <p:sp>
         <p:nvSpPr>
           <p:cNvPr id="25" name="Rounded Rectangle 24">
-            <a:hlinkClick r:id="rId43"/>
+            <a:hlinkClick r:id="rId44"/>
           </p:cNvPr>
           <p:cNvSpPr/>
           <p:nvPr/>
@@ -5847,7 +4384,7 @@
                   <a:srgbClr val="1F3A5F"/>
                 </a:solidFill>
               </a:rPr>
-              <a:t>Gram 33: Prometheus, Category 3, Romulus</a:t>
+              <a:t>Gram 13: Slave I contact bearing 078, codename Kobol</a:t>
             </a:r>
           </a:p>
         </p:txBody>
@@ -5876,7 +4413,7 @@
           <a:p>
             <a:r>
               <a:rPr sz="800">
-                <a:hlinkClick r:id="rId44"/>
+                <a:hlinkClick r:id="rId45"/>
               </a:rPr>
               <a:t>Lofar 1</a:t>
             </a:r>
@@ -5886,7 +4423,7 @@
       <p:sp>
         <p:nvSpPr>
           <p:cNvPr id="27" name="Rounded Rectangle 26">
-            <a:hlinkClick r:id="rId45"/>
+            <a:hlinkClick r:id="rId46"/>
           </p:cNvPr>
           <p:cNvSpPr/>
           <p:nvPr/>
@@ -5933,7 +4470,7 @@
                   <a:srgbClr val="1F3A5F"/>
                 </a:solidFill>
               </a:rPr>
-              <a:t>Gram 34: Miranda-class, Category 2, Dagobah</a:t>
+              <a:t>Gram 14: Y-wing, Category 1, Tantive</a:t>
             </a:r>
           </a:p>
         </p:txBody>
@@ -5962,7 +4499,7 @@
           <a:p>
             <a:r>
               <a:rPr sz="800">
-                <a:hlinkClick r:id="rId46"/>
+                <a:hlinkClick r:id="rId47"/>
               </a:rPr>
               <a:t>Lofar 1</a:t>
             </a:r>
@@ -5970,17 +4507,9 @@
           <a:p>
             <a:r>
               <a:rPr sz="800">
-                <a:hlinkClick r:id="rId47"/>
+                <a:hlinkClick r:id="rId48"/>
               </a:rPr>
               <a:t>Lofar 2</a:t>
-            </a:r>
-          </a:p>
-          <a:p>
-            <a:r>
-              <a:rPr sz="800">
-                <a:hlinkClick r:id="rId48"/>
-              </a:rPr>
-              <a:t>Lofar 3</a:t>
             </a:r>
           </a:p>
         </p:txBody>
@@ -6035,7 +4564,7 @@
                   <a:srgbClr val="1F3A5F"/>
                 </a:solidFill>
               </a:rPr>
-              <a:t>Gram 35: Nebulon-B, Category 4, Gandalf</a:t>
+              <a:t>Gram 16: Reliant, Category 1, Betazed</a:t>
             </a:r>
           </a:p>
         </p:txBody>
@@ -6069,12 +4598,28 @@
               <a:t>Lofar 1</a:t>
             </a:r>
           </a:p>
+          <a:p>
+            <a:r>
+              <a:rPr sz="800">
+                <a:hlinkClick r:id="rId51"/>
+              </a:rPr>
+              <a:t>Lofar 2</a:t>
+            </a:r>
+          </a:p>
+          <a:p>
+            <a:r>
+              <a:rPr sz="800">
+                <a:hlinkClick r:id="rId52"/>
+              </a:rPr>
+              <a:t>Lofar 3</a:t>
+            </a:r>
+          </a:p>
         </p:txBody>
       </p:sp>
       <p:sp>
         <p:nvSpPr>
           <p:cNvPr id="31" name="Rounded Rectangle 30">
-            <a:hlinkClick r:id="rId51"/>
+            <a:hlinkClick r:id="rId53"/>
           </p:cNvPr>
           <p:cNvSpPr/>
           <p:nvPr/>
@@ -6121,7 +4666,7 @@
                   <a:srgbClr val="1F3A5F"/>
                 </a:solidFill>
               </a:rPr>
-              <a:t>Gram 36: Tantive IV contact bearing 226, codename Romulus</a:t>
+              <a:t>Gram 18: Devastator, Category 4, Vulcan</a:t>
             </a:r>
           </a:p>
         </p:txBody>
@@ -6150,6 +4695,1549 @@
           <a:p>
             <a:r>
               <a:rPr sz="800">
+                <a:hlinkClick r:id="rId54"/>
+              </a:rPr>
+              <a:t>Lofar 1</a:t>
+            </a:r>
+          </a:p>
+          <a:p>
+            <a:r>
+              <a:rPr sz="800">
+                <a:hlinkClick r:id="rId55"/>
+              </a:rPr>
+              <a:t>Lofar 2</a:t>
+            </a:r>
+          </a:p>
+          <a:p>
+            <a:r>
+              <a:rPr sz="800">
+                <a:hlinkClick r:id="rId56"/>
+              </a:rPr>
+              <a:t>Lofar 3</a:t>
+            </a:r>
+          </a:p>
+        </p:txBody>
+      </p:sp>
+    </p:spTree>
+  </p:cSld>
+  <p:clrMapOvr>
+    <a:masterClrMapping/>
+  </p:clrMapOvr>
+</p:sld>
+</file>
+
+<file path=ppt/slides/slide3.xml><?xml version="1.0" encoding="utf-8"?>
+<p:sld xmlns:a="http://schemas.openxmlformats.org/drawingml/2006/main" xmlns:p="http://schemas.openxmlformats.org/presentationml/2006/main" xmlns:r="http://schemas.openxmlformats.org/officeDocument/2006/relationships">
+  <p:cSld>
+    <p:spTree>
+      <p:nvGrpSpPr>
+        <p:cNvPr id="1" name=""/>
+        <p:cNvGrpSpPr/>
+        <p:nvPr/>
+      </p:nvGrpSpPr>
+      <p:grpSpPr/>
+      <p:sp>
+        <p:nvSpPr>
+          <p:cNvPr id="2" name="Rectangle 1"/>
+          <p:cNvSpPr/>
+          <p:nvPr/>
+        </p:nvSpPr>
+        <p:spPr>
+          <a:xfrm>
+            <a:off x="0" y="0"/>
+            <a:ext cx="12188952" cy="548640"/>
+          </a:xfrm>
+          <a:prstGeom prst="rect">
+            <a:avLst/>
+          </a:prstGeom>
+          <a:solidFill>
+            <a:srgbClr val="1F3A5F"/>
+          </a:solidFill>
+          <a:ln>
+            <a:noFill/>
+          </a:ln>
+        </p:spPr>
+        <p:style>
+          <a:lnRef idx="1">
+            <a:schemeClr val="accent1"/>
+          </a:lnRef>
+          <a:fillRef idx="3">
+            <a:schemeClr val="accent1"/>
+          </a:fillRef>
+          <a:effectRef idx="2">
+            <a:schemeClr val="accent1"/>
+          </a:effectRef>
+          <a:fontRef idx="minor">
+            <a:schemeClr val="lt1"/>
+          </a:fontRef>
+        </p:style>
+        <p:txBody>
+          <a:bodyPr rtlCol="0" anchor="ctr" lIns="182880" rIns="182880"/>
+          <a:lstStyle/>
+          <a:p>
+            <a:pPr algn="ctr"/>
+            <a:r>
+              <a:rPr sz="2000" b="1">
+                <a:solidFill>
+                  <a:srgbClr val="FFFFFF"/>
+                </a:solidFill>
+              </a:rPr>
+              <a:t>Instructor Progress Test 3 Grams No FR — Page 2 of 2</a:t>
+            </a:r>
+          </a:p>
+        </p:txBody>
+      </p:sp>
+      <p:sp>
+        <p:nvSpPr>
+          <p:cNvPr id="3" name="Rounded Rectangle 2">
+            <a:hlinkClick r:id="rId2"/>
+          </p:cNvPr>
+          <p:cNvSpPr/>
+          <p:nvPr/>
+        </p:nvSpPr>
+        <p:spPr>
+          <a:xfrm>
+            <a:off x="365760" y="731520"/>
+            <a:ext cx="2200046" cy="365760"/>
+          </a:xfrm>
+          <a:prstGeom prst="roundRect">
+            <a:avLst/>
+          </a:prstGeom>
+          <a:solidFill>
+            <a:srgbClr val="E8EEF7"/>
+          </a:solidFill>
+          <a:ln>
+            <a:solidFill>
+              <a:srgbClr val="1F3A5F"/>
+            </a:solidFill>
+          </a:ln>
+        </p:spPr>
+        <p:style>
+          <a:lnRef idx="1">
+            <a:schemeClr val="accent1"/>
+          </a:lnRef>
+          <a:fillRef idx="3">
+            <a:schemeClr val="accent1"/>
+          </a:fillRef>
+          <a:effectRef idx="2">
+            <a:schemeClr val="accent1"/>
+          </a:effectRef>
+          <a:fontRef idx="minor">
+            <a:schemeClr val="lt1"/>
+          </a:fontRef>
+        </p:style>
+        <p:txBody>
+          <a:bodyPr rtlCol="0" anchor="ctr" lIns="45720" rIns="45720"/>
+          <a:lstStyle/>
+          <a:p>
+            <a:pPr algn="ctr"/>
+            <a:r>
+              <a:rPr sz="900">
+                <a:solidFill>
+                  <a:srgbClr val="1F3A5F"/>
+                </a:solidFill>
+              </a:rPr>
+              <a:t>Gram 19: Intrepid-class contact bearing 256, codename Caprica</a:t>
+            </a:r>
+          </a:p>
+        </p:txBody>
+      </p:sp>
+      <p:sp>
+        <p:nvSpPr>
+          <p:cNvPr id="4" name="TextBox 3"/>
+          <p:cNvSpPr txBox="1"/>
+          <p:nvPr/>
+        </p:nvSpPr>
+        <p:spPr>
+          <a:xfrm>
+            <a:off x="365760" y="1115568"/>
+            <a:ext cx="2200046" cy="1447800"/>
+          </a:xfrm>
+          <a:prstGeom prst="rect">
+            <a:avLst/>
+          </a:prstGeom>
+          <a:noFill/>
+        </p:spPr>
+        <p:txBody>
+          <a:bodyPr wrap="square">
+            <a:spAutoFit/>
+          </a:bodyPr>
+          <a:lstStyle/>
+          <a:p>
+            <a:r>
+              <a:rPr sz="800">
+                <a:hlinkClick r:id="rId3"/>
+              </a:rPr>
+              <a:t>Lofar 1</a:t>
+            </a:r>
+          </a:p>
+          <a:p>
+            <a:r>
+              <a:rPr sz="800">
+                <a:hlinkClick r:id="rId4"/>
+              </a:rPr>
+              <a:t>Lofar 2</a:t>
+            </a:r>
+          </a:p>
+          <a:p>
+            <a:r>
+              <a:rPr sz="800">
+                <a:hlinkClick r:id="rId5"/>
+              </a:rPr>
+              <a:t>Lofar 3</a:t>
+            </a:r>
+          </a:p>
+          <a:p>
+            <a:r>
+              <a:rPr sz="800">
+                <a:hlinkClick r:id="rId6"/>
+              </a:rPr>
+              <a:t>Lofar 4</a:t>
+            </a:r>
+          </a:p>
+        </p:txBody>
+      </p:sp>
+      <p:sp>
+        <p:nvSpPr>
+          <p:cNvPr id="5" name="Rounded Rectangle 4">
+            <a:hlinkClick r:id="rId7"/>
+          </p:cNvPr>
+          <p:cNvSpPr/>
+          <p:nvPr/>
+        </p:nvSpPr>
+        <p:spPr>
+          <a:xfrm>
+            <a:off x="2657246" y="731520"/>
+            <a:ext cx="2200046" cy="365760"/>
+          </a:xfrm>
+          <a:prstGeom prst="roundRect">
+            <a:avLst/>
+          </a:prstGeom>
+          <a:solidFill>
+            <a:srgbClr val="E8EEF7"/>
+          </a:solidFill>
+          <a:ln>
+            <a:solidFill>
+              <a:srgbClr val="1F3A5F"/>
+            </a:solidFill>
+          </a:ln>
+        </p:spPr>
+        <p:style>
+          <a:lnRef idx="1">
+            <a:schemeClr val="accent1"/>
+          </a:lnRef>
+          <a:fillRef idx="3">
+            <a:schemeClr val="accent1"/>
+          </a:fillRef>
+          <a:effectRef idx="2">
+            <a:schemeClr val="accent1"/>
+          </a:effectRef>
+          <a:fontRef idx="minor">
+            <a:schemeClr val="lt1"/>
+          </a:fontRef>
+        </p:style>
+        <p:txBody>
+          <a:bodyPr rtlCol="0" anchor="ctr" lIns="45720" rIns="45720"/>
+          <a:lstStyle/>
+          <a:p>
+            <a:pPr algn="ctr"/>
+            <a:r>
+              <a:rPr sz="900">
+                <a:solidFill>
+                  <a:srgbClr val="1F3A5F"/>
+                </a:solidFill>
+              </a:rPr>
+              <a:t>Gram 20: Millennium Falcon, Category 1, Bajor</a:t>
+            </a:r>
+          </a:p>
+        </p:txBody>
+      </p:sp>
+      <p:sp>
+        <p:nvSpPr>
+          <p:cNvPr id="6" name="TextBox 5"/>
+          <p:cNvSpPr txBox="1"/>
+          <p:nvPr/>
+        </p:nvSpPr>
+        <p:spPr>
+          <a:xfrm>
+            <a:off x="2657246" y="1115568"/>
+            <a:ext cx="2200046" cy="1447800"/>
+          </a:xfrm>
+          <a:prstGeom prst="rect">
+            <a:avLst/>
+          </a:prstGeom>
+          <a:noFill/>
+        </p:spPr>
+        <p:txBody>
+          <a:bodyPr wrap="square">
+            <a:spAutoFit/>
+          </a:bodyPr>
+          <a:lstStyle/>
+          <a:p>
+            <a:r>
+              <a:rPr sz="800">
+                <a:hlinkClick r:id="rId8"/>
+              </a:rPr>
+              <a:t>Lofar 1</a:t>
+            </a:r>
+          </a:p>
+          <a:p>
+            <a:r>
+              <a:rPr sz="800">
+                <a:hlinkClick r:id="rId9"/>
+              </a:rPr>
+              <a:t>Lofar 2</a:t>
+            </a:r>
+          </a:p>
+          <a:p>
+            <a:r>
+              <a:rPr sz="800">
+                <a:hlinkClick r:id="rId10"/>
+              </a:rPr>
+              <a:t>Lofar 3</a:t>
+            </a:r>
+          </a:p>
+          <a:p>
+            <a:r>
+              <a:rPr sz="800">
+                <a:hlinkClick r:id="rId11"/>
+              </a:rPr>
+              <a:t>Lofar 4</a:t>
+            </a:r>
+          </a:p>
+        </p:txBody>
+      </p:sp>
+      <p:sp>
+        <p:nvSpPr>
+          <p:cNvPr id="7" name="Rounded Rectangle 6">
+            <a:hlinkClick r:id="rId12"/>
+          </p:cNvPr>
+          <p:cNvSpPr/>
+          <p:nvPr/>
+        </p:nvSpPr>
+        <p:spPr>
+          <a:xfrm>
+            <a:off x="4948732" y="731520"/>
+            <a:ext cx="2200046" cy="365760"/>
+          </a:xfrm>
+          <a:prstGeom prst="roundRect">
+            <a:avLst/>
+          </a:prstGeom>
+          <a:solidFill>
+            <a:srgbClr val="E8EEF7"/>
+          </a:solidFill>
+          <a:ln>
+            <a:solidFill>
+              <a:srgbClr val="1F3A5F"/>
+            </a:solidFill>
+          </a:ln>
+        </p:spPr>
+        <p:style>
+          <a:lnRef idx="1">
+            <a:schemeClr val="accent1"/>
+          </a:lnRef>
+          <a:fillRef idx="3">
+            <a:schemeClr val="accent1"/>
+          </a:fillRef>
+          <a:effectRef idx="2">
+            <a:schemeClr val="accent1"/>
+          </a:effectRef>
+          <a:fontRef idx="minor">
+            <a:schemeClr val="lt1"/>
+          </a:fontRef>
+        </p:style>
+        <p:txBody>
+          <a:bodyPr rtlCol="0" anchor="ctr" lIns="45720" rIns="45720"/>
+          <a:lstStyle/>
+          <a:p>
+            <a:pPr algn="ctr"/>
+            <a:r>
+              <a:rPr sz="900">
+                <a:solidFill>
+                  <a:srgbClr val="1F3A5F"/>
+                </a:solidFill>
+              </a:rPr>
+              <a:t>Gram 21: Enterprise, Category 1, Betazed</a:t>
+            </a:r>
+          </a:p>
+        </p:txBody>
+      </p:sp>
+      <p:sp>
+        <p:nvSpPr>
+          <p:cNvPr id="8" name="TextBox 7"/>
+          <p:cNvSpPr txBox="1"/>
+          <p:nvPr/>
+        </p:nvSpPr>
+        <p:spPr>
+          <a:xfrm>
+            <a:off x="4948732" y="1115568"/>
+            <a:ext cx="2200046" cy="1447800"/>
+          </a:xfrm>
+          <a:prstGeom prst="rect">
+            <a:avLst/>
+          </a:prstGeom>
+          <a:noFill/>
+        </p:spPr>
+        <p:txBody>
+          <a:bodyPr wrap="square">
+            <a:spAutoFit/>
+          </a:bodyPr>
+          <a:lstStyle/>
+          <a:p>
+            <a:r>
+              <a:rPr sz="800">
+                <a:hlinkClick r:id="rId13"/>
+              </a:rPr>
+              <a:t>Lofar 1</a:t>
+            </a:r>
+          </a:p>
+        </p:txBody>
+      </p:sp>
+      <p:sp>
+        <p:nvSpPr>
+          <p:cNvPr id="9" name="Rounded Rectangle 8">
+            <a:hlinkClick r:id="rId14"/>
+          </p:cNvPr>
+          <p:cNvSpPr/>
+          <p:nvPr/>
+        </p:nvSpPr>
+        <p:spPr>
+          <a:xfrm>
+            <a:off x="7240219" y="731520"/>
+            <a:ext cx="2200046" cy="365760"/>
+          </a:xfrm>
+          <a:prstGeom prst="roundRect">
+            <a:avLst/>
+          </a:prstGeom>
+          <a:solidFill>
+            <a:srgbClr val="E8EEF7"/>
+          </a:solidFill>
+          <a:ln>
+            <a:solidFill>
+              <a:srgbClr val="1F3A5F"/>
+            </a:solidFill>
+          </a:ln>
+        </p:spPr>
+        <p:style>
+          <a:lnRef idx="1">
+            <a:schemeClr val="accent1"/>
+          </a:lnRef>
+          <a:fillRef idx="3">
+            <a:schemeClr val="accent1"/>
+          </a:fillRef>
+          <a:effectRef idx="2">
+            <a:schemeClr val="accent1"/>
+          </a:effectRef>
+          <a:fontRef idx="minor">
+            <a:schemeClr val="lt1"/>
+          </a:fontRef>
+        </p:style>
+        <p:txBody>
+          <a:bodyPr rtlCol="0" anchor="ctr" lIns="45720" rIns="45720"/>
+          <a:lstStyle/>
+          <a:p>
+            <a:pPr algn="ctr"/>
+            <a:r>
+              <a:rPr sz="900">
+                <a:solidFill>
+                  <a:srgbClr val="1F3A5F"/>
+                </a:solidFill>
+              </a:rPr>
+              <a:t>Gram 23: Akira-class, Category 4, Betazed</a:t>
+            </a:r>
+          </a:p>
+        </p:txBody>
+      </p:sp>
+      <p:sp>
+        <p:nvSpPr>
+          <p:cNvPr id="10" name="TextBox 9"/>
+          <p:cNvSpPr txBox="1"/>
+          <p:nvPr/>
+        </p:nvSpPr>
+        <p:spPr>
+          <a:xfrm>
+            <a:off x="7240219" y="1115568"/>
+            <a:ext cx="2200046" cy="1447800"/>
+          </a:xfrm>
+          <a:prstGeom prst="rect">
+            <a:avLst/>
+          </a:prstGeom>
+          <a:noFill/>
+        </p:spPr>
+        <p:txBody>
+          <a:bodyPr wrap="square">
+            <a:spAutoFit/>
+          </a:bodyPr>
+          <a:lstStyle/>
+          <a:p>
+            <a:r>
+              <a:rPr sz="800">
+                <a:hlinkClick r:id="rId15"/>
+              </a:rPr>
+              <a:t>Lofar 1</a:t>
+            </a:r>
+          </a:p>
+          <a:p>
+            <a:r>
+              <a:rPr sz="800">
+                <a:hlinkClick r:id="rId16"/>
+              </a:rPr>
+              <a:t>Lofar 2</a:t>
+            </a:r>
+          </a:p>
+          <a:p>
+            <a:r>
+              <a:rPr sz="800">
+                <a:hlinkClick r:id="rId17"/>
+              </a:rPr>
+              <a:t>Lofar 3</a:t>
+            </a:r>
+          </a:p>
+          <a:p>
+            <a:r>
+              <a:rPr sz="800">
+                <a:hlinkClick r:id="rId18"/>
+              </a:rPr>
+              <a:t>Lofar 4</a:t>
+            </a:r>
+          </a:p>
+        </p:txBody>
+      </p:sp>
+      <p:sp>
+        <p:nvSpPr>
+          <p:cNvPr id="11" name="Rounded Rectangle 10">
+            <a:hlinkClick r:id="rId19"/>
+          </p:cNvPr>
+          <p:cNvSpPr/>
+          <p:nvPr/>
+        </p:nvSpPr>
+        <p:spPr>
+          <a:xfrm>
+            <a:off x="9531705" y="731520"/>
+            <a:ext cx="2200046" cy="365760"/>
+          </a:xfrm>
+          <a:prstGeom prst="roundRect">
+            <a:avLst/>
+          </a:prstGeom>
+          <a:solidFill>
+            <a:srgbClr val="E8EEF7"/>
+          </a:solidFill>
+          <a:ln>
+            <a:solidFill>
+              <a:srgbClr val="1F3A5F"/>
+            </a:solidFill>
+          </a:ln>
+        </p:spPr>
+        <p:style>
+          <a:lnRef idx="1">
+            <a:schemeClr val="accent1"/>
+          </a:lnRef>
+          <a:fillRef idx="3">
+            <a:schemeClr val="accent1"/>
+          </a:fillRef>
+          <a:effectRef idx="2">
+            <a:schemeClr val="accent1"/>
+          </a:effectRef>
+          <a:fontRef idx="minor">
+            <a:schemeClr val="lt1"/>
+          </a:fontRef>
+        </p:style>
+        <p:txBody>
+          <a:bodyPr rtlCol="0" anchor="ctr" lIns="45720" rIns="45720"/>
+          <a:lstStyle/>
+          <a:p>
+            <a:pPr algn="ctr"/>
+            <a:r>
+              <a:rPr sz="900">
+                <a:solidFill>
+                  <a:srgbClr val="1F3A5F"/>
+                </a:solidFill>
+              </a:rPr>
+              <a:t>Gram 24: Galaxy-class, Category 3, Betazed</a:t>
+            </a:r>
+          </a:p>
+        </p:txBody>
+      </p:sp>
+      <p:sp>
+        <p:nvSpPr>
+          <p:cNvPr id="12" name="TextBox 11"/>
+          <p:cNvSpPr txBox="1"/>
+          <p:nvPr/>
+        </p:nvSpPr>
+        <p:spPr>
+          <a:xfrm>
+            <a:off x="9531705" y="1115568"/>
+            <a:ext cx="2200046" cy="1447800"/>
+          </a:xfrm>
+          <a:prstGeom prst="rect">
+            <a:avLst/>
+          </a:prstGeom>
+          <a:noFill/>
+        </p:spPr>
+        <p:txBody>
+          <a:bodyPr wrap="square">
+            <a:spAutoFit/>
+          </a:bodyPr>
+          <a:lstStyle/>
+          <a:p>
+            <a:r>
+              <a:rPr sz="800">
+                <a:hlinkClick r:id="rId20"/>
+              </a:rPr>
+              <a:t>Lofar 1</a:t>
+            </a:r>
+          </a:p>
+          <a:p>
+            <a:r>
+              <a:rPr sz="800">
+                <a:hlinkClick r:id="rId21"/>
+              </a:rPr>
+              <a:t>Lofar 2</a:t>
+            </a:r>
+          </a:p>
+        </p:txBody>
+      </p:sp>
+      <p:sp>
+        <p:nvSpPr>
+          <p:cNvPr id="13" name="Rounded Rectangle 12">
+            <a:hlinkClick r:id="rId22"/>
+          </p:cNvPr>
+          <p:cNvSpPr/>
+          <p:nvPr/>
+        </p:nvSpPr>
+        <p:spPr>
+          <a:xfrm>
+            <a:off x="365760" y="2682240"/>
+            <a:ext cx="2200046" cy="365760"/>
+          </a:xfrm>
+          <a:prstGeom prst="roundRect">
+            <a:avLst/>
+          </a:prstGeom>
+          <a:solidFill>
+            <a:srgbClr val="E8EEF7"/>
+          </a:solidFill>
+          <a:ln>
+            <a:solidFill>
+              <a:srgbClr val="1F3A5F"/>
+            </a:solidFill>
+          </a:ln>
+        </p:spPr>
+        <p:style>
+          <a:lnRef idx="1">
+            <a:schemeClr val="accent1"/>
+          </a:lnRef>
+          <a:fillRef idx="3">
+            <a:schemeClr val="accent1"/>
+          </a:fillRef>
+          <a:effectRef idx="2">
+            <a:schemeClr val="accent1"/>
+          </a:effectRef>
+          <a:fontRef idx="minor">
+            <a:schemeClr val="lt1"/>
+          </a:fontRef>
+        </p:style>
+        <p:txBody>
+          <a:bodyPr rtlCol="0" anchor="ctr" lIns="45720" rIns="45720"/>
+          <a:lstStyle/>
+          <a:p>
+            <a:pPr algn="ctr"/>
+            <a:r>
+              <a:rPr sz="900">
+                <a:solidFill>
+                  <a:srgbClr val="1F3A5F"/>
+                </a:solidFill>
+              </a:rPr>
+              <a:t>Gram 25: Corellian Corvette, Category 4, Dagobah</a:t>
+            </a:r>
+          </a:p>
+        </p:txBody>
+      </p:sp>
+      <p:sp>
+        <p:nvSpPr>
+          <p:cNvPr id="14" name="TextBox 13"/>
+          <p:cNvSpPr txBox="1"/>
+          <p:nvPr/>
+        </p:nvSpPr>
+        <p:spPr>
+          <a:xfrm>
+            <a:off x="365760" y="3066288"/>
+            <a:ext cx="2200046" cy="1447800"/>
+          </a:xfrm>
+          <a:prstGeom prst="rect">
+            <a:avLst/>
+          </a:prstGeom>
+          <a:noFill/>
+        </p:spPr>
+        <p:txBody>
+          <a:bodyPr wrap="square">
+            <a:spAutoFit/>
+          </a:bodyPr>
+          <a:lstStyle/>
+          <a:p>
+            <a:r>
+              <a:rPr sz="800">
+                <a:hlinkClick r:id="rId23"/>
+              </a:rPr>
+              <a:t>Lofar 1</a:t>
+            </a:r>
+          </a:p>
+        </p:txBody>
+      </p:sp>
+      <p:sp>
+        <p:nvSpPr>
+          <p:cNvPr id="15" name="Rounded Rectangle 14">
+            <a:hlinkClick r:id="rId24"/>
+          </p:cNvPr>
+          <p:cNvSpPr/>
+          <p:nvPr/>
+        </p:nvSpPr>
+        <p:spPr>
+          <a:xfrm>
+            <a:off x="2657246" y="2682240"/>
+            <a:ext cx="2200046" cy="365760"/>
+          </a:xfrm>
+          <a:prstGeom prst="roundRect">
+            <a:avLst/>
+          </a:prstGeom>
+          <a:solidFill>
+            <a:srgbClr val="E8EEF7"/>
+          </a:solidFill>
+          <a:ln>
+            <a:solidFill>
+              <a:srgbClr val="1F3A5F"/>
+            </a:solidFill>
+          </a:ln>
+        </p:spPr>
+        <p:style>
+          <a:lnRef idx="1">
+            <a:schemeClr val="accent1"/>
+          </a:lnRef>
+          <a:fillRef idx="3">
+            <a:schemeClr val="accent1"/>
+          </a:fillRef>
+          <a:effectRef idx="2">
+            <a:schemeClr val="accent1"/>
+          </a:effectRef>
+          <a:fontRef idx="minor">
+            <a:schemeClr val="lt1"/>
+          </a:fontRef>
+        </p:style>
+        <p:txBody>
+          <a:bodyPr rtlCol="0" anchor="ctr" lIns="45720" rIns="45720"/>
+          <a:lstStyle/>
+          <a:p>
+            <a:pPr algn="ctr"/>
+            <a:r>
+              <a:rPr sz="900">
+                <a:solidFill>
+                  <a:srgbClr val="1F3A5F"/>
+                </a:solidFill>
+              </a:rPr>
+              <a:t>Gram 26: Reliant, Category 4, Risa</a:t>
+            </a:r>
+          </a:p>
+        </p:txBody>
+      </p:sp>
+      <p:sp>
+        <p:nvSpPr>
+          <p:cNvPr id="16" name="TextBox 15"/>
+          <p:cNvSpPr txBox="1"/>
+          <p:nvPr/>
+        </p:nvSpPr>
+        <p:spPr>
+          <a:xfrm>
+            <a:off x="2657246" y="3066288"/>
+            <a:ext cx="2200046" cy="1447800"/>
+          </a:xfrm>
+          <a:prstGeom prst="rect">
+            <a:avLst/>
+          </a:prstGeom>
+          <a:noFill/>
+        </p:spPr>
+        <p:txBody>
+          <a:bodyPr wrap="square">
+            <a:spAutoFit/>
+          </a:bodyPr>
+          <a:lstStyle/>
+          <a:p>
+            <a:r>
+              <a:rPr sz="800">
+                <a:hlinkClick r:id="rId25"/>
+              </a:rPr>
+              <a:t>Lofar 1</a:t>
+            </a:r>
+          </a:p>
+          <a:p>
+            <a:r>
+              <a:rPr sz="800">
+                <a:hlinkClick r:id="rId26"/>
+              </a:rPr>
+              <a:t>Lofar 2</a:t>
+            </a:r>
+          </a:p>
+          <a:p>
+            <a:r>
+              <a:rPr sz="800">
+                <a:hlinkClick r:id="rId27"/>
+              </a:rPr>
+              <a:t>Lofar 3</a:t>
+            </a:r>
+          </a:p>
+          <a:p>
+            <a:r>
+              <a:rPr sz="800">
+                <a:hlinkClick r:id="rId28"/>
+              </a:rPr>
+              <a:t>Lofar 4</a:t>
+            </a:r>
+          </a:p>
+        </p:txBody>
+      </p:sp>
+      <p:sp>
+        <p:nvSpPr>
+          <p:cNvPr id="17" name="Rounded Rectangle 16">
+            <a:hlinkClick r:id="rId29"/>
+          </p:cNvPr>
+          <p:cNvSpPr/>
+          <p:nvPr/>
+        </p:nvSpPr>
+        <p:spPr>
+          <a:xfrm>
+            <a:off x="4948732" y="2682240"/>
+            <a:ext cx="2200046" cy="365760"/>
+          </a:xfrm>
+          <a:prstGeom prst="roundRect">
+            <a:avLst/>
+          </a:prstGeom>
+          <a:solidFill>
+            <a:srgbClr val="E8EEF7"/>
+          </a:solidFill>
+          <a:ln>
+            <a:solidFill>
+              <a:srgbClr val="1F3A5F"/>
+            </a:solidFill>
+          </a:ln>
+        </p:spPr>
+        <p:style>
+          <a:lnRef idx="1">
+            <a:schemeClr val="accent1"/>
+          </a:lnRef>
+          <a:fillRef idx="3">
+            <a:schemeClr val="accent1"/>
+          </a:fillRef>
+          <a:effectRef idx="2">
+            <a:schemeClr val="accent1"/>
+          </a:effectRef>
+          <a:fontRef idx="minor">
+            <a:schemeClr val="lt1"/>
+          </a:fontRef>
+        </p:style>
+        <p:txBody>
+          <a:bodyPr rtlCol="0" anchor="ctr" lIns="45720" rIns="45720"/>
+          <a:lstStyle/>
+          <a:p>
+            <a:pPr algn="ctr"/>
+            <a:r>
+              <a:rPr sz="900">
+                <a:solidFill>
+                  <a:srgbClr val="1F3A5F"/>
+                </a:solidFill>
+              </a:rPr>
+              <a:t>Gram 28: Intrepid-class contact bearing 279, codename Vulcan</a:t>
+            </a:r>
+          </a:p>
+        </p:txBody>
+      </p:sp>
+      <p:sp>
+        <p:nvSpPr>
+          <p:cNvPr id="18" name="TextBox 17"/>
+          <p:cNvSpPr txBox="1"/>
+          <p:nvPr/>
+        </p:nvSpPr>
+        <p:spPr>
+          <a:xfrm>
+            <a:off x="4948732" y="3066288"/>
+            <a:ext cx="2200046" cy="1447800"/>
+          </a:xfrm>
+          <a:prstGeom prst="rect">
+            <a:avLst/>
+          </a:prstGeom>
+          <a:noFill/>
+        </p:spPr>
+        <p:txBody>
+          <a:bodyPr wrap="square">
+            <a:spAutoFit/>
+          </a:bodyPr>
+          <a:lstStyle/>
+          <a:p>
+            <a:r>
+              <a:rPr sz="800">
+                <a:hlinkClick r:id="rId30"/>
+              </a:rPr>
+              <a:t>Lofar 1</a:t>
+            </a:r>
+          </a:p>
+          <a:p>
+            <a:r>
+              <a:rPr sz="800">
+                <a:hlinkClick r:id="rId31"/>
+              </a:rPr>
+              <a:t>Lofar 2</a:t>
+            </a:r>
+          </a:p>
+        </p:txBody>
+      </p:sp>
+      <p:sp>
+        <p:nvSpPr>
+          <p:cNvPr id="19" name="Rounded Rectangle 18">
+            <a:hlinkClick r:id="rId32"/>
+          </p:cNvPr>
+          <p:cNvSpPr/>
+          <p:nvPr/>
+        </p:nvSpPr>
+        <p:spPr>
+          <a:xfrm>
+            <a:off x="7240219" y="2682240"/>
+            <a:ext cx="2200046" cy="365760"/>
+          </a:xfrm>
+          <a:prstGeom prst="roundRect">
+            <a:avLst/>
+          </a:prstGeom>
+          <a:solidFill>
+            <a:srgbClr val="E8EEF7"/>
+          </a:solidFill>
+          <a:ln>
+            <a:solidFill>
+              <a:srgbClr val="1F3A5F"/>
+            </a:solidFill>
+          </a:ln>
+        </p:spPr>
+        <p:style>
+          <a:lnRef idx="1">
+            <a:schemeClr val="accent1"/>
+          </a:lnRef>
+          <a:fillRef idx="3">
+            <a:schemeClr val="accent1"/>
+          </a:fillRef>
+          <a:effectRef idx="2">
+            <a:schemeClr val="accent1"/>
+          </a:effectRef>
+          <a:fontRef idx="minor">
+            <a:schemeClr val="lt1"/>
+          </a:fontRef>
+        </p:style>
+        <p:txBody>
+          <a:bodyPr rtlCol="0" anchor="ctr" lIns="45720" rIns="45720"/>
+          <a:lstStyle/>
+          <a:p>
+            <a:pPr algn="ctr"/>
+            <a:r>
+              <a:rPr sz="900">
+                <a:solidFill>
+                  <a:srgbClr val="1F3A5F"/>
+                </a:solidFill>
+              </a:rPr>
+              <a:t>Gram 30: Voyager, Category 2, Bajor</a:t>
+            </a:r>
+          </a:p>
+        </p:txBody>
+      </p:sp>
+      <p:sp>
+        <p:nvSpPr>
+          <p:cNvPr id="20" name="TextBox 19"/>
+          <p:cNvSpPr txBox="1"/>
+          <p:nvPr/>
+        </p:nvSpPr>
+        <p:spPr>
+          <a:xfrm>
+            <a:off x="7240219" y="3066288"/>
+            <a:ext cx="2200046" cy="1447800"/>
+          </a:xfrm>
+          <a:prstGeom prst="rect">
+            <a:avLst/>
+          </a:prstGeom>
+          <a:noFill/>
+        </p:spPr>
+        <p:txBody>
+          <a:bodyPr wrap="square">
+            <a:spAutoFit/>
+          </a:bodyPr>
+          <a:lstStyle/>
+          <a:p>
+            <a:r>
+              <a:rPr sz="800">
+                <a:hlinkClick r:id="rId33"/>
+              </a:rPr>
+              <a:t>Lofar 1</a:t>
+            </a:r>
+          </a:p>
+          <a:p>
+            <a:r>
+              <a:rPr sz="800">
+                <a:hlinkClick r:id="rId34"/>
+              </a:rPr>
+              <a:t>Lofar 2</a:t>
+            </a:r>
+          </a:p>
+          <a:p>
+            <a:r>
+              <a:rPr sz="800">
+                <a:hlinkClick r:id="rId35"/>
+              </a:rPr>
+              <a:t>Lofar 3</a:t>
+            </a:r>
+          </a:p>
+        </p:txBody>
+      </p:sp>
+      <p:sp>
+        <p:nvSpPr>
+          <p:cNvPr id="21" name="Rounded Rectangle 20">
+            <a:hlinkClick r:id="rId36"/>
+          </p:cNvPr>
+          <p:cNvSpPr/>
+          <p:nvPr/>
+        </p:nvSpPr>
+        <p:spPr>
+          <a:xfrm>
+            <a:off x="9531705" y="2682240"/>
+            <a:ext cx="2200046" cy="365760"/>
+          </a:xfrm>
+          <a:prstGeom prst="roundRect">
+            <a:avLst/>
+          </a:prstGeom>
+          <a:solidFill>
+            <a:srgbClr val="E8EEF7"/>
+          </a:solidFill>
+          <a:ln>
+            <a:solidFill>
+              <a:srgbClr val="1F3A5F"/>
+            </a:solidFill>
+          </a:ln>
+        </p:spPr>
+        <p:style>
+          <a:lnRef idx="1">
+            <a:schemeClr val="accent1"/>
+          </a:lnRef>
+          <a:fillRef idx="3">
+            <a:schemeClr val="accent1"/>
+          </a:fillRef>
+          <a:effectRef idx="2">
+            <a:schemeClr val="accent1"/>
+          </a:effectRef>
+          <a:fontRef idx="minor">
+            <a:schemeClr val="lt1"/>
+          </a:fontRef>
+        </p:style>
+        <p:txBody>
+          <a:bodyPr rtlCol="0" anchor="ctr" lIns="45720" rIns="45720"/>
+          <a:lstStyle/>
+          <a:p>
+            <a:pPr algn="ctr"/>
+            <a:r>
+              <a:rPr sz="900">
+                <a:solidFill>
+                  <a:srgbClr val="1F3A5F"/>
+                </a:solidFill>
+              </a:rPr>
+              <a:t>Gram 31: Lambda Shuttle, Category 3, Bajor</a:t>
+            </a:r>
+          </a:p>
+        </p:txBody>
+      </p:sp>
+      <p:sp>
+        <p:nvSpPr>
+          <p:cNvPr id="22" name="TextBox 21"/>
+          <p:cNvSpPr txBox="1"/>
+          <p:nvPr/>
+        </p:nvSpPr>
+        <p:spPr>
+          <a:xfrm>
+            <a:off x="9531705" y="3066288"/>
+            <a:ext cx="2200046" cy="1447800"/>
+          </a:xfrm>
+          <a:prstGeom prst="rect">
+            <a:avLst/>
+          </a:prstGeom>
+          <a:noFill/>
+        </p:spPr>
+        <p:txBody>
+          <a:bodyPr wrap="square">
+            <a:spAutoFit/>
+          </a:bodyPr>
+          <a:lstStyle/>
+          <a:p>
+            <a:r>
+              <a:rPr sz="800">
+                <a:hlinkClick r:id="rId37"/>
+              </a:rPr>
+              <a:t>Lofar 1</a:t>
+            </a:r>
+          </a:p>
+        </p:txBody>
+      </p:sp>
+      <p:sp>
+        <p:nvSpPr>
+          <p:cNvPr id="23" name="Rounded Rectangle 22">
+            <a:hlinkClick r:id="rId38"/>
+          </p:cNvPr>
+          <p:cNvSpPr/>
+          <p:nvPr/>
+        </p:nvSpPr>
+        <p:spPr>
+          <a:xfrm>
+            <a:off x="365760" y="4632960"/>
+            <a:ext cx="2200046" cy="365760"/>
+          </a:xfrm>
+          <a:prstGeom prst="roundRect">
+            <a:avLst/>
+          </a:prstGeom>
+          <a:solidFill>
+            <a:srgbClr val="E8EEF7"/>
+          </a:solidFill>
+          <a:ln>
+            <a:solidFill>
+              <a:srgbClr val="1F3A5F"/>
+            </a:solidFill>
+          </a:ln>
+        </p:spPr>
+        <p:style>
+          <a:lnRef idx="1">
+            <a:schemeClr val="accent1"/>
+          </a:lnRef>
+          <a:fillRef idx="3">
+            <a:schemeClr val="accent1"/>
+          </a:fillRef>
+          <a:effectRef idx="2">
+            <a:schemeClr val="accent1"/>
+          </a:effectRef>
+          <a:fontRef idx="minor">
+            <a:schemeClr val="lt1"/>
+          </a:fontRef>
+        </p:style>
+        <p:txBody>
+          <a:bodyPr rtlCol="0" anchor="ctr" lIns="45720" rIns="45720"/>
+          <a:lstStyle/>
+          <a:p>
+            <a:pPr algn="ctr"/>
+            <a:r>
+              <a:rPr sz="900">
+                <a:solidFill>
+                  <a:srgbClr val="1F3A5F"/>
+                </a:solidFill>
+              </a:rPr>
+              <a:t>Gram 32: Nebulon-B, Category 4, Cardassia</a:t>
+            </a:r>
+          </a:p>
+        </p:txBody>
+      </p:sp>
+      <p:sp>
+        <p:nvSpPr>
+          <p:cNvPr id="24" name="TextBox 23"/>
+          <p:cNvSpPr txBox="1"/>
+          <p:nvPr/>
+        </p:nvSpPr>
+        <p:spPr>
+          <a:xfrm>
+            <a:off x="365760" y="5017008"/>
+            <a:ext cx="2200046" cy="1447800"/>
+          </a:xfrm>
+          <a:prstGeom prst="rect">
+            <a:avLst/>
+          </a:prstGeom>
+          <a:noFill/>
+        </p:spPr>
+        <p:txBody>
+          <a:bodyPr wrap="square">
+            <a:spAutoFit/>
+          </a:bodyPr>
+          <a:lstStyle/>
+          <a:p>
+            <a:r>
+              <a:rPr sz="800">
+                <a:hlinkClick r:id="rId39"/>
+              </a:rPr>
+              <a:t>Lofar 1</a:t>
+            </a:r>
+          </a:p>
+          <a:p>
+            <a:r>
+              <a:rPr sz="800">
+                <a:hlinkClick r:id="rId40"/>
+              </a:rPr>
+              <a:t>Lofar 2</a:t>
+            </a:r>
+          </a:p>
+          <a:p>
+            <a:r>
+              <a:rPr sz="800">
+                <a:hlinkClick r:id="rId41"/>
+              </a:rPr>
+              <a:t>Lofar 3</a:t>
+            </a:r>
+          </a:p>
+          <a:p>
+            <a:r>
+              <a:rPr sz="800">
+                <a:hlinkClick r:id="rId42"/>
+              </a:rPr>
+              <a:t>Lofar 4</a:t>
+            </a:r>
+          </a:p>
+        </p:txBody>
+      </p:sp>
+      <p:sp>
+        <p:nvSpPr>
+          <p:cNvPr id="25" name="Rounded Rectangle 24">
+            <a:hlinkClick r:id="rId43"/>
+          </p:cNvPr>
+          <p:cNvSpPr/>
+          <p:nvPr/>
+        </p:nvSpPr>
+        <p:spPr>
+          <a:xfrm>
+            <a:off x="2657246" y="4632960"/>
+            <a:ext cx="2200046" cy="365760"/>
+          </a:xfrm>
+          <a:prstGeom prst="roundRect">
+            <a:avLst/>
+          </a:prstGeom>
+          <a:solidFill>
+            <a:srgbClr val="E8EEF7"/>
+          </a:solidFill>
+          <a:ln>
+            <a:solidFill>
+              <a:srgbClr val="1F3A5F"/>
+            </a:solidFill>
+          </a:ln>
+        </p:spPr>
+        <p:style>
+          <a:lnRef idx="1">
+            <a:schemeClr val="accent1"/>
+          </a:lnRef>
+          <a:fillRef idx="3">
+            <a:schemeClr val="accent1"/>
+          </a:fillRef>
+          <a:effectRef idx="2">
+            <a:schemeClr val="accent1"/>
+          </a:effectRef>
+          <a:fontRef idx="minor">
+            <a:schemeClr val="lt1"/>
+          </a:fontRef>
+        </p:style>
+        <p:txBody>
+          <a:bodyPr rtlCol="0" anchor="ctr" lIns="45720" rIns="45720"/>
+          <a:lstStyle/>
+          <a:p>
+            <a:pPr algn="ctr"/>
+            <a:r>
+              <a:rPr sz="900">
+                <a:solidFill>
+                  <a:srgbClr val="1F3A5F"/>
+                </a:solidFill>
+              </a:rPr>
+              <a:t>Gram 33: Prometheus, Category 3, Romulus</a:t>
+            </a:r>
+          </a:p>
+        </p:txBody>
+      </p:sp>
+      <p:sp>
+        <p:nvSpPr>
+          <p:cNvPr id="26" name="TextBox 25"/>
+          <p:cNvSpPr txBox="1"/>
+          <p:nvPr/>
+        </p:nvSpPr>
+        <p:spPr>
+          <a:xfrm>
+            <a:off x="2657246" y="5017008"/>
+            <a:ext cx="2200046" cy="1447800"/>
+          </a:xfrm>
+          <a:prstGeom prst="rect">
+            <a:avLst/>
+          </a:prstGeom>
+          <a:noFill/>
+        </p:spPr>
+        <p:txBody>
+          <a:bodyPr wrap="square">
+            <a:spAutoFit/>
+          </a:bodyPr>
+          <a:lstStyle/>
+          <a:p>
+            <a:r>
+              <a:rPr sz="800">
+                <a:hlinkClick r:id="rId44"/>
+              </a:rPr>
+              <a:t>Lofar 1</a:t>
+            </a:r>
+          </a:p>
+        </p:txBody>
+      </p:sp>
+      <p:sp>
+        <p:nvSpPr>
+          <p:cNvPr id="27" name="Rounded Rectangle 26">
+            <a:hlinkClick r:id="rId45"/>
+          </p:cNvPr>
+          <p:cNvSpPr/>
+          <p:nvPr/>
+        </p:nvSpPr>
+        <p:spPr>
+          <a:xfrm>
+            <a:off x="4948732" y="4632960"/>
+            <a:ext cx="2200046" cy="365760"/>
+          </a:xfrm>
+          <a:prstGeom prst="roundRect">
+            <a:avLst/>
+          </a:prstGeom>
+          <a:solidFill>
+            <a:srgbClr val="E8EEF7"/>
+          </a:solidFill>
+          <a:ln>
+            <a:solidFill>
+              <a:srgbClr val="1F3A5F"/>
+            </a:solidFill>
+          </a:ln>
+        </p:spPr>
+        <p:style>
+          <a:lnRef idx="1">
+            <a:schemeClr val="accent1"/>
+          </a:lnRef>
+          <a:fillRef idx="3">
+            <a:schemeClr val="accent1"/>
+          </a:fillRef>
+          <a:effectRef idx="2">
+            <a:schemeClr val="accent1"/>
+          </a:effectRef>
+          <a:fontRef idx="minor">
+            <a:schemeClr val="lt1"/>
+          </a:fontRef>
+        </p:style>
+        <p:txBody>
+          <a:bodyPr rtlCol="0" anchor="ctr" lIns="45720" rIns="45720"/>
+          <a:lstStyle/>
+          <a:p>
+            <a:pPr algn="ctr"/>
+            <a:r>
+              <a:rPr sz="900">
+                <a:solidFill>
+                  <a:srgbClr val="1F3A5F"/>
+                </a:solidFill>
+              </a:rPr>
+              <a:t>Gram 34: Miranda-class, Category 2, Dagobah</a:t>
+            </a:r>
+          </a:p>
+        </p:txBody>
+      </p:sp>
+      <p:sp>
+        <p:nvSpPr>
+          <p:cNvPr id="28" name="TextBox 27"/>
+          <p:cNvSpPr txBox="1"/>
+          <p:nvPr/>
+        </p:nvSpPr>
+        <p:spPr>
+          <a:xfrm>
+            <a:off x="4948732" y="5017008"/>
+            <a:ext cx="2200046" cy="1447800"/>
+          </a:xfrm>
+          <a:prstGeom prst="rect">
+            <a:avLst/>
+          </a:prstGeom>
+          <a:noFill/>
+        </p:spPr>
+        <p:txBody>
+          <a:bodyPr wrap="square">
+            <a:spAutoFit/>
+          </a:bodyPr>
+          <a:lstStyle/>
+          <a:p>
+            <a:r>
+              <a:rPr sz="800">
+                <a:hlinkClick r:id="rId46"/>
+              </a:rPr>
+              <a:t>Lofar 1</a:t>
+            </a:r>
+          </a:p>
+          <a:p>
+            <a:r>
+              <a:rPr sz="800">
+                <a:hlinkClick r:id="rId47"/>
+              </a:rPr>
+              <a:t>Lofar 2</a:t>
+            </a:r>
+          </a:p>
+          <a:p>
+            <a:r>
+              <a:rPr sz="800">
+                <a:hlinkClick r:id="rId48"/>
+              </a:rPr>
+              <a:t>Lofar 3</a:t>
+            </a:r>
+          </a:p>
+        </p:txBody>
+      </p:sp>
+      <p:sp>
+        <p:nvSpPr>
+          <p:cNvPr id="29" name="Rounded Rectangle 28">
+            <a:hlinkClick r:id="rId49"/>
+          </p:cNvPr>
+          <p:cNvSpPr/>
+          <p:nvPr/>
+        </p:nvSpPr>
+        <p:spPr>
+          <a:xfrm>
+            <a:off x="7240219" y="4632960"/>
+            <a:ext cx="2200046" cy="365760"/>
+          </a:xfrm>
+          <a:prstGeom prst="roundRect">
+            <a:avLst/>
+          </a:prstGeom>
+          <a:solidFill>
+            <a:srgbClr val="E8EEF7"/>
+          </a:solidFill>
+          <a:ln>
+            <a:solidFill>
+              <a:srgbClr val="1F3A5F"/>
+            </a:solidFill>
+          </a:ln>
+        </p:spPr>
+        <p:style>
+          <a:lnRef idx="1">
+            <a:schemeClr val="accent1"/>
+          </a:lnRef>
+          <a:fillRef idx="3">
+            <a:schemeClr val="accent1"/>
+          </a:fillRef>
+          <a:effectRef idx="2">
+            <a:schemeClr val="accent1"/>
+          </a:effectRef>
+          <a:fontRef idx="minor">
+            <a:schemeClr val="lt1"/>
+          </a:fontRef>
+        </p:style>
+        <p:txBody>
+          <a:bodyPr rtlCol="0" anchor="ctr" lIns="45720" rIns="45720"/>
+          <a:lstStyle/>
+          <a:p>
+            <a:pPr algn="ctr"/>
+            <a:r>
+              <a:rPr sz="900">
+                <a:solidFill>
+                  <a:srgbClr val="1F3A5F"/>
+                </a:solidFill>
+              </a:rPr>
+              <a:t>Gram 35: Nebulon-B, Category 4, Gandalf</a:t>
+            </a:r>
+          </a:p>
+        </p:txBody>
+      </p:sp>
+      <p:sp>
+        <p:nvSpPr>
+          <p:cNvPr id="30" name="TextBox 29"/>
+          <p:cNvSpPr txBox="1"/>
+          <p:nvPr/>
+        </p:nvSpPr>
+        <p:spPr>
+          <a:xfrm>
+            <a:off x="7240219" y="5017008"/>
+            <a:ext cx="2200046" cy="1447800"/>
+          </a:xfrm>
+          <a:prstGeom prst="rect">
+            <a:avLst/>
+          </a:prstGeom>
+          <a:noFill/>
+        </p:spPr>
+        <p:txBody>
+          <a:bodyPr wrap="square">
+            <a:spAutoFit/>
+          </a:bodyPr>
+          <a:lstStyle/>
+          <a:p>
+            <a:r>
+              <a:rPr sz="800">
+                <a:hlinkClick r:id="rId50"/>
+              </a:rPr>
+              <a:t>Lofar 1</a:t>
+            </a:r>
+          </a:p>
+        </p:txBody>
+      </p:sp>
+      <p:sp>
+        <p:nvSpPr>
+          <p:cNvPr id="31" name="Rounded Rectangle 30">
+            <a:hlinkClick r:id="rId51"/>
+          </p:cNvPr>
+          <p:cNvSpPr/>
+          <p:nvPr/>
+        </p:nvSpPr>
+        <p:spPr>
+          <a:xfrm>
+            <a:off x="9531705" y="4632960"/>
+            <a:ext cx="2200046" cy="365760"/>
+          </a:xfrm>
+          <a:prstGeom prst="roundRect">
+            <a:avLst/>
+          </a:prstGeom>
+          <a:solidFill>
+            <a:srgbClr val="E8EEF7"/>
+          </a:solidFill>
+          <a:ln>
+            <a:solidFill>
+              <a:srgbClr val="1F3A5F"/>
+            </a:solidFill>
+          </a:ln>
+        </p:spPr>
+        <p:style>
+          <a:lnRef idx="1">
+            <a:schemeClr val="accent1"/>
+          </a:lnRef>
+          <a:fillRef idx="3">
+            <a:schemeClr val="accent1"/>
+          </a:fillRef>
+          <a:effectRef idx="2">
+            <a:schemeClr val="accent1"/>
+          </a:effectRef>
+          <a:fontRef idx="minor">
+            <a:schemeClr val="lt1"/>
+          </a:fontRef>
+        </p:style>
+        <p:txBody>
+          <a:bodyPr rtlCol="0" anchor="ctr" lIns="45720" rIns="45720"/>
+          <a:lstStyle/>
+          <a:p>
+            <a:pPr algn="ctr"/>
+            <a:r>
+              <a:rPr sz="900">
+                <a:solidFill>
+                  <a:srgbClr val="1F3A5F"/>
+                </a:solidFill>
+              </a:rPr>
+              <a:t>Gram 36: Tantive IV contact bearing 226, codename Romulus</a:t>
+            </a:r>
+          </a:p>
+        </p:txBody>
+      </p:sp>
+      <p:sp>
+        <p:nvSpPr>
+          <p:cNvPr id="32" name="TextBox 31"/>
+          <p:cNvSpPr txBox="1"/>
+          <p:nvPr/>
+        </p:nvSpPr>
+        <p:spPr>
+          <a:xfrm>
+            <a:off x="9531705" y="5017008"/>
+            <a:ext cx="2200046" cy="1447800"/>
+          </a:xfrm>
+          <a:prstGeom prst="rect">
+            <a:avLst/>
+          </a:prstGeom>
+          <a:noFill/>
+        </p:spPr>
+        <p:txBody>
+          <a:bodyPr wrap="square">
+            <a:spAutoFit/>
+          </a:bodyPr>
+          <a:lstStyle/>
+          <a:p>
+            <a:r>
+              <a:rPr sz="800">
                 <a:hlinkClick r:id="rId52"/>
               </a:rPr>
               <a:t>Lofar 1</a:t>
@@ -6177,6 +6265,92 @@
                 <a:hlinkClick r:id="rId55"/>
               </a:rPr>
               <a:t>Lofar 4</a:t>
+            </a:r>
+          </a:p>
+        </p:txBody>
+      </p:sp>
+    </p:spTree>
+  </p:cSld>
+  <p:clrMapOvr>
+    <a:masterClrMapping/>
+  </p:clrMapOvr>
+</p:sld>
+</file>
+
+<file path=ppt/slides/slide4.xml><?xml version="1.0" encoding="utf-8"?>
+<p:sld xmlns:a="http://schemas.openxmlformats.org/drawingml/2006/main" xmlns:p="http://schemas.openxmlformats.org/presentationml/2006/main" xmlns:r="http://schemas.openxmlformats.org/officeDocument/2006/relationships">
+  <p:cSld>
+    <p:spTree>
+      <p:nvGrpSpPr>
+        <p:cNvPr id="1" name=""/>
+        <p:cNvGrpSpPr/>
+        <p:nvPr/>
+      </p:nvGrpSpPr>
+      <p:grpSpPr/>
+      <p:sp>
+        <p:nvSpPr>
+          <p:cNvPr id="2" name="TextBox 1"/>
+          <p:cNvSpPr txBox="1"/>
+          <p:nvPr/>
+        </p:nvSpPr>
+        <p:spPr>
+          <a:xfrm>
+            <a:off x="914400" y="2377440"/>
+            <a:ext cx="10360152" cy="1280160"/>
+          </a:xfrm>
+          <a:prstGeom prst="rect">
+            <a:avLst/>
+          </a:prstGeom>
+          <a:noFill/>
+        </p:spPr>
+        <p:txBody>
+          <a:bodyPr wrap="square">
+            <a:spAutoFit/>
+          </a:bodyPr>
+          <a:lstStyle/>
+          <a:p>
+            <a:pPr algn="ctr"/>
+            <a:r>
+              <a:rPr sz="4000" b="1">
+                <a:solidFill>
+                  <a:srgbClr val="1F3A5F"/>
+                </a:solidFill>
+              </a:rPr>
+              <a:t>End of Instructor Progress Test 3 Grams No FR</a:t>
+            </a:r>
+          </a:p>
+        </p:txBody>
+      </p:sp>
+      <p:sp>
+        <p:nvSpPr>
+          <p:cNvPr id="3" name="TextBox 2"/>
+          <p:cNvSpPr txBox="1"/>
+          <p:nvPr/>
+        </p:nvSpPr>
+        <p:spPr>
+          <a:xfrm>
+            <a:off x="914400" y="3840480"/>
+            <a:ext cx="10360152" cy="731520"/>
+          </a:xfrm>
+          <a:prstGeom prst="rect">
+            <a:avLst/>
+          </a:prstGeom>
+          <a:noFill/>
+        </p:spPr>
+        <p:txBody>
+          <a:bodyPr wrap="none">
+            <a:spAutoFit/>
+          </a:bodyPr>
+          <a:lstStyle/>
+          <a:p>
+            <a:pPr algn="ctr"/>
+            <a:r>
+              <a:rPr sz="2400">
+                <a:solidFill>
+                  <a:srgbClr val="1F3A5F"/>
+                </a:solidFill>
+              </a:rPr>
+              <a:t>Instructor Version</a:t>
             </a:r>
           </a:p>
         </p:txBody>
